--- a/docs/lecture_slides/Week 5/Week5_Lecture10_Slides_9_23_2026.pptx
+++ b/docs/lecture_slides/Week 5/Week5_Lecture10_Slides_9_23_2026.pptx
@@ -287,7 +287,7 @@
           <a:p>
             <a:fld id="{06882561-BD16-4A95-ACA1-5204E478F2FE}" type="datetimeFigureOut">
               <a:rPr lang="en-US" smtClean="0"/>
-              <a:t>9/22/2026</a:t>
+              <a:t>9/23/2026</a:t>
             </a:fld>
             <a:endParaRPr lang="en-US"/>
           </a:p>
@@ -485,7 +485,7 @@
           <a:p>
             <a:fld id="{06882561-BD16-4A95-ACA1-5204E478F2FE}" type="datetimeFigureOut">
               <a:rPr lang="en-US" smtClean="0"/>
-              <a:t>9/22/2026</a:t>
+              <a:t>9/23/2026</a:t>
             </a:fld>
             <a:endParaRPr lang="en-US"/>
           </a:p>
@@ -693,7 +693,7 @@
           <a:p>
             <a:fld id="{06882561-BD16-4A95-ACA1-5204E478F2FE}" type="datetimeFigureOut">
               <a:rPr lang="en-US" smtClean="0"/>
-              <a:t>9/22/2026</a:t>
+              <a:t>9/23/2026</a:t>
             </a:fld>
             <a:endParaRPr lang="en-US"/>
           </a:p>
@@ -891,7 +891,7 @@
           <a:p>
             <a:fld id="{06882561-BD16-4A95-ACA1-5204E478F2FE}" type="datetimeFigureOut">
               <a:rPr lang="en-US" smtClean="0"/>
-              <a:t>9/22/2026</a:t>
+              <a:t>9/23/2026</a:t>
             </a:fld>
             <a:endParaRPr lang="en-US"/>
           </a:p>
@@ -1166,7 +1166,7 @@
           <a:p>
             <a:fld id="{06882561-BD16-4A95-ACA1-5204E478F2FE}" type="datetimeFigureOut">
               <a:rPr lang="en-US" smtClean="0"/>
-              <a:t>9/22/2026</a:t>
+              <a:t>9/23/2026</a:t>
             </a:fld>
             <a:endParaRPr lang="en-US"/>
           </a:p>
@@ -1431,7 +1431,7 @@
           <a:p>
             <a:fld id="{06882561-BD16-4A95-ACA1-5204E478F2FE}" type="datetimeFigureOut">
               <a:rPr lang="en-US" smtClean="0"/>
-              <a:t>9/22/2026</a:t>
+              <a:t>9/23/2026</a:t>
             </a:fld>
             <a:endParaRPr lang="en-US"/>
           </a:p>
@@ -1843,7 +1843,7 @@
           <a:p>
             <a:fld id="{06882561-BD16-4A95-ACA1-5204E478F2FE}" type="datetimeFigureOut">
               <a:rPr lang="en-US" smtClean="0"/>
-              <a:t>9/22/2026</a:t>
+              <a:t>9/23/2026</a:t>
             </a:fld>
             <a:endParaRPr lang="en-US"/>
           </a:p>
@@ -1984,7 +1984,7 @@
           <a:p>
             <a:fld id="{06882561-BD16-4A95-ACA1-5204E478F2FE}" type="datetimeFigureOut">
               <a:rPr lang="en-US" smtClean="0"/>
-              <a:t>9/22/2026</a:t>
+              <a:t>9/23/2026</a:t>
             </a:fld>
             <a:endParaRPr lang="en-US"/>
           </a:p>
@@ -2097,7 +2097,7 @@
           <a:p>
             <a:fld id="{06882561-BD16-4A95-ACA1-5204E478F2FE}" type="datetimeFigureOut">
               <a:rPr lang="en-US" smtClean="0"/>
-              <a:t>9/22/2026</a:t>
+              <a:t>9/23/2026</a:t>
             </a:fld>
             <a:endParaRPr lang="en-US"/>
           </a:p>
@@ -2408,7 +2408,7 @@
           <a:p>
             <a:fld id="{06882561-BD16-4A95-ACA1-5204E478F2FE}" type="datetimeFigureOut">
               <a:rPr lang="en-US" smtClean="0"/>
-              <a:t>9/22/2026</a:t>
+              <a:t>9/23/2026</a:t>
             </a:fld>
             <a:endParaRPr lang="en-US"/>
           </a:p>
@@ -2696,7 +2696,7 @@
           <a:p>
             <a:fld id="{06882561-BD16-4A95-ACA1-5204E478F2FE}" type="datetimeFigureOut">
               <a:rPr lang="en-US" smtClean="0"/>
-              <a:t>9/22/2026</a:t>
+              <a:t>9/23/2026</a:t>
             </a:fld>
             <a:endParaRPr lang="en-US"/>
           </a:p>
@@ -2937,7 +2937,7 @@
           <a:p>
             <a:fld id="{06882561-BD16-4A95-ACA1-5204E478F2FE}" type="datetimeFigureOut">
               <a:rPr lang="en-US" smtClean="0"/>
-              <a:t>9/22/2026</a:t>
+              <a:t>9/23/2026</a:t>
             </a:fld>
             <a:endParaRPr lang="en-US"/>
           </a:p>
@@ -3586,6 +3586,21 @@
               </a:spcAft>
             </a:pPr>
             <a:r>
+              <a:rPr lang="en-US" sz="1600">
+                <a:solidFill>
+                  <a:srgbClr val="000000"/>
+                </a:solidFill>
+              </a:rPr>
+              <a:t>Since then, better-adjusted studies point the other way: 5+ cups a day went with less cirrhosis and liver cancer (UK Biobank, 2026), and the AHA (2026) finds coffee either unrelated to or associated with LOWER heart disease</a:t>
+            </a:r>
+          </a:p>
+          <a:p>
+            <a:pPr>
+              <a:spcAft>
+                <a:spcPts val="800"/>
+              </a:spcAft>
+            </a:pPr>
+            <a:r>
               <a:rPr lang="en-US" sz="1600" b="1">
                 <a:solidFill>
                   <a:srgbClr val="1F3864"/>
@@ -3703,7 +3718,7 @@
                   <a:srgbClr val="595959"/>
                 </a:solidFill>
               </a:rPr>
-              <a:t>Source: Freedman et al. (2012), New England Journal of Medicine</a:t>
+              <a:t>Sources: Freedman et al. (2012), NEJM; Kim et al. (2026), Clin Gastroenterol Hepatol; Marcus et al. (2026), Circulation</a:t>
             </a:r>
           </a:p>
         </p:txBody>

--- a/docs/lecture_slides/Week 5/Week5_Lecture10_Slides_9_23_2026.pptx
+++ b/docs/lecture_slides/Week 5/Week5_Lecture10_Slides_9_23_2026.pptx
@@ -5,10 +5,10 @@
     <p:sldMasterId id="2147483648" r:id="rId1"/>
   </p:sldMasterIdLst>
   <p:sldIdLst>
-    <p:sldId id="256" r:id="rId2"/>
-    <p:sldId id="284" r:id="rId3"/>
-    <p:sldId id="285" r:id="rId4"/>
-    <p:sldId id="286" r:id="rId5"/>
+    <p:sldId id="316" r:id="rId2"/>
+    <p:sldId id="256" r:id="rId3"/>
+    <p:sldId id="257" r:id="rId4"/>
+    <p:sldId id="315" r:id="rId5"/>
     <p:sldId id="287" r:id="rId6"/>
     <p:sldId id="288" r:id="rId7"/>
     <p:sldId id="289" r:id="rId8"/>
@@ -28,12 +28,11 @@
     <p:sldId id="300" r:id="rId22"/>
     <p:sldId id="301" r:id="rId23"/>
     <p:sldId id="302" r:id="rId24"/>
-    <p:sldId id="303" r:id="rId25"/>
-    <p:sldId id="304" r:id="rId26"/>
-    <p:sldId id="305" r:id="rId27"/>
-    <p:sldId id="306" r:id="rId28"/>
-    <p:sldId id="307" r:id="rId29"/>
-    <p:sldId id="308" r:id="rId30"/>
+    <p:sldId id="304" r:id="rId25"/>
+    <p:sldId id="305" r:id="rId26"/>
+    <p:sldId id="306" r:id="rId27"/>
+    <p:sldId id="307" r:id="rId28"/>
+    <p:sldId id="308" r:id="rId29"/>
   </p:sldIdLst>
   <p:sldSz cx="12192000" cy="6858000"/>
   <p:notesSz cx="6858000" cy="9144000"/>
@@ -3360,7 +3359,7 @@
           <p:cNvPr id="2" name="Title 1">
             <a:extLst>
               <a:ext uri="{FF2B5EF4-FFF2-40B4-BE49-F238E27FC236}">
-                <a16:creationId xmlns:a16="http://schemas.microsoft.com/office/drawing/2014/main" id="{7B2F151A-3AFE-974F-DDC4-9B99389C348D}"/>
+                <a16:creationId xmlns:a16="http://schemas.microsoft.com/office/drawing/2014/main" id="{5B450292-D21D-628F-C2B6-D90B9686807F}"/>
               </a:ext>
             </a:extLst>
           </p:cNvPr>
@@ -3368,56 +3367,72 @@
             <a:spLocks noGrp="1"/>
           </p:cNvSpPr>
           <p:nvPr>
-            <p:ph type="ctrTitle"/>
+            <p:ph type="title"/>
           </p:nvPr>
         </p:nvSpPr>
         <p:spPr>
           <a:xfrm>
-            <a:off x="1524000" y="1122362"/>
-            <a:ext cx="9144000" cy="4105419"/>
+            <a:off x="838200" y="76200"/>
+            <a:ext cx="10515600" cy="558800"/>
           </a:xfrm>
         </p:spPr>
         <p:txBody>
-          <a:bodyPr>
+          <a:bodyPr anchor="ctr">
             <a:noAutofit/>
           </a:bodyPr>
           <a:lstStyle/>
           <a:p>
             <a:r>
-              <a:rPr lang="en-US">
+              <a:rPr lang="en-US" sz="3200">
                 <a:solidFill>
                   <a:srgbClr val="1F3864"/>
                 </a:solidFill>
               </a:rPr>
-              <a:t>Lecture 10</a:t>
-            </a:r>
-            <a:br>
-              <a:rPr lang="en-US">
-                <a:solidFill>
-                  <a:srgbClr val="1F3864"/>
-                </a:solidFill>
-              </a:rPr>
-            </a:br>
-            <a:r>
-              <a:rPr lang="en-US">
-                <a:solidFill>
-                  <a:srgbClr val="1F3864"/>
-                </a:solidFill>
-              </a:rPr>
-              <a:t>Experiments and Causation</a:t>
-            </a:r>
-            <a:endParaRPr lang="en-US" dirty="0">
-              <a:solidFill>
-                <a:srgbClr val="1F3864"/>
-              </a:solidFill>
-            </a:endParaRPr>
-          </a:p>
-        </p:txBody>
-      </p:sp>
+              <a:t>Exam 1 results</a:t>
+            </a:r>
+          </a:p>
+        </p:txBody>
+      </p:sp>
+      <p:pic>
+        <p:nvPicPr>
+          <p:cNvPr id="5" name="exam1_score_histogram.png">
+            <a:extLst>
+              <a:ext uri="{FF2B5EF4-FFF2-40B4-BE49-F238E27FC236}">
+                <a16:creationId xmlns:a16="http://schemas.microsoft.com/office/drawing/2014/main" id="{291EB172-1D5E-D17F-5E3F-B22BD3C76D57}"/>
+              </a:ext>
+            </a:extLst>
+          </p:cNvPr>
+          <p:cNvPicPr>
+            <a:picLocks/>
+          </p:cNvPicPr>
+          <p:nvPr/>
+        </p:nvPicPr>
+        <p:blipFill>
+          <a:blip r:embed="rId2">
+            <a:extLst>
+              <a:ext uri="{28A0092B-C50C-407E-A947-70E740481C1C}">
+                <a14:useLocalDpi xmlns:a14="http://schemas.microsoft.com/office/drawing/2010/main" val="0"/>
+              </a:ext>
+            </a:extLst>
+          </a:blip>
+          <a:stretch>
+            <a:fillRect/>
+          </a:stretch>
+        </p:blipFill>
+        <p:spPr>
+          <a:xfrm>
+            <a:off x="1058333" y="711200"/>
+            <a:ext cx="10075333" cy="6045200"/>
+          </a:xfrm>
+          <a:prstGeom prst="rect">
+            <a:avLst/>
+          </a:prstGeom>
+        </p:spPr>
+      </p:pic>
     </p:spTree>
     <p:extLst>
       <p:ext uri="{BB962C8B-B14F-4D97-AF65-F5344CB8AC3E}">
-        <p14:creationId xmlns:p14="http://schemas.microsoft.com/office/powerpoint/2010/main" val="2537153441"/>
+        <p14:creationId xmlns:p14="http://schemas.microsoft.com/office/powerpoint/2010/main" val="4014130826"/>
       </p:ext>
     </p:extLst>
   </p:cSld>
@@ -11833,7 +11848,7 @@
           <p:cNvPr id="2" name="Title 1">
             <a:extLst>
               <a:ext uri="{FF2B5EF4-FFF2-40B4-BE49-F238E27FC236}">
-                <a16:creationId xmlns:a16="http://schemas.microsoft.com/office/drawing/2014/main" id="{BF2BC30F-FE23-34A2-8070-9BE65D2DF063}"/>
+                <a16:creationId xmlns:a16="http://schemas.microsoft.com/office/drawing/2014/main" id="{7B2F151A-3AFE-974F-DDC4-9B99389C348D}"/>
               </a:ext>
             </a:extLst>
           </p:cNvPr>
@@ -11841,10 +11856,15 @@
             <a:spLocks noGrp="1"/>
           </p:cNvSpPr>
           <p:nvPr>
-            <p:ph type="title"/>
+            <p:ph type="ctrTitle"/>
           </p:nvPr>
         </p:nvSpPr>
-        <p:spPr/>
+        <p:spPr>
+          <a:xfrm>
+            <a:off x="1524000" y="1122362"/>
+            <a:ext cx="9144000" cy="4105419"/>
+          </a:xfrm>
+        </p:spPr>
         <p:txBody>
           <a:bodyPr>
             <a:noAutofit/>
@@ -11857,618 +11877,41 @@
                   <a:srgbClr val="1F3864"/>
                 </a:solidFill>
               </a:rPr>
-              <a:t>Nonresponse: when nobody picks up</a:t>
-            </a:r>
-          </a:p>
-        </p:txBody>
-      </p:sp>
-      <p:sp>
-        <p:nvSpPr>
-          <p:cNvPr id="4" name="Slide Number Placeholder 3">
-            <a:extLst>
-              <a:ext uri="{FF2B5EF4-FFF2-40B4-BE49-F238E27FC236}">
-                <a16:creationId xmlns:a16="http://schemas.microsoft.com/office/drawing/2014/main" id="{3B7E6F44-2A76-793A-043A-08A9FB8E26EB}"/>
-              </a:ext>
-            </a:extLst>
-          </p:cNvPr>
-          <p:cNvSpPr>
-            <a:spLocks noGrp="1"/>
-          </p:cNvSpPr>
-          <p:nvPr>
-            <p:ph type="sldNum" sz="quarter" idx="12"/>
-          </p:nvPr>
-        </p:nvSpPr>
-        <p:spPr/>
-        <p:txBody>
-          <a:bodyPr/>
-          <a:lstStyle/>
-          <a:p>
-            <a:fld id="{A80A81DD-F10A-4B1C-963A-0ABBB4865886}" type="slidenum">
-              <a:rPr lang="en-US" sz="1600" smtClean="0"/>
-              <a:t>2</a:t>
-            </a:fld>
-            <a:endParaRPr lang="en-US" sz="1600"/>
-          </a:p>
-        </p:txBody>
-      </p:sp>
-      <p:sp>
-        <p:nvSpPr>
-          <p:cNvPr id="5" name="TextBox 4">
-            <a:extLst>
-              <a:ext uri="{FF2B5EF4-FFF2-40B4-BE49-F238E27FC236}">
-                <a16:creationId xmlns:a16="http://schemas.microsoft.com/office/drawing/2014/main" id="{A22ADB7B-1189-1655-8200-D65A4A1F9291}"/>
-              </a:ext>
-            </a:extLst>
-          </p:cNvPr>
-          <p:cNvSpPr txBox="1"/>
-          <p:nvPr/>
-        </p:nvSpPr>
-        <p:spPr>
-          <a:xfrm>
-            <a:off x="762000" y="1841500"/>
-            <a:ext cx="10668000" cy="345440"/>
-          </a:xfrm>
-          <a:prstGeom prst="rect">
-            <a:avLst/>
-          </a:prstGeom>
-          <a:noFill/>
-        </p:spPr>
-        <p:txBody>
-          <a:bodyPr vert="horz" wrap="square" rtlCol="0">
-            <a:noAutofit/>
-          </a:bodyPr>
-          <a:lstStyle/>
-          <a:p>
-            <a:pPr>
-              <a:spcAft>
-                <a:spcPts val="400"/>
-              </a:spcAft>
-            </a:pPr>
-            <a:r>
-              <a:rPr lang="en-US" sz="1600">
-                <a:solidFill>
-                  <a:srgbClr val="000000"/>
-                </a:solidFill>
-              </a:rPr>
-              <a:t>Pew Research Center reached 36% of the people it called for its phone surveys in 1997. By 2018 it reached 6%.</a:t>
-            </a:r>
-          </a:p>
-        </p:txBody>
-      </p:sp>
-      <p:sp>
-        <p:nvSpPr>
-          <p:cNvPr id="6" name="TextBox 5">
-            <a:extLst>
-              <a:ext uri="{FF2B5EF4-FFF2-40B4-BE49-F238E27FC236}">
-                <a16:creationId xmlns:a16="http://schemas.microsoft.com/office/drawing/2014/main" id="{7D8F050F-9CE6-CDAA-2EA3-4E0A75A555B8}"/>
-              </a:ext>
-            </a:extLst>
-          </p:cNvPr>
-          <p:cNvSpPr txBox="1"/>
-          <p:nvPr/>
-        </p:nvSpPr>
-        <p:spPr>
-          <a:xfrm>
-            <a:off x="762000" y="2313940"/>
-            <a:ext cx="10668000" cy="345440"/>
-          </a:xfrm>
-          <a:prstGeom prst="rect">
-            <a:avLst/>
-          </a:prstGeom>
-          <a:noFill/>
-        </p:spPr>
-        <p:txBody>
-          <a:bodyPr vert="horz" wrap="square" rtlCol="0">
-            <a:noAutofit/>
-          </a:bodyPr>
-          <a:lstStyle/>
-          <a:p>
-            <a:pPr marL="304800" indent="-304800"/>
-            <a:r>
-              <a:rPr lang="en-US" sz="1600" b="1">
-                <a:solidFill>
-                  <a:srgbClr val="C00000"/>
-                </a:solidFill>
-              </a:rPr>
-              <a:t>1.</a:t>
-            </a:r>
-            <a:r>
-              <a:rPr lang="en-US" sz="1600">
-                <a:solidFill>
-                  <a:srgbClr val="000000"/>
-                </a:solidFill>
-              </a:rPr>
-              <a:t>  Does a 6% response rate automatically make a survey biased?</a:t>
-            </a:r>
-          </a:p>
-        </p:txBody>
-      </p:sp>
-      <p:sp>
-        <p:nvSpPr>
-          <p:cNvPr id="7" name="TextBox 6">
-            <a:extLst>
-              <a:ext uri="{FF2B5EF4-FFF2-40B4-BE49-F238E27FC236}">
-                <a16:creationId xmlns:a16="http://schemas.microsoft.com/office/drawing/2014/main" id="{C9EBAA9D-EED2-9FEE-FC7C-BEBC1EB5614F}"/>
-              </a:ext>
-            </a:extLst>
-          </p:cNvPr>
-          <p:cNvSpPr txBox="1"/>
-          <p:nvPr/>
-        </p:nvSpPr>
-        <p:spPr>
-          <a:xfrm>
-            <a:off x="1117600" y="2608580"/>
-            <a:ext cx="10312400" cy="345440"/>
-          </a:xfrm>
-          <a:prstGeom prst="rect">
-            <a:avLst/>
-          </a:prstGeom>
-          <a:noFill/>
-        </p:spPr>
-        <p:txBody>
-          <a:bodyPr vert="horz" wrap="square" rtlCol="0">
-            <a:noAutofit/>
-          </a:bodyPr>
-          <a:lstStyle/>
-          <a:p>
-            <a:r>
-              <a:rPr lang="en-US" sz="1600" b="1">
-                <a:solidFill>
-                  <a:srgbClr val="C00000"/>
-                </a:solidFill>
-              </a:rPr>
-              <a:t>No - only if the people who answer differ from the people who do not. The trouble is that you usually cannot check.</a:t>
-            </a:r>
-          </a:p>
-        </p:txBody>
-      </p:sp>
-      <p:sp>
-        <p:nvSpPr>
-          <p:cNvPr id="8" name="TextBox 7">
-            <a:extLst>
-              <a:ext uri="{FF2B5EF4-FFF2-40B4-BE49-F238E27FC236}">
-                <a16:creationId xmlns:a16="http://schemas.microsoft.com/office/drawing/2014/main" id="{B859F6C6-619A-EC51-149D-30AF04709744}"/>
-              </a:ext>
-            </a:extLst>
-          </p:cNvPr>
-          <p:cNvSpPr txBox="1"/>
-          <p:nvPr/>
-        </p:nvSpPr>
-        <p:spPr>
-          <a:xfrm>
-            <a:off x="762000" y="3106419"/>
-            <a:ext cx="10668000" cy="589280"/>
-          </a:xfrm>
-          <a:prstGeom prst="rect">
-            <a:avLst/>
-          </a:prstGeom>
-          <a:noFill/>
-        </p:spPr>
-        <p:txBody>
-          <a:bodyPr vert="horz" wrap="square" rtlCol="0">
-            <a:noAutofit/>
-          </a:bodyPr>
-          <a:lstStyle/>
-          <a:p>
-            <a:pPr marL="304800" indent="-304800"/>
-            <a:r>
-              <a:rPr lang="en-US" sz="1600" b="1">
-                <a:solidFill>
-                  <a:srgbClr val="C00000"/>
-                </a:solidFill>
-              </a:rPr>
-              <a:t>2.</a:t>
-            </a:r>
-            <a:r>
-              <a:rPr lang="en-US" sz="1600">
-                <a:solidFill>
-                  <a:srgbClr val="000000"/>
-                </a:solidFill>
-              </a:rPr>
-              <a:t>  In 2020, national polls in the final two weeks overstated Biden's margin by 3.9 points on average - the largest error in 40 years. What could cause that?</a:t>
-            </a:r>
-          </a:p>
-        </p:txBody>
-      </p:sp>
-      <p:sp>
-        <p:nvSpPr>
-          <p:cNvPr id="9" name="TextBox 8">
-            <a:extLst>
-              <a:ext uri="{FF2B5EF4-FFF2-40B4-BE49-F238E27FC236}">
-                <a16:creationId xmlns:a16="http://schemas.microsoft.com/office/drawing/2014/main" id="{6D4CF00F-69F2-2D2C-C726-EC572859921B}"/>
-              </a:ext>
-            </a:extLst>
-          </p:cNvPr>
-          <p:cNvSpPr txBox="1"/>
-          <p:nvPr/>
-        </p:nvSpPr>
-        <p:spPr>
-          <a:xfrm>
-            <a:off x="1117600" y="3644899"/>
-            <a:ext cx="10312400" cy="589280"/>
-          </a:xfrm>
-          <a:prstGeom prst="rect">
-            <a:avLst/>
-          </a:prstGeom>
-          <a:noFill/>
-        </p:spPr>
-        <p:txBody>
-          <a:bodyPr vert="horz" wrap="square" rtlCol="0">
-            <a:noAutofit/>
-          </a:bodyPr>
-          <a:lstStyle/>
-          <a:p>
-            <a:r>
-              <a:rPr lang="en-US" sz="1600" b="1">
-                <a:solidFill>
-                  <a:srgbClr val="C00000"/>
-                </a:solidFill>
-              </a:rPr>
-              <a:t>The pollsters' own task force concluded that at least some of the error came from nonresponse: the people who answered differed from those who did not.</a:t>
-            </a:r>
-          </a:p>
-        </p:txBody>
-      </p:sp>
-      <p:sp>
-        <p:nvSpPr>
-          <p:cNvPr id="10" name="TextBox 9">
-            <a:extLst>
-              <a:ext uri="{FF2B5EF4-FFF2-40B4-BE49-F238E27FC236}">
-                <a16:creationId xmlns:a16="http://schemas.microsoft.com/office/drawing/2014/main" id="{4E885E25-6555-D74C-5812-4A01CD2716EB}"/>
-              </a:ext>
-            </a:extLst>
-          </p:cNvPr>
-          <p:cNvSpPr txBox="1"/>
-          <p:nvPr/>
-        </p:nvSpPr>
-        <p:spPr>
-          <a:xfrm>
-            <a:off x="762000" y="6045200"/>
-            <a:ext cx="10668000" cy="345440"/>
-          </a:xfrm>
-          <a:prstGeom prst="rect">
-            <a:avLst/>
-          </a:prstGeom>
-          <a:noFill/>
-        </p:spPr>
-        <p:txBody>
-          <a:bodyPr vert="horz" wrap="square" rtlCol="0">
-            <a:noAutofit/>
-          </a:bodyPr>
-          <a:lstStyle/>
-          <a:p>
-            <a:pPr algn="r"/>
-            <a:r>
-              <a:rPr lang="en-US" sz="1600" i="1">
-                <a:solidFill>
-                  <a:srgbClr val="595959"/>
-                </a:solidFill>
-              </a:rPr>
-              <a:t>Sources: Pew Research Center (2019); AAPOR Task Force on 2020 Pre-Election Polling (2021)</a:t>
-            </a:r>
-          </a:p>
-        </p:txBody>
-      </p:sp>
-      <p:sp>
-        <p:nvSpPr>
-          <p:cNvPr id="3" name="Title rule">
-            <a:extLst>
-              <a:ext uri="{FF2B5EF4-FFF2-40B4-BE49-F238E27FC236}">
-                <a16:creationId xmlns:a16="http://schemas.microsoft.com/office/drawing/2014/main" id="{185388C1-F6C9-2CC5-12C3-4EE502AE9F3C}"/>
-              </a:ext>
-            </a:extLst>
-          </p:cNvPr>
-          <p:cNvSpPr/>
-          <p:nvPr/>
-        </p:nvSpPr>
-        <p:spPr>
-          <a:xfrm>
-            <a:off x="838200" y="1600200"/>
-            <a:ext cx="10515600" cy="38100"/>
-          </a:xfrm>
-          <a:prstGeom prst="rect">
-            <a:avLst/>
-          </a:prstGeom>
-          <a:solidFill>
-            <a:srgbClr val="4472C4"/>
-          </a:solidFill>
-          <a:ln w="12700" cap="flat" cmpd="sng" algn="ctr">
-            <a:noFill/>
-            <a:prstDash val="solid"/>
-            <a:miter lim="800000"/>
-          </a:ln>
-          <a:effectLst/>
-          <a:extLst>
-            <a:ext uri="{91240B29-F687-4F45-9708-019B960494DF}">
-              <a14:hiddenLine xmlns:a14="http://schemas.microsoft.com/office/drawing/2010/main" w="12700" cap="flat" cmpd="sng" algn="ctr">
-                <a:solidFill>
-                  <a:schemeClr val="accent1">
-                    <a:shade val="15000"/>
-                  </a:schemeClr>
-                </a:solidFill>
-                <a:prstDash val="solid"/>
-                <a:miter lim="800000"/>
-              </a14:hiddenLine>
-            </a:ext>
-          </a:extLst>
-        </p:spPr>
-        <p:style>
-          <a:lnRef idx="2">
-            <a:schemeClr val="accent1">
-              <a:shade val="15000"/>
-            </a:schemeClr>
-          </a:lnRef>
-          <a:fillRef idx="1">
-            <a:schemeClr val="accent1"/>
-          </a:fillRef>
-          <a:effectRef idx="0">
-            <a:schemeClr val="accent1"/>
-          </a:effectRef>
-          <a:fontRef idx="minor">
-            <a:schemeClr val="lt1"/>
-          </a:fontRef>
-        </p:style>
-        <p:txBody>
-          <a:bodyPr rtlCol="0" anchor="ctr"/>
-          <a:lstStyle/>
-          <a:p>
-            <a:pPr algn="ctr"/>
-            <a:endParaRPr lang="en-US"/>
+              <a:t>Lecture 10</a:t>
+            </a:r>
+            <a:br>
+              <a:rPr lang="en-US">
+                <a:solidFill>
+                  <a:srgbClr val="1F3864"/>
+                </a:solidFill>
+              </a:rPr>
+            </a:br>
+            <a:r>
+              <a:rPr lang="en-US">
+                <a:solidFill>
+                  <a:srgbClr val="1F3864"/>
+                </a:solidFill>
+              </a:rPr>
+              <a:t>Experiments and Causation</a:t>
+            </a:r>
+            <a:endParaRPr lang="en-US" dirty="0">
+              <a:solidFill>
+                <a:srgbClr val="1F3864"/>
+              </a:solidFill>
+            </a:endParaRPr>
           </a:p>
         </p:txBody>
       </p:sp>
     </p:spTree>
     <p:extLst>
       <p:ext uri="{BB962C8B-B14F-4D97-AF65-F5344CB8AC3E}">
-        <p14:creationId xmlns:p14="http://schemas.microsoft.com/office/powerpoint/2010/main" val="1596076635"/>
+        <p14:creationId xmlns:p14="http://schemas.microsoft.com/office/powerpoint/2010/main" val="2537153441"/>
       </p:ext>
     </p:extLst>
   </p:cSld>
   <p:clrMapOvr>
     <a:masterClrMapping/>
   </p:clrMapOvr>
-  <p:timing>
-    <p:tnLst>
-      <p:par>
-        <p:cTn id="1" dur="indefinite" restart="never" nodeType="tmRoot">
-          <p:childTnLst>
-            <p:seq concurrent="1" nextAc="seek">
-              <p:cTn id="2" dur="indefinite" nodeType="mainSeq">
-                <p:childTnLst>
-                  <p:par>
-                    <p:cTn id="3" fill="hold">
-                      <p:stCondLst>
-                        <p:cond delay="indefinite"/>
-                      </p:stCondLst>
-                      <p:childTnLst>
-                        <p:par>
-                          <p:cTn id="4" fill="hold">
-                            <p:stCondLst>
-                              <p:cond delay="0"/>
-                            </p:stCondLst>
-                            <p:childTnLst>
-                              <p:par>
-                                <p:cTn id="5" presetID="34" presetClass="entr" presetSubtype="0" fill="hold" grpId="0" nodeType="clickEffect">
-                                  <p:stCondLst>
-                                    <p:cond delay="0"/>
-                                  </p:stCondLst>
-                                  <p:childTnLst>
-                                    <p:set>
-                                      <p:cBhvr>
-                                        <p:cTn id="6" dur="1" fill="hold">
-                                          <p:stCondLst>
-                                            <p:cond delay="0"/>
-                                          </p:stCondLst>
-                                        </p:cTn>
-                                        <p:tgtEl>
-                                          <p:spTgt spid="7"/>
-                                        </p:tgtEl>
-                                        <p:attrNameLst>
-                                          <p:attrName>style.visibility</p:attrName>
-                                        </p:attrNameLst>
-                                      </p:cBhvr>
-                                      <p:to>
-                                        <p:strVal val="visible"/>
-                                      </p:to>
-                                    </p:set>
-                                    <p:anim from="(-#ppt_w/2)" to="(#ppt_x)" calcmode="lin" valueType="num">
-                                      <p:cBhvr>
-                                        <p:cTn id="7" dur="600" fill="hold">
-                                          <p:stCondLst>
-                                            <p:cond delay="0"/>
-                                          </p:stCondLst>
-                                        </p:cTn>
-                                        <p:tgtEl>
-                                          <p:spTgt spid="7"/>
-                                        </p:tgtEl>
-                                        <p:attrNameLst>
-                                          <p:attrName>ppt_x</p:attrName>
-                                        </p:attrNameLst>
-                                      </p:cBhvr>
-                                    </p:anim>
-                                    <p:anim from="0" to="-1.0" calcmode="lin" valueType="num">
-                                      <p:cBhvr>
-                                        <p:cTn id="8" dur="200" decel="50000" autoRev="1" fill="hold">
-                                          <p:stCondLst>
-                                            <p:cond delay="600"/>
-                                          </p:stCondLst>
-                                        </p:cTn>
-                                        <p:tgtEl>
-                                          <p:spTgt spid="7"/>
-                                        </p:tgtEl>
-                                        <p:attrNameLst>
-                                          <p:attrName>xshear</p:attrName>
-                                        </p:attrNameLst>
-                                      </p:cBhvr>
-                                    </p:anim>
-                                    <p:animScale>
-                                      <p:cBhvr>
-                                        <p:cTn id="9" dur="200" decel="100000" autoRev="1" fill="hold">
-                                          <p:stCondLst>
-                                            <p:cond delay="600"/>
-                                          </p:stCondLst>
-                                        </p:cTn>
-                                        <p:tgtEl>
-                                          <p:spTgt spid="7"/>
-                                        </p:tgtEl>
-                                      </p:cBhvr>
-                                      <p:from x="100000" y="100000"/>
-                                      <p:to x="80000" y="100000"/>
-                                    </p:animScale>
-                                    <p:anim by="(#ppt_h/3+#ppt_w*0.1)" calcmode="lin" valueType="num">
-                                      <p:cBhvr additive="sum">
-                                        <p:cTn id="10" dur="200" decel="100000" autoRev="1" fill="hold">
-                                          <p:stCondLst>
-                                            <p:cond delay="600"/>
-                                          </p:stCondLst>
-                                        </p:cTn>
-                                        <p:tgtEl>
-                                          <p:spTgt spid="7"/>
-                                        </p:tgtEl>
-                                        <p:attrNameLst>
-                                          <p:attrName>ppt_x</p:attrName>
-                                        </p:attrNameLst>
-                                      </p:cBhvr>
-                                    </p:anim>
-                                  </p:childTnLst>
-                                </p:cTn>
-                              </p:par>
-                            </p:childTnLst>
-                          </p:cTn>
-                        </p:par>
-                      </p:childTnLst>
-                    </p:cTn>
-                  </p:par>
-                  <p:par>
-                    <p:cTn id="11" fill="hold">
-                      <p:stCondLst>
-                        <p:cond delay="indefinite"/>
-                      </p:stCondLst>
-                      <p:childTnLst>
-                        <p:par>
-                          <p:cTn id="12" fill="hold">
-                            <p:stCondLst>
-                              <p:cond delay="0"/>
-                            </p:stCondLst>
-                            <p:childTnLst>
-                              <p:par>
-                                <p:cTn id="13" presetID="34" presetClass="entr" presetSubtype="0" fill="hold" grpId="0" nodeType="clickEffect">
-                                  <p:stCondLst>
-                                    <p:cond delay="0"/>
-                                  </p:stCondLst>
-                                  <p:childTnLst>
-                                    <p:set>
-                                      <p:cBhvr>
-                                        <p:cTn id="14" dur="1" fill="hold">
-                                          <p:stCondLst>
-                                            <p:cond delay="0"/>
-                                          </p:stCondLst>
-                                        </p:cTn>
-                                        <p:tgtEl>
-                                          <p:spTgt spid="9"/>
-                                        </p:tgtEl>
-                                        <p:attrNameLst>
-                                          <p:attrName>style.visibility</p:attrName>
-                                        </p:attrNameLst>
-                                      </p:cBhvr>
-                                      <p:to>
-                                        <p:strVal val="visible"/>
-                                      </p:to>
-                                    </p:set>
-                                    <p:anim from="(-#ppt_w/2)" to="(#ppt_x)" calcmode="lin" valueType="num">
-                                      <p:cBhvr>
-                                        <p:cTn id="15" dur="600" fill="hold">
-                                          <p:stCondLst>
-                                            <p:cond delay="0"/>
-                                          </p:stCondLst>
-                                        </p:cTn>
-                                        <p:tgtEl>
-                                          <p:spTgt spid="9"/>
-                                        </p:tgtEl>
-                                        <p:attrNameLst>
-                                          <p:attrName>ppt_x</p:attrName>
-                                        </p:attrNameLst>
-                                      </p:cBhvr>
-                                    </p:anim>
-                                    <p:anim from="0" to="-1.0" calcmode="lin" valueType="num">
-                                      <p:cBhvr>
-                                        <p:cTn id="16" dur="200" decel="50000" autoRev="1" fill="hold">
-                                          <p:stCondLst>
-                                            <p:cond delay="600"/>
-                                          </p:stCondLst>
-                                        </p:cTn>
-                                        <p:tgtEl>
-                                          <p:spTgt spid="9"/>
-                                        </p:tgtEl>
-                                        <p:attrNameLst>
-                                          <p:attrName>xshear</p:attrName>
-                                        </p:attrNameLst>
-                                      </p:cBhvr>
-                                    </p:anim>
-                                    <p:animScale>
-                                      <p:cBhvr>
-                                        <p:cTn id="17" dur="200" decel="100000" autoRev="1" fill="hold">
-                                          <p:stCondLst>
-                                            <p:cond delay="600"/>
-                                          </p:stCondLst>
-                                        </p:cTn>
-                                        <p:tgtEl>
-                                          <p:spTgt spid="9"/>
-                                        </p:tgtEl>
-                                      </p:cBhvr>
-                                      <p:from x="100000" y="100000"/>
-                                      <p:to x="80000" y="100000"/>
-                                    </p:animScale>
-                                    <p:anim by="(#ppt_h/3+#ppt_w*0.1)" calcmode="lin" valueType="num">
-                                      <p:cBhvr additive="sum">
-                                        <p:cTn id="18" dur="200" decel="100000" autoRev="1" fill="hold">
-                                          <p:stCondLst>
-                                            <p:cond delay="600"/>
-                                          </p:stCondLst>
-                                        </p:cTn>
-                                        <p:tgtEl>
-                                          <p:spTgt spid="9"/>
-                                        </p:tgtEl>
-                                        <p:attrNameLst>
-                                          <p:attrName>ppt_x</p:attrName>
-                                        </p:attrNameLst>
-                                      </p:cBhvr>
-                                    </p:anim>
-                                  </p:childTnLst>
-                                </p:cTn>
-                              </p:par>
-                            </p:childTnLst>
-                          </p:cTn>
-                        </p:par>
-                      </p:childTnLst>
-                    </p:cTn>
-                  </p:par>
-                </p:childTnLst>
-              </p:cTn>
-              <p:prevCondLst>
-                <p:cond evt="onPrev" delay="0">
-                  <p:tgtEl>
-                    <p:sldTgt/>
-                  </p:tgtEl>
-                </p:cond>
-              </p:prevCondLst>
-              <p:nextCondLst>
-                <p:cond evt="onNext" delay="0">
-                  <p:tgtEl>
-                    <p:sldTgt/>
-                  </p:tgtEl>
-                </p:cond>
-              </p:nextCondLst>
-            </p:seq>
-          </p:childTnLst>
-        </p:cTn>
-      </p:par>
-    </p:tnLst>
-    <p:bldLst>
-      <p:bldP spid="7" grpId="0"/>
-      <p:bldP spid="9" grpId="0"/>
-    </p:bldLst>
-  </p:timing>
 </p:sld>
 </file>
 
@@ -14688,7 +14131,7 @@
           <p:cNvPr id="2" name="Title 1">
             <a:extLst>
               <a:ext uri="{FF2B5EF4-FFF2-40B4-BE49-F238E27FC236}">
-                <a16:creationId xmlns:a16="http://schemas.microsoft.com/office/drawing/2014/main" id="{0FF4CEAD-BED6-366D-B1C7-78228E9BC9FA}"/>
+                <a16:creationId xmlns:a16="http://schemas.microsoft.com/office/drawing/2014/main" id="{928FBCDC-48E3-34D7-E16A-ED185680B6C5}"/>
               </a:ext>
             </a:extLst>
           </p:cNvPr>
@@ -14712,7 +14155,7 @@
                   <a:srgbClr val="1F3864"/>
                 </a:solidFill>
               </a:rPr>
-              <a:t>Practice: design the study</a:t>
+              <a:t>Ethics: the Facebook experiment</a:t>
             </a:r>
           </a:p>
         </p:txBody>
@@ -14722,7 +14165,7 @@
           <p:cNvPr id="4" name="Slide Number Placeholder 3">
             <a:extLst>
               <a:ext uri="{FF2B5EF4-FFF2-40B4-BE49-F238E27FC236}">
-                <a16:creationId xmlns:a16="http://schemas.microsoft.com/office/drawing/2014/main" id="{A6354598-F929-FBEF-0FCD-3842D9238AFA}"/>
+                <a16:creationId xmlns:a16="http://schemas.microsoft.com/office/drawing/2014/main" id="{867D343A-B691-3B93-BC2E-2BC7ADBAE788}"/>
               </a:ext>
             </a:extLst>
           </p:cNvPr>
@@ -14751,7 +14194,7 @@
           <p:cNvPr id="5" name="TextBox 4">
             <a:extLst>
               <a:ext uri="{FF2B5EF4-FFF2-40B4-BE49-F238E27FC236}">
-                <a16:creationId xmlns:a16="http://schemas.microsoft.com/office/drawing/2014/main" id="{ADAF5A54-3217-1980-49D5-537B627C1769}"/>
+                <a16:creationId xmlns:a16="http://schemas.microsoft.com/office/drawing/2014/main" id="{803EF544-7BC1-830E-74B1-64EDAAE169AE}"/>
               </a:ext>
             </a:extLst>
           </p:cNvPr>
@@ -14760,7 +14203,51 @@
         </p:nvSpPr>
         <p:spPr>
           <a:xfrm>
-            <a:off x="762000" y="1841500"/>
+            <a:off x="762000" y="1841499"/>
+            <a:ext cx="10668000" cy="589280"/>
+          </a:xfrm>
+          <a:prstGeom prst="rect">
+            <a:avLst/>
+          </a:prstGeom>
+          <a:noFill/>
+        </p:spPr>
+        <p:txBody>
+          <a:bodyPr vert="horz" wrap="square" rtlCol="0">
+            <a:noAutofit/>
+          </a:bodyPr>
+          <a:lstStyle/>
+          <a:p>
+            <a:pPr>
+              <a:spcAft>
+                <a:spcPts val="400"/>
+              </a:spcAft>
+            </a:pPr>
+            <a:r>
+              <a:rPr lang="en-US" sz="1600">
+                <a:solidFill>
+                  <a:srgbClr val="000000"/>
+                </a:solidFill>
+              </a:rPr>
+              <a:t>For one week in January 2012, Facebook changed the News Feeds of 689,003 users: some saw fewer positive posts, some fewer negative ones. The results were published in 2014. The users never knew.</a:t>
+            </a:r>
+          </a:p>
+        </p:txBody>
+      </p:sp>
+      <p:sp>
+        <p:nvSpPr>
+          <p:cNvPr id="6" name="TextBox 5">
+            <a:extLst>
+              <a:ext uri="{FF2B5EF4-FFF2-40B4-BE49-F238E27FC236}">
+                <a16:creationId xmlns:a16="http://schemas.microsoft.com/office/drawing/2014/main" id="{173928F0-6402-96DA-08AE-79702CFCC1E5}"/>
+              </a:ext>
+            </a:extLst>
+          </p:cNvPr>
+          <p:cNvSpPr txBox="1"/>
+          <p:nvPr/>
+        </p:nvSpPr>
+        <p:spPr>
+          <a:xfrm>
+            <a:off x="762000" y="2557780"/>
             <a:ext cx="10668000" cy="345440"/>
           </a:xfrm>
           <a:prstGeom prst="rect">
@@ -14774,28 +14261,32 @@
           </a:bodyPr>
           <a:lstStyle/>
           <a:p>
-            <a:pPr>
-              <a:spcAft>
-                <a:spcPts val="400"/>
-              </a:spcAft>
-            </a:pPr>
+            <a:pPr marL="304800" indent="-304800"/>
+            <a:r>
+              <a:rPr lang="en-US" sz="1600" b="1">
+                <a:solidFill>
+                  <a:srgbClr val="C00000"/>
+                </a:solidFill>
+              </a:rPr>
+              <a:t>1.</a:t>
+            </a:r>
             <a:r>
               <a:rPr lang="en-US" sz="1600">
                 <a:solidFill>
                   <a:srgbClr val="000000"/>
                 </a:solidFill>
               </a:rPr>
-              <a:t>You want to know whether texting slows how quickly a driver reacts when the car ahead brakes.</a:t>
-            </a:r>
-          </a:p>
-        </p:txBody>
-      </p:sp>
-      <p:sp>
-        <p:nvSpPr>
-          <p:cNvPr id="6" name="TextBox 5">
-            <a:extLst>
-              <a:ext uri="{FF2B5EF4-FFF2-40B4-BE49-F238E27FC236}">
-                <a16:creationId xmlns:a16="http://schemas.microsoft.com/office/drawing/2014/main" id="{D2F77CB1-5024-41A2-F8A3-6B89CE2AF015}"/>
+              <a:t>  Facebook said agreeing to its Data Use Policy counted as informed consent. Do you agree?</a:t>
+            </a:r>
+          </a:p>
+        </p:txBody>
+      </p:sp>
+      <p:sp>
+        <p:nvSpPr>
+          <p:cNvPr id="7" name="TextBox 6">
+            <a:extLst>
+              <a:ext uri="{FF2B5EF4-FFF2-40B4-BE49-F238E27FC236}">
+                <a16:creationId xmlns:a16="http://schemas.microsoft.com/office/drawing/2014/main" id="{096B0234-5946-443E-D3EF-6B904164792E}"/>
               </a:ext>
             </a:extLst>
           </p:cNvPr>
@@ -14804,7 +14295,46 @@
         </p:nvSpPr>
         <p:spPr>
           <a:xfrm>
-            <a:off x="762000" y="2313940"/>
+            <a:off x="1117600" y="2852419"/>
+            <a:ext cx="10312400" cy="589280"/>
+          </a:xfrm>
+          <a:prstGeom prst="rect">
+            <a:avLst/>
+          </a:prstGeom>
+          <a:noFill/>
+        </p:spPr>
+        <p:txBody>
+          <a:bodyPr vert="horz" wrap="square" rtlCol="0">
+            <a:noAutofit/>
+          </a:bodyPr>
+          <a:lstStyle/>
+          <a:p>
+            <a:r>
+              <a:rPr lang="en-US" sz="1600" b="1">
+                <a:solidFill>
+                  <a:srgbClr val="C00000"/>
+                </a:solidFill>
+              </a:rPr>
+              <a:t>The journal did not: its Expression of Concern said the study may not have met the principles of informed consent and the chance to opt out.</a:t>
+            </a:r>
+          </a:p>
+        </p:txBody>
+      </p:sp>
+      <p:sp>
+        <p:nvSpPr>
+          <p:cNvPr id="8" name="TextBox 7">
+            <a:extLst>
+              <a:ext uri="{FF2B5EF4-FFF2-40B4-BE49-F238E27FC236}">
+                <a16:creationId xmlns:a16="http://schemas.microsoft.com/office/drawing/2014/main" id="{DDBAFEBF-2B58-DFE7-62AD-B002E3656906}"/>
+              </a:ext>
+            </a:extLst>
+          </p:cNvPr>
+          <p:cNvSpPr txBox="1"/>
+          <p:nvPr/>
+        </p:nvSpPr>
+        <p:spPr>
+          <a:xfrm>
+            <a:off x="762000" y="3594100"/>
             <a:ext cx="10668000" cy="345440"/>
           </a:xfrm>
           <a:prstGeom prst="rect">
@@ -14825,7 +14355,7 @@
                   <a:srgbClr val="C00000"/>
                 </a:solidFill>
               </a:rPr>
-              <a:t>1.</a:t>
+              <a:t>2.</a:t>
             </a:r>
             <a:r>
               <a:rPr lang="en-US" sz="1600">
@@ -14833,17 +14363,17 @@
                   <a:srgbClr val="000000"/>
                 </a:solidFill>
               </a:rPr>
-              <a:t>  What are the explanatory variable, the response variable, and the treatments?</a:t>
-            </a:r>
-          </a:p>
-        </p:txBody>
-      </p:sp>
-      <p:sp>
-        <p:nvSpPr>
-          <p:cNvPr id="7" name="TextBox 6">
-            <a:extLst>
-              <a:ext uri="{FF2B5EF4-FFF2-40B4-BE49-F238E27FC236}">
-                <a16:creationId xmlns:a16="http://schemas.microsoft.com/office/drawing/2014/main" id="{C981DEAB-C346-C1FC-6F30-AE7180E156BE}"/>
+              <a:t>  Why did no ethics board stop it?</a:t>
+            </a:r>
+          </a:p>
+        </p:txBody>
+      </p:sp>
+      <p:sp>
+        <p:nvSpPr>
+          <p:cNvPr id="9" name="TextBox 8">
+            <a:extLst>
+              <a:ext uri="{FF2B5EF4-FFF2-40B4-BE49-F238E27FC236}">
+                <a16:creationId xmlns:a16="http://schemas.microsoft.com/office/drawing/2014/main" id="{37C5EB09-8181-01D4-0AE9-A06C5E9A6703}"/>
               </a:ext>
             </a:extLst>
           </p:cNvPr>
@@ -14852,7 +14382,94 @@
         </p:nvSpPr>
         <p:spPr>
           <a:xfrm>
-            <a:off x="1117600" y="2608580"/>
+            <a:off x="1117600" y="3888739"/>
+            <a:ext cx="10312400" cy="589280"/>
+          </a:xfrm>
+          <a:prstGeom prst="rect">
+            <a:avLst/>
+          </a:prstGeom>
+          <a:noFill/>
+        </p:spPr>
+        <p:txBody>
+          <a:bodyPr vert="horz" wrap="square" rtlCol="0">
+            <a:noAutofit/>
+          </a:bodyPr>
+          <a:lstStyle/>
+          <a:p>
+            <a:r>
+              <a:rPr lang="en-US" sz="1600" b="1">
+                <a:solidFill>
+                  <a:srgbClr val="C00000"/>
+                </a:solidFill>
+              </a:rPr>
+              <a:t>Facebook, a private company, was not bound by the federal rules. Cornell's board decided its researcher was not directly involved, so it did no review.</a:t>
+            </a:r>
+          </a:p>
+        </p:txBody>
+      </p:sp>
+      <p:sp>
+        <p:nvSpPr>
+          <p:cNvPr id="10" name="TextBox 9">
+            <a:extLst>
+              <a:ext uri="{FF2B5EF4-FFF2-40B4-BE49-F238E27FC236}">
+                <a16:creationId xmlns:a16="http://schemas.microsoft.com/office/drawing/2014/main" id="{2235831A-51A3-E82F-82A5-67061AA1A22E}"/>
+              </a:ext>
+            </a:extLst>
+          </p:cNvPr>
+          <p:cNvSpPr txBox="1"/>
+          <p:nvPr/>
+        </p:nvSpPr>
+        <p:spPr>
+          <a:xfrm>
+            <a:off x="762000" y="4630420"/>
+            <a:ext cx="10668000" cy="345440"/>
+          </a:xfrm>
+          <a:prstGeom prst="rect">
+            <a:avLst/>
+          </a:prstGeom>
+          <a:noFill/>
+        </p:spPr>
+        <p:txBody>
+          <a:bodyPr vert="horz" wrap="square" rtlCol="0">
+            <a:noAutofit/>
+          </a:bodyPr>
+          <a:lstStyle/>
+          <a:p>
+            <a:pPr marL="304800" indent="-304800"/>
+            <a:r>
+              <a:rPr lang="en-US" sz="1600" b="1">
+                <a:solidFill>
+                  <a:srgbClr val="C00000"/>
+                </a:solidFill>
+              </a:rPr>
+              <a:t>3.</a:t>
+            </a:r>
+            <a:r>
+              <a:rPr lang="en-US" sz="1600">
+                <a:solidFill>
+                  <a:srgbClr val="000000"/>
+                </a:solidFill>
+              </a:rPr>
+              <a:t>  What is the lesson?</a:t>
+            </a:r>
+          </a:p>
+        </p:txBody>
+      </p:sp>
+      <p:sp>
+        <p:nvSpPr>
+          <p:cNvPr id="11" name="TextBox 10">
+            <a:extLst>
+              <a:ext uri="{FF2B5EF4-FFF2-40B4-BE49-F238E27FC236}">
+                <a16:creationId xmlns:a16="http://schemas.microsoft.com/office/drawing/2014/main" id="{7EEE7946-5EA0-8B72-F855-AEB4B6636110}"/>
+              </a:ext>
+            </a:extLst>
+          </p:cNvPr>
+          <p:cNvSpPr txBox="1"/>
+          <p:nvPr/>
+        </p:nvSpPr>
+        <p:spPr>
+          <a:xfrm>
+            <a:off x="1117600" y="4925060"/>
             <a:ext cx="10312400" cy="345440"/>
           </a:xfrm>
           <a:prstGeom prst="rect">
@@ -14872,181 +14489,7 @@
                   <a:srgbClr val="C00000"/>
                 </a:solidFill>
               </a:rPr>
-              <a:t>Explanatory: texting or not. Response: reaction time. Treatments: driving while texting, and driving only.</a:t>
-            </a:r>
-          </a:p>
-        </p:txBody>
-      </p:sp>
-      <p:sp>
-        <p:nvSpPr>
-          <p:cNvPr id="8" name="TextBox 7">
-            <a:extLst>
-              <a:ext uri="{FF2B5EF4-FFF2-40B4-BE49-F238E27FC236}">
-                <a16:creationId xmlns:a16="http://schemas.microsoft.com/office/drawing/2014/main" id="{5DFD67D3-A732-4066-5E2D-00FF4E4A5E82}"/>
-              </a:ext>
-            </a:extLst>
-          </p:cNvPr>
-          <p:cNvSpPr txBox="1"/>
-          <p:nvPr/>
-        </p:nvSpPr>
-        <p:spPr>
-          <a:xfrm>
-            <a:off x="762000" y="3106420"/>
-            <a:ext cx="10668000" cy="345440"/>
-          </a:xfrm>
-          <a:prstGeom prst="rect">
-            <a:avLst/>
-          </a:prstGeom>
-          <a:noFill/>
-        </p:spPr>
-        <p:txBody>
-          <a:bodyPr vert="horz" wrap="square" rtlCol="0">
-            <a:noAutofit/>
-          </a:bodyPr>
-          <a:lstStyle/>
-          <a:p>
-            <a:pPr marL="304800" indent="-304800"/>
-            <a:r>
-              <a:rPr lang="en-US" sz="1600" b="1">
-                <a:solidFill>
-                  <a:srgbClr val="C00000"/>
-                </a:solidFill>
-              </a:rPr>
-              <a:t>2.</a:t>
-            </a:r>
-            <a:r>
-              <a:rPr lang="en-US" sz="1600">
-                <a:solidFill>
-                  <a:srgbClr val="000000"/>
-                </a:solidFill>
-              </a:rPr>
-              <a:t>  Your partner wants to split drivers at random into a texting group and a driving-only group. Is there a better design?</a:t>
-            </a:r>
-          </a:p>
-        </p:txBody>
-      </p:sp>
-      <p:sp>
-        <p:nvSpPr>
-          <p:cNvPr id="9" name="TextBox 8">
-            <a:extLst>
-              <a:ext uri="{FF2B5EF4-FFF2-40B4-BE49-F238E27FC236}">
-                <a16:creationId xmlns:a16="http://schemas.microsoft.com/office/drawing/2014/main" id="{CC0BB92E-59CE-E9A9-9010-0BDBAD66B2A2}"/>
-              </a:ext>
-            </a:extLst>
-          </p:cNvPr>
-          <p:cNvSpPr txBox="1"/>
-          <p:nvPr/>
-        </p:nvSpPr>
-        <p:spPr>
-          <a:xfrm>
-            <a:off x="1117600" y="3401059"/>
-            <a:ext cx="10312400" cy="589280"/>
-          </a:xfrm>
-          <a:prstGeom prst="rect">
-            <a:avLst/>
-          </a:prstGeom>
-          <a:noFill/>
-        </p:spPr>
-        <p:txBody>
-          <a:bodyPr vert="horz" wrap="square" rtlCol="0">
-            <a:noAutofit/>
-          </a:bodyPr>
-          <a:lstStyle/>
-          <a:p>
-            <a:r>
-              <a:rPr lang="en-US" sz="1600" b="1">
-                <a:solidFill>
-                  <a:srgbClr val="C00000"/>
-                </a:solidFill>
-              </a:rPr>
-              <a:t>Matched pairs: each driver does both, in a random order. Reaction times vary a lot between people, so compare each driver to themselves.</a:t>
-            </a:r>
-          </a:p>
-        </p:txBody>
-      </p:sp>
-      <p:sp>
-        <p:nvSpPr>
-          <p:cNvPr id="10" name="TextBox 9">
-            <a:extLst>
-              <a:ext uri="{FF2B5EF4-FFF2-40B4-BE49-F238E27FC236}">
-                <a16:creationId xmlns:a16="http://schemas.microsoft.com/office/drawing/2014/main" id="{DEF174C9-C009-AC02-9C35-B6BD2A0EFCDD}"/>
-              </a:ext>
-            </a:extLst>
-          </p:cNvPr>
-          <p:cNvSpPr txBox="1"/>
-          <p:nvPr/>
-        </p:nvSpPr>
-        <p:spPr>
-          <a:xfrm>
-            <a:off x="762000" y="4142740"/>
-            <a:ext cx="10668000" cy="345440"/>
-          </a:xfrm>
-          <a:prstGeom prst="rect">
-            <a:avLst/>
-          </a:prstGeom>
-          <a:noFill/>
-        </p:spPr>
-        <p:txBody>
-          <a:bodyPr vert="horz" wrap="square" rtlCol="0">
-            <a:noAutofit/>
-          </a:bodyPr>
-          <a:lstStyle/>
-          <a:p>
-            <a:pPr marL="304800" indent="-304800"/>
-            <a:r>
-              <a:rPr lang="en-US" sz="1600" b="1">
-                <a:solidFill>
-                  <a:srgbClr val="C00000"/>
-                </a:solidFill>
-              </a:rPr>
-              <a:t>3.</a:t>
-            </a:r>
-            <a:r>
-              <a:rPr lang="en-US" sz="1600">
-                <a:solidFill>
-                  <a:srgbClr val="000000"/>
-                </a:solidFill>
-              </a:rPr>
-              <a:t>  Can the study be blinded?</a:t>
-            </a:r>
-          </a:p>
-        </p:txBody>
-      </p:sp>
-      <p:sp>
-        <p:nvSpPr>
-          <p:cNvPr id="11" name="TextBox 10">
-            <a:extLst>
-              <a:ext uri="{FF2B5EF4-FFF2-40B4-BE49-F238E27FC236}">
-                <a16:creationId xmlns:a16="http://schemas.microsoft.com/office/drawing/2014/main" id="{DDF3EB21-B37F-C852-F822-D27D33186934}"/>
-              </a:ext>
-            </a:extLst>
-          </p:cNvPr>
-          <p:cNvSpPr txBox="1"/>
-          <p:nvPr/>
-        </p:nvSpPr>
-        <p:spPr>
-          <a:xfrm>
-            <a:off x="1117600" y="4437380"/>
-            <a:ext cx="10312400" cy="345440"/>
-          </a:xfrm>
-          <a:prstGeom prst="rect">
-            <a:avLst/>
-          </a:prstGeom>
-          <a:noFill/>
-        </p:spPr>
-        <p:txBody>
-          <a:bodyPr vert="horz" wrap="square" rtlCol="0">
-            <a:noAutofit/>
-          </a:bodyPr>
-          <a:lstStyle/>
-          <a:p>
-            <a:r>
-              <a:rPr lang="en-US" sz="1600" b="1">
-                <a:solidFill>
-                  <a:srgbClr val="C00000"/>
-                </a:solidFill>
-              </a:rPr>
-              <a:t>Not for the drivers - they know when they are texting. But the person measuring reaction times can be kept blind.</a:t>
+              <a:t>Clicking I agree on a terms-of-service page is not informed consent - even for a well-designed experiment.</a:t>
             </a:r>
           </a:p>
         </p:txBody>
@@ -15056,7 +14499,7 @@
           <p:cNvPr id="12" name="TextBox 11">
             <a:extLst>
               <a:ext uri="{FF2B5EF4-FFF2-40B4-BE49-F238E27FC236}">
-                <a16:creationId xmlns:a16="http://schemas.microsoft.com/office/drawing/2014/main" id="{095C9BE4-E6DE-D686-2782-B7D82B17E03C}"/>
+                <a16:creationId xmlns:a16="http://schemas.microsoft.com/office/drawing/2014/main" id="{3D8E5BD3-1CF7-2352-2707-2D7DBFFA6EBD}"/>
               </a:ext>
             </a:extLst>
           </p:cNvPr>
@@ -15086,7 +14529,7 @@
                   <a:srgbClr val="595959"/>
                 </a:solidFill>
               </a:rPr>
-              <a:t>Adapted from Introductory Statistics 2e (OpenStax), Section 1.4, Try It 1.21</a:t>
+              <a:t>Sources: Kramer, Guillory and Hancock (2014), PNAS; PNAS Editorial Expression of Concern (2014)</a:t>
             </a:r>
           </a:p>
         </p:txBody>
@@ -15096,7 +14539,7 @@
           <p:cNvPr id="3" name="Title rule">
             <a:extLst>
               <a:ext uri="{FF2B5EF4-FFF2-40B4-BE49-F238E27FC236}">
-                <a16:creationId xmlns:a16="http://schemas.microsoft.com/office/drawing/2014/main" id="{0C9AC535-E8E9-27B3-3BD7-A56C99861CCC}"/>
+                <a16:creationId xmlns:a16="http://schemas.microsoft.com/office/drawing/2014/main" id="{2A19CE9B-6143-6D05-1FF1-AF917901111D}"/>
               </a:ext>
             </a:extLst>
           </p:cNvPr>
@@ -15162,7 +14605,7 @@
     </p:spTree>
     <p:extLst>
       <p:ext uri="{BB962C8B-B14F-4D97-AF65-F5344CB8AC3E}">
-        <p14:creationId xmlns:p14="http://schemas.microsoft.com/office/powerpoint/2010/main" val="2277220017"/>
+        <p14:creationId xmlns:p14="http://schemas.microsoft.com/office/powerpoint/2010/main" val="2555584021"/>
       </p:ext>
     </p:extLst>
   </p:cSld>
@@ -15538,859 +14981,6 @@
       </p:grpSpPr>
       <p:sp>
         <p:nvSpPr>
-          <p:cNvPr id="2" name="Title 1">
-            <a:extLst>
-              <a:ext uri="{FF2B5EF4-FFF2-40B4-BE49-F238E27FC236}">
-                <a16:creationId xmlns:a16="http://schemas.microsoft.com/office/drawing/2014/main" id="{928FBCDC-48E3-34D7-E16A-ED185680B6C5}"/>
-              </a:ext>
-            </a:extLst>
-          </p:cNvPr>
-          <p:cNvSpPr>
-            <a:spLocks noGrp="1"/>
-          </p:cNvSpPr>
-          <p:nvPr>
-            <p:ph type="title"/>
-          </p:nvPr>
-        </p:nvSpPr>
-        <p:spPr/>
-        <p:txBody>
-          <a:bodyPr>
-            <a:noAutofit/>
-          </a:bodyPr>
-          <a:lstStyle/>
-          <a:p>
-            <a:r>
-              <a:rPr lang="en-US">
-                <a:solidFill>
-                  <a:srgbClr val="1F3864"/>
-                </a:solidFill>
-              </a:rPr>
-              <a:t>Ethics: the Facebook experiment</a:t>
-            </a:r>
-          </a:p>
-        </p:txBody>
-      </p:sp>
-      <p:sp>
-        <p:nvSpPr>
-          <p:cNvPr id="4" name="Slide Number Placeholder 3">
-            <a:extLst>
-              <a:ext uri="{FF2B5EF4-FFF2-40B4-BE49-F238E27FC236}">
-                <a16:creationId xmlns:a16="http://schemas.microsoft.com/office/drawing/2014/main" id="{867D343A-B691-3B93-BC2E-2BC7ADBAE788}"/>
-              </a:ext>
-            </a:extLst>
-          </p:cNvPr>
-          <p:cNvSpPr>
-            <a:spLocks noGrp="1"/>
-          </p:cNvSpPr>
-          <p:nvPr>
-            <p:ph type="sldNum" sz="quarter" idx="12"/>
-          </p:nvPr>
-        </p:nvSpPr>
-        <p:spPr/>
-        <p:txBody>
-          <a:bodyPr/>
-          <a:lstStyle/>
-          <a:p>
-            <a:fld id="{A80A81DD-F10A-4B1C-963A-0ABBB4865886}" type="slidenum">
-              <a:rPr lang="en-US" sz="1600" smtClean="0"/>
-              <a:t>25</a:t>
-            </a:fld>
-            <a:endParaRPr lang="en-US" sz="1600"/>
-          </a:p>
-        </p:txBody>
-      </p:sp>
-      <p:sp>
-        <p:nvSpPr>
-          <p:cNvPr id="5" name="TextBox 4">
-            <a:extLst>
-              <a:ext uri="{FF2B5EF4-FFF2-40B4-BE49-F238E27FC236}">
-                <a16:creationId xmlns:a16="http://schemas.microsoft.com/office/drawing/2014/main" id="{803EF544-7BC1-830E-74B1-64EDAAE169AE}"/>
-              </a:ext>
-            </a:extLst>
-          </p:cNvPr>
-          <p:cNvSpPr txBox="1"/>
-          <p:nvPr/>
-        </p:nvSpPr>
-        <p:spPr>
-          <a:xfrm>
-            <a:off x="762000" y="1841499"/>
-            <a:ext cx="10668000" cy="589280"/>
-          </a:xfrm>
-          <a:prstGeom prst="rect">
-            <a:avLst/>
-          </a:prstGeom>
-          <a:noFill/>
-        </p:spPr>
-        <p:txBody>
-          <a:bodyPr vert="horz" wrap="square" rtlCol="0">
-            <a:noAutofit/>
-          </a:bodyPr>
-          <a:lstStyle/>
-          <a:p>
-            <a:pPr>
-              <a:spcAft>
-                <a:spcPts val="400"/>
-              </a:spcAft>
-            </a:pPr>
-            <a:r>
-              <a:rPr lang="en-US" sz="1600">
-                <a:solidFill>
-                  <a:srgbClr val="000000"/>
-                </a:solidFill>
-              </a:rPr>
-              <a:t>For one week in January 2012, Facebook changed the News Feeds of 689,003 users: some saw fewer positive posts, some fewer negative ones. The results were published in 2014. The users never knew.</a:t>
-            </a:r>
-          </a:p>
-        </p:txBody>
-      </p:sp>
-      <p:sp>
-        <p:nvSpPr>
-          <p:cNvPr id="6" name="TextBox 5">
-            <a:extLst>
-              <a:ext uri="{FF2B5EF4-FFF2-40B4-BE49-F238E27FC236}">
-                <a16:creationId xmlns:a16="http://schemas.microsoft.com/office/drawing/2014/main" id="{173928F0-6402-96DA-08AE-79702CFCC1E5}"/>
-              </a:ext>
-            </a:extLst>
-          </p:cNvPr>
-          <p:cNvSpPr txBox="1"/>
-          <p:nvPr/>
-        </p:nvSpPr>
-        <p:spPr>
-          <a:xfrm>
-            <a:off x="762000" y="2557780"/>
-            <a:ext cx="10668000" cy="345440"/>
-          </a:xfrm>
-          <a:prstGeom prst="rect">
-            <a:avLst/>
-          </a:prstGeom>
-          <a:noFill/>
-        </p:spPr>
-        <p:txBody>
-          <a:bodyPr vert="horz" wrap="square" rtlCol="0">
-            <a:noAutofit/>
-          </a:bodyPr>
-          <a:lstStyle/>
-          <a:p>
-            <a:pPr marL="304800" indent="-304800"/>
-            <a:r>
-              <a:rPr lang="en-US" sz="1600" b="1">
-                <a:solidFill>
-                  <a:srgbClr val="C00000"/>
-                </a:solidFill>
-              </a:rPr>
-              <a:t>1.</a:t>
-            </a:r>
-            <a:r>
-              <a:rPr lang="en-US" sz="1600">
-                <a:solidFill>
-                  <a:srgbClr val="000000"/>
-                </a:solidFill>
-              </a:rPr>
-              <a:t>  Facebook said agreeing to its Data Use Policy counted as informed consent. Do you agree?</a:t>
-            </a:r>
-          </a:p>
-        </p:txBody>
-      </p:sp>
-      <p:sp>
-        <p:nvSpPr>
-          <p:cNvPr id="7" name="TextBox 6">
-            <a:extLst>
-              <a:ext uri="{FF2B5EF4-FFF2-40B4-BE49-F238E27FC236}">
-                <a16:creationId xmlns:a16="http://schemas.microsoft.com/office/drawing/2014/main" id="{096B0234-5946-443E-D3EF-6B904164792E}"/>
-              </a:ext>
-            </a:extLst>
-          </p:cNvPr>
-          <p:cNvSpPr txBox="1"/>
-          <p:nvPr/>
-        </p:nvSpPr>
-        <p:spPr>
-          <a:xfrm>
-            <a:off x="1117600" y="2852419"/>
-            <a:ext cx="10312400" cy="589280"/>
-          </a:xfrm>
-          <a:prstGeom prst="rect">
-            <a:avLst/>
-          </a:prstGeom>
-          <a:noFill/>
-        </p:spPr>
-        <p:txBody>
-          <a:bodyPr vert="horz" wrap="square" rtlCol="0">
-            <a:noAutofit/>
-          </a:bodyPr>
-          <a:lstStyle/>
-          <a:p>
-            <a:r>
-              <a:rPr lang="en-US" sz="1600" b="1">
-                <a:solidFill>
-                  <a:srgbClr val="C00000"/>
-                </a:solidFill>
-              </a:rPr>
-              <a:t>The journal did not: its Expression of Concern said the study may not have met the principles of informed consent and the chance to opt out.</a:t>
-            </a:r>
-          </a:p>
-        </p:txBody>
-      </p:sp>
-      <p:sp>
-        <p:nvSpPr>
-          <p:cNvPr id="8" name="TextBox 7">
-            <a:extLst>
-              <a:ext uri="{FF2B5EF4-FFF2-40B4-BE49-F238E27FC236}">
-                <a16:creationId xmlns:a16="http://schemas.microsoft.com/office/drawing/2014/main" id="{DDBAFEBF-2B58-DFE7-62AD-B002E3656906}"/>
-              </a:ext>
-            </a:extLst>
-          </p:cNvPr>
-          <p:cNvSpPr txBox="1"/>
-          <p:nvPr/>
-        </p:nvSpPr>
-        <p:spPr>
-          <a:xfrm>
-            <a:off x="762000" y="3594100"/>
-            <a:ext cx="10668000" cy="345440"/>
-          </a:xfrm>
-          <a:prstGeom prst="rect">
-            <a:avLst/>
-          </a:prstGeom>
-          <a:noFill/>
-        </p:spPr>
-        <p:txBody>
-          <a:bodyPr vert="horz" wrap="square" rtlCol="0">
-            <a:noAutofit/>
-          </a:bodyPr>
-          <a:lstStyle/>
-          <a:p>
-            <a:pPr marL="304800" indent="-304800"/>
-            <a:r>
-              <a:rPr lang="en-US" sz="1600" b="1">
-                <a:solidFill>
-                  <a:srgbClr val="C00000"/>
-                </a:solidFill>
-              </a:rPr>
-              <a:t>2.</a:t>
-            </a:r>
-            <a:r>
-              <a:rPr lang="en-US" sz="1600">
-                <a:solidFill>
-                  <a:srgbClr val="000000"/>
-                </a:solidFill>
-              </a:rPr>
-              <a:t>  Why did no ethics board stop it?</a:t>
-            </a:r>
-          </a:p>
-        </p:txBody>
-      </p:sp>
-      <p:sp>
-        <p:nvSpPr>
-          <p:cNvPr id="9" name="TextBox 8">
-            <a:extLst>
-              <a:ext uri="{FF2B5EF4-FFF2-40B4-BE49-F238E27FC236}">
-                <a16:creationId xmlns:a16="http://schemas.microsoft.com/office/drawing/2014/main" id="{37C5EB09-8181-01D4-0AE9-A06C5E9A6703}"/>
-              </a:ext>
-            </a:extLst>
-          </p:cNvPr>
-          <p:cNvSpPr txBox="1"/>
-          <p:nvPr/>
-        </p:nvSpPr>
-        <p:spPr>
-          <a:xfrm>
-            <a:off x="1117600" y="3888739"/>
-            <a:ext cx="10312400" cy="589280"/>
-          </a:xfrm>
-          <a:prstGeom prst="rect">
-            <a:avLst/>
-          </a:prstGeom>
-          <a:noFill/>
-        </p:spPr>
-        <p:txBody>
-          <a:bodyPr vert="horz" wrap="square" rtlCol="0">
-            <a:noAutofit/>
-          </a:bodyPr>
-          <a:lstStyle/>
-          <a:p>
-            <a:r>
-              <a:rPr lang="en-US" sz="1600" b="1">
-                <a:solidFill>
-                  <a:srgbClr val="C00000"/>
-                </a:solidFill>
-              </a:rPr>
-              <a:t>Facebook, a private company, was not bound by the federal rules. Cornell's board decided its researcher was not directly involved, so it did no review.</a:t>
-            </a:r>
-          </a:p>
-        </p:txBody>
-      </p:sp>
-      <p:sp>
-        <p:nvSpPr>
-          <p:cNvPr id="10" name="TextBox 9">
-            <a:extLst>
-              <a:ext uri="{FF2B5EF4-FFF2-40B4-BE49-F238E27FC236}">
-                <a16:creationId xmlns:a16="http://schemas.microsoft.com/office/drawing/2014/main" id="{2235831A-51A3-E82F-82A5-67061AA1A22E}"/>
-              </a:ext>
-            </a:extLst>
-          </p:cNvPr>
-          <p:cNvSpPr txBox="1"/>
-          <p:nvPr/>
-        </p:nvSpPr>
-        <p:spPr>
-          <a:xfrm>
-            <a:off x="762000" y="4630420"/>
-            <a:ext cx="10668000" cy="345440"/>
-          </a:xfrm>
-          <a:prstGeom prst="rect">
-            <a:avLst/>
-          </a:prstGeom>
-          <a:noFill/>
-        </p:spPr>
-        <p:txBody>
-          <a:bodyPr vert="horz" wrap="square" rtlCol="0">
-            <a:noAutofit/>
-          </a:bodyPr>
-          <a:lstStyle/>
-          <a:p>
-            <a:pPr marL="304800" indent="-304800"/>
-            <a:r>
-              <a:rPr lang="en-US" sz="1600" b="1">
-                <a:solidFill>
-                  <a:srgbClr val="C00000"/>
-                </a:solidFill>
-              </a:rPr>
-              <a:t>3.</a:t>
-            </a:r>
-            <a:r>
-              <a:rPr lang="en-US" sz="1600">
-                <a:solidFill>
-                  <a:srgbClr val="000000"/>
-                </a:solidFill>
-              </a:rPr>
-              <a:t>  What is the lesson?</a:t>
-            </a:r>
-          </a:p>
-        </p:txBody>
-      </p:sp>
-      <p:sp>
-        <p:nvSpPr>
-          <p:cNvPr id="11" name="TextBox 10">
-            <a:extLst>
-              <a:ext uri="{FF2B5EF4-FFF2-40B4-BE49-F238E27FC236}">
-                <a16:creationId xmlns:a16="http://schemas.microsoft.com/office/drawing/2014/main" id="{7EEE7946-5EA0-8B72-F855-AEB4B6636110}"/>
-              </a:ext>
-            </a:extLst>
-          </p:cNvPr>
-          <p:cNvSpPr txBox="1"/>
-          <p:nvPr/>
-        </p:nvSpPr>
-        <p:spPr>
-          <a:xfrm>
-            <a:off x="1117600" y="4925060"/>
-            <a:ext cx="10312400" cy="345440"/>
-          </a:xfrm>
-          <a:prstGeom prst="rect">
-            <a:avLst/>
-          </a:prstGeom>
-          <a:noFill/>
-        </p:spPr>
-        <p:txBody>
-          <a:bodyPr vert="horz" wrap="square" rtlCol="0">
-            <a:noAutofit/>
-          </a:bodyPr>
-          <a:lstStyle/>
-          <a:p>
-            <a:r>
-              <a:rPr lang="en-US" sz="1600" b="1">
-                <a:solidFill>
-                  <a:srgbClr val="C00000"/>
-                </a:solidFill>
-              </a:rPr>
-              <a:t>Clicking I agree on a terms-of-service page is not informed consent - even for a well-designed experiment.</a:t>
-            </a:r>
-          </a:p>
-        </p:txBody>
-      </p:sp>
-      <p:sp>
-        <p:nvSpPr>
-          <p:cNvPr id="12" name="TextBox 11">
-            <a:extLst>
-              <a:ext uri="{FF2B5EF4-FFF2-40B4-BE49-F238E27FC236}">
-                <a16:creationId xmlns:a16="http://schemas.microsoft.com/office/drawing/2014/main" id="{3D8E5BD3-1CF7-2352-2707-2D7DBFFA6EBD}"/>
-              </a:ext>
-            </a:extLst>
-          </p:cNvPr>
-          <p:cNvSpPr txBox="1"/>
-          <p:nvPr/>
-        </p:nvSpPr>
-        <p:spPr>
-          <a:xfrm>
-            <a:off x="762000" y="6045200"/>
-            <a:ext cx="10668000" cy="345440"/>
-          </a:xfrm>
-          <a:prstGeom prst="rect">
-            <a:avLst/>
-          </a:prstGeom>
-          <a:noFill/>
-        </p:spPr>
-        <p:txBody>
-          <a:bodyPr vert="horz" wrap="square" rtlCol="0">
-            <a:noAutofit/>
-          </a:bodyPr>
-          <a:lstStyle/>
-          <a:p>
-            <a:pPr algn="r"/>
-            <a:r>
-              <a:rPr lang="en-US" sz="1600" i="1">
-                <a:solidFill>
-                  <a:srgbClr val="595959"/>
-                </a:solidFill>
-              </a:rPr>
-              <a:t>Sources: Kramer, Guillory and Hancock (2014), PNAS; PNAS Editorial Expression of Concern (2014)</a:t>
-            </a:r>
-          </a:p>
-        </p:txBody>
-      </p:sp>
-      <p:sp>
-        <p:nvSpPr>
-          <p:cNvPr id="3" name="Title rule">
-            <a:extLst>
-              <a:ext uri="{FF2B5EF4-FFF2-40B4-BE49-F238E27FC236}">
-                <a16:creationId xmlns:a16="http://schemas.microsoft.com/office/drawing/2014/main" id="{2A19CE9B-6143-6D05-1FF1-AF917901111D}"/>
-              </a:ext>
-            </a:extLst>
-          </p:cNvPr>
-          <p:cNvSpPr/>
-          <p:nvPr/>
-        </p:nvSpPr>
-        <p:spPr>
-          <a:xfrm>
-            <a:off x="838200" y="1600200"/>
-            <a:ext cx="10515600" cy="38100"/>
-          </a:xfrm>
-          <a:prstGeom prst="rect">
-            <a:avLst/>
-          </a:prstGeom>
-          <a:solidFill>
-            <a:srgbClr val="4472C4"/>
-          </a:solidFill>
-          <a:ln w="12700" cap="flat" cmpd="sng" algn="ctr">
-            <a:noFill/>
-            <a:prstDash val="solid"/>
-            <a:miter lim="800000"/>
-          </a:ln>
-          <a:effectLst/>
-          <a:extLst>
-            <a:ext uri="{91240B29-F687-4F45-9708-019B960494DF}">
-              <a14:hiddenLine xmlns:a14="http://schemas.microsoft.com/office/drawing/2010/main" w="12700" cap="flat" cmpd="sng" algn="ctr">
-                <a:solidFill>
-                  <a:schemeClr val="accent1">
-                    <a:shade val="15000"/>
-                  </a:schemeClr>
-                </a:solidFill>
-                <a:prstDash val="solid"/>
-                <a:miter lim="800000"/>
-              </a14:hiddenLine>
-            </a:ext>
-          </a:extLst>
-        </p:spPr>
-        <p:style>
-          <a:lnRef idx="2">
-            <a:schemeClr val="accent1">
-              <a:shade val="15000"/>
-            </a:schemeClr>
-          </a:lnRef>
-          <a:fillRef idx="1">
-            <a:schemeClr val="accent1"/>
-          </a:fillRef>
-          <a:effectRef idx="0">
-            <a:schemeClr val="accent1"/>
-          </a:effectRef>
-          <a:fontRef idx="minor">
-            <a:schemeClr val="lt1"/>
-          </a:fontRef>
-        </p:style>
-        <p:txBody>
-          <a:bodyPr rtlCol="0" anchor="ctr"/>
-          <a:lstStyle/>
-          <a:p>
-            <a:pPr algn="ctr"/>
-            <a:endParaRPr lang="en-US"/>
-          </a:p>
-        </p:txBody>
-      </p:sp>
-    </p:spTree>
-    <p:extLst>
-      <p:ext uri="{BB962C8B-B14F-4D97-AF65-F5344CB8AC3E}">
-        <p14:creationId xmlns:p14="http://schemas.microsoft.com/office/powerpoint/2010/main" val="2555584021"/>
-      </p:ext>
-    </p:extLst>
-  </p:cSld>
-  <p:clrMapOvr>
-    <a:masterClrMapping/>
-  </p:clrMapOvr>
-  <p:timing>
-    <p:tnLst>
-      <p:par>
-        <p:cTn id="1" dur="indefinite" restart="never" nodeType="tmRoot">
-          <p:childTnLst>
-            <p:seq concurrent="1" nextAc="seek">
-              <p:cTn id="2" dur="indefinite" nodeType="mainSeq">
-                <p:childTnLst>
-                  <p:par>
-                    <p:cTn id="3" fill="hold">
-                      <p:stCondLst>
-                        <p:cond delay="indefinite"/>
-                      </p:stCondLst>
-                      <p:childTnLst>
-                        <p:par>
-                          <p:cTn id="4" fill="hold">
-                            <p:stCondLst>
-                              <p:cond delay="0"/>
-                            </p:stCondLst>
-                            <p:childTnLst>
-                              <p:par>
-                                <p:cTn id="5" presetID="34" presetClass="entr" presetSubtype="0" fill="hold" grpId="0" nodeType="clickEffect">
-                                  <p:stCondLst>
-                                    <p:cond delay="0"/>
-                                  </p:stCondLst>
-                                  <p:childTnLst>
-                                    <p:set>
-                                      <p:cBhvr>
-                                        <p:cTn id="6" dur="1" fill="hold">
-                                          <p:stCondLst>
-                                            <p:cond delay="0"/>
-                                          </p:stCondLst>
-                                        </p:cTn>
-                                        <p:tgtEl>
-                                          <p:spTgt spid="7"/>
-                                        </p:tgtEl>
-                                        <p:attrNameLst>
-                                          <p:attrName>style.visibility</p:attrName>
-                                        </p:attrNameLst>
-                                      </p:cBhvr>
-                                      <p:to>
-                                        <p:strVal val="visible"/>
-                                      </p:to>
-                                    </p:set>
-                                    <p:anim from="(-#ppt_w/2)" to="(#ppt_x)" calcmode="lin" valueType="num">
-                                      <p:cBhvr>
-                                        <p:cTn id="7" dur="600" fill="hold">
-                                          <p:stCondLst>
-                                            <p:cond delay="0"/>
-                                          </p:stCondLst>
-                                        </p:cTn>
-                                        <p:tgtEl>
-                                          <p:spTgt spid="7"/>
-                                        </p:tgtEl>
-                                        <p:attrNameLst>
-                                          <p:attrName>ppt_x</p:attrName>
-                                        </p:attrNameLst>
-                                      </p:cBhvr>
-                                    </p:anim>
-                                    <p:anim from="0" to="-1.0" calcmode="lin" valueType="num">
-                                      <p:cBhvr>
-                                        <p:cTn id="8" dur="200" decel="50000" autoRev="1" fill="hold">
-                                          <p:stCondLst>
-                                            <p:cond delay="600"/>
-                                          </p:stCondLst>
-                                        </p:cTn>
-                                        <p:tgtEl>
-                                          <p:spTgt spid="7"/>
-                                        </p:tgtEl>
-                                        <p:attrNameLst>
-                                          <p:attrName>xshear</p:attrName>
-                                        </p:attrNameLst>
-                                      </p:cBhvr>
-                                    </p:anim>
-                                    <p:animScale>
-                                      <p:cBhvr>
-                                        <p:cTn id="9" dur="200" decel="100000" autoRev="1" fill="hold">
-                                          <p:stCondLst>
-                                            <p:cond delay="600"/>
-                                          </p:stCondLst>
-                                        </p:cTn>
-                                        <p:tgtEl>
-                                          <p:spTgt spid="7"/>
-                                        </p:tgtEl>
-                                      </p:cBhvr>
-                                      <p:from x="100000" y="100000"/>
-                                      <p:to x="80000" y="100000"/>
-                                    </p:animScale>
-                                    <p:anim by="(#ppt_h/3+#ppt_w*0.1)" calcmode="lin" valueType="num">
-                                      <p:cBhvr additive="sum">
-                                        <p:cTn id="10" dur="200" decel="100000" autoRev="1" fill="hold">
-                                          <p:stCondLst>
-                                            <p:cond delay="600"/>
-                                          </p:stCondLst>
-                                        </p:cTn>
-                                        <p:tgtEl>
-                                          <p:spTgt spid="7"/>
-                                        </p:tgtEl>
-                                        <p:attrNameLst>
-                                          <p:attrName>ppt_x</p:attrName>
-                                        </p:attrNameLst>
-                                      </p:cBhvr>
-                                    </p:anim>
-                                  </p:childTnLst>
-                                </p:cTn>
-                              </p:par>
-                            </p:childTnLst>
-                          </p:cTn>
-                        </p:par>
-                      </p:childTnLst>
-                    </p:cTn>
-                  </p:par>
-                  <p:par>
-                    <p:cTn id="11" fill="hold">
-                      <p:stCondLst>
-                        <p:cond delay="indefinite"/>
-                      </p:stCondLst>
-                      <p:childTnLst>
-                        <p:par>
-                          <p:cTn id="12" fill="hold">
-                            <p:stCondLst>
-                              <p:cond delay="0"/>
-                            </p:stCondLst>
-                            <p:childTnLst>
-                              <p:par>
-                                <p:cTn id="13" presetID="34" presetClass="entr" presetSubtype="0" fill="hold" grpId="0" nodeType="clickEffect">
-                                  <p:stCondLst>
-                                    <p:cond delay="0"/>
-                                  </p:stCondLst>
-                                  <p:childTnLst>
-                                    <p:set>
-                                      <p:cBhvr>
-                                        <p:cTn id="14" dur="1" fill="hold">
-                                          <p:stCondLst>
-                                            <p:cond delay="0"/>
-                                          </p:stCondLst>
-                                        </p:cTn>
-                                        <p:tgtEl>
-                                          <p:spTgt spid="9"/>
-                                        </p:tgtEl>
-                                        <p:attrNameLst>
-                                          <p:attrName>style.visibility</p:attrName>
-                                        </p:attrNameLst>
-                                      </p:cBhvr>
-                                      <p:to>
-                                        <p:strVal val="visible"/>
-                                      </p:to>
-                                    </p:set>
-                                    <p:anim from="(-#ppt_w/2)" to="(#ppt_x)" calcmode="lin" valueType="num">
-                                      <p:cBhvr>
-                                        <p:cTn id="15" dur="600" fill="hold">
-                                          <p:stCondLst>
-                                            <p:cond delay="0"/>
-                                          </p:stCondLst>
-                                        </p:cTn>
-                                        <p:tgtEl>
-                                          <p:spTgt spid="9"/>
-                                        </p:tgtEl>
-                                        <p:attrNameLst>
-                                          <p:attrName>ppt_x</p:attrName>
-                                        </p:attrNameLst>
-                                      </p:cBhvr>
-                                    </p:anim>
-                                    <p:anim from="0" to="-1.0" calcmode="lin" valueType="num">
-                                      <p:cBhvr>
-                                        <p:cTn id="16" dur="200" decel="50000" autoRev="1" fill="hold">
-                                          <p:stCondLst>
-                                            <p:cond delay="600"/>
-                                          </p:stCondLst>
-                                        </p:cTn>
-                                        <p:tgtEl>
-                                          <p:spTgt spid="9"/>
-                                        </p:tgtEl>
-                                        <p:attrNameLst>
-                                          <p:attrName>xshear</p:attrName>
-                                        </p:attrNameLst>
-                                      </p:cBhvr>
-                                    </p:anim>
-                                    <p:animScale>
-                                      <p:cBhvr>
-                                        <p:cTn id="17" dur="200" decel="100000" autoRev="1" fill="hold">
-                                          <p:stCondLst>
-                                            <p:cond delay="600"/>
-                                          </p:stCondLst>
-                                        </p:cTn>
-                                        <p:tgtEl>
-                                          <p:spTgt spid="9"/>
-                                        </p:tgtEl>
-                                      </p:cBhvr>
-                                      <p:from x="100000" y="100000"/>
-                                      <p:to x="80000" y="100000"/>
-                                    </p:animScale>
-                                    <p:anim by="(#ppt_h/3+#ppt_w*0.1)" calcmode="lin" valueType="num">
-                                      <p:cBhvr additive="sum">
-                                        <p:cTn id="18" dur="200" decel="100000" autoRev="1" fill="hold">
-                                          <p:stCondLst>
-                                            <p:cond delay="600"/>
-                                          </p:stCondLst>
-                                        </p:cTn>
-                                        <p:tgtEl>
-                                          <p:spTgt spid="9"/>
-                                        </p:tgtEl>
-                                        <p:attrNameLst>
-                                          <p:attrName>ppt_x</p:attrName>
-                                        </p:attrNameLst>
-                                      </p:cBhvr>
-                                    </p:anim>
-                                  </p:childTnLst>
-                                </p:cTn>
-                              </p:par>
-                            </p:childTnLst>
-                          </p:cTn>
-                        </p:par>
-                      </p:childTnLst>
-                    </p:cTn>
-                  </p:par>
-                  <p:par>
-                    <p:cTn id="19" fill="hold">
-                      <p:stCondLst>
-                        <p:cond delay="indefinite"/>
-                      </p:stCondLst>
-                      <p:childTnLst>
-                        <p:par>
-                          <p:cTn id="20" fill="hold">
-                            <p:stCondLst>
-                              <p:cond delay="0"/>
-                            </p:stCondLst>
-                            <p:childTnLst>
-                              <p:par>
-                                <p:cTn id="21" presetID="34" presetClass="entr" presetSubtype="0" fill="hold" grpId="0" nodeType="clickEffect">
-                                  <p:stCondLst>
-                                    <p:cond delay="0"/>
-                                  </p:stCondLst>
-                                  <p:childTnLst>
-                                    <p:set>
-                                      <p:cBhvr>
-                                        <p:cTn id="22" dur="1" fill="hold">
-                                          <p:stCondLst>
-                                            <p:cond delay="0"/>
-                                          </p:stCondLst>
-                                        </p:cTn>
-                                        <p:tgtEl>
-                                          <p:spTgt spid="11"/>
-                                        </p:tgtEl>
-                                        <p:attrNameLst>
-                                          <p:attrName>style.visibility</p:attrName>
-                                        </p:attrNameLst>
-                                      </p:cBhvr>
-                                      <p:to>
-                                        <p:strVal val="visible"/>
-                                      </p:to>
-                                    </p:set>
-                                    <p:anim from="(-#ppt_w/2)" to="(#ppt_x)" calcmode="lin" valueType="num">
-                                      <p:cBhvr>
-                                        <p:cTn id="23" dur="600" fill="hold">
-                                          <p:stCondLst>
-                                            <p:cond delay="0"/>
-                                          </p:stCondLst>
-                                        </p:cTn>
-                                        <p:tgtEl>
-                                          <p:spTgt spid="11"/>
-                                        </p:tgtEl>
-                                        <p:attrNameLst>
-                                          <p:attrName>ppt_x</p:attrName>
-                                        </p:attrNameLst>
-                                      </p:cBhvr>
-                                    </p:anim>
-                                    <p:anim from="0" to="-1.0" calcmode="lin" valueType="num">
-                                      <p:cBhvr>
-                                        <p:cTn id="24" dur="200" decel="50000" autoRev="1" fill="hold">
-                                          <p:stCondLst>
-                                            <p:cond delay="600"/>
-                                          </p:stCondLst>
-                                        </p:cTn>
-                                        <p:tgtEl>
-                                          <p:spTgt spid="11"/>
-                                        </p:tgtEl>
-                                        <p:attrNameLst>
-                                          <p:attrName>xshear</p:attrName>
-                                        </p:attrNameLst>
-                                      </p:cBhvr>
-                                    </p:anim>
-                                    <p:animScale>
-                                      <p:cBhvr>
-                                        <p:cTn id="25" dur="200" decel="100000" autoRev="1" fill="hold">
-                                          <p:stCondLst>
-                                            <p:cond delay="600"/>
-                                          </p:stCondLst>
-                                        </p:cTn>
-                                        <p:tgtEl>
-                                          <p:spTgt spid="11"/>
-                                        </p:tgtEl>
-                                      </p:cBhvr>
-                                      <p:from x="100000" y="100000"/>
-                                      <p:to x="80000" y="100000"/>
-                                    </p:animScale>
-                                    <p:anim by="(#ppt_h/3+#ppt_w*0.1)" calcmode="lin" valueType="num">
-                                      <p:cBhvr additive="sum">
-                                        <p:cTn id="26" dur="200" decel="100000" autoRev="1" fill="hold">
-                                          <p:stCondLst>
-                                            <p:cond delay="600"/>
-                                          </p:stCondLst>
-                                        </p:cTn>
-                                        <p:tgtEl>
-                                          <p:spTgt spid="11"/>
-                                        </p:tgtEl>
-                                        <p:attrNameLst>
-                                          <p:attrName>ppt_x</p:attrName>
-                                        </p:attrNameLst>
-                                      </p:cBhvr>
-                                    </p:anim>
-                                  </p:childTnLst>
-                                </p:cTn>
-                              </p:par>
-                            </p:childTnLst>
-                          </p:cTn>
-                        </p:par>
-                      </p:childTnLst>
-                    </p:cTn>
-                  </p:par>
-                </p:childTnLst>
-              </p:cTn>
-              <p:prevCondLst>
-                <p:cond evt="onPrev" delay="0">
-                  <p:tgtEl>
-                    <p:sldTgt/>
-                  </p:tgtEl>
-                </p:cond>
-              </p:prevCondLst>
-              <p:nextCondLst>
-                <p:cond evt="onNext" delay="0">
-                  <p:tgtEl>
-                    <p:sldTgt/>
-                  </p:tgtEl>
-                </p:cond>
-              </p:nextCondLst>
-            </p:seq>
-          </p:childTnLst>
-        </p:cTn>
-      </p:par>
-    </p:tnLst>
-    <p:bldLst>
-      <p:bldP spid="7" grpId="0"/>
-      <p:bldP spid="9" grpId="0"/>
-      <p:bldP spid="11" grpId="0"/>
-    </p:bldLst>
-  </p:timing>
-</p:sld>
-</file>
-
-<file path=ppt/slides/slide26.xml><?xml version="1.0" encoding="utf-8"?>
-<p:sld xmlns:a="http://schemas.openxmlformats.org/drawingml/2006/main" xmlns:r="http://schemas.openxmlformats.org/officeDocument/2006/relationships" xmlns:p="http://schemas.openxmlformats.org/presentationml/2006/main">
-  <p:cSld>
-    <p:spTree>
-      <p:nvGrpSpPr>
-        <p:cNvPr id="1" name=""/>
-        <p:cNvGrpSpPr/>
-        <p:nvPr/>
-      </p:nvGrpSpPr>
-      <p:grpSpPr>
-        <a:xfrm>
-          <a:off x="0" y="0"/>
-          <a:ext cx="0" cy="0"/>
-          <a:chOff x="0" y="0"/>
-          <a:chExt cx="0" cy="0"/>
-        </a:xfrm>
-      </p:grpSpPr>
-      <p:sp>
-        <p:nvSpPr>
           <p:cNvPr id="14" name="Definition card">
             <a:extLst>
               <a:ext uri="{FF2B5EF4-FFF2-40B4-BE49-F238E27FC236}">
@@ -16614,7 +15204,7 @@
           <a:p>
             <a:fld id="{A80A81DD-F10A-4B1C-963A-0ABBB4865886}" type="slidenum">
               <a:rPr lang="en-US" sz="1600" smtClean="0"/>
-              <a:t>26</a:t>
+              <a:t>25</a:t>
             </a:fld>
             <a:endParaRPr lang="en-US" sz="1600"/>
           </a:p>
@@ -17321,7 +15911,7 @@
 </p:sld>
 </file>
 
-<file path=ppt/slides/slide27.xml><?xml version="1.0" encoding="utf-8"?>
+<file path=ppt/slides/slide26.xml><?xml version="1.0" encoding="utf-8"?>
 <p:sld xmlns:a="http://schemas.openxmlformats.org/drawingml/2006/main" xmlns:r="http://schemas.openxmlformats.org/officeDocument/2006/relationships" xmlns:p="http://schemas.openxmlformats.org/presentationml/2006/main">
   <p:cSld>
     <p:spTree>
@@ -17563,7 +16153,7 @@
           <a:p>
             <a:fld id="{A80A81DD-F10A-4B1C-963A-0ABBB4865886}" type="slidenum">
               <a:rPr lang="en-US" sz="1600" smtClean="0"/>
-              <a:t>27</a:t>
+              <a:t>26</a:t>
             </a:fld>
             <a:endParaRPr lang="en-US" sz="1600"/>
           </a:p>
@@ -18241,7 +16831,7 @@
 </p:sld>
 </file>
 
-<file path=ppt/slides/slide28.xml><?xml version="1.0" encoding="utf-8"?>
+<file path=ppt/slides/slide27.xml><?xml version="1.0" encoding="utf-8"?>
 <p:sld xmlns:a="http://schemas.openxmlformats.org/drawingml/2006/main" xmlns:r="http://schemas.openxmlformats.org/officeDocument/2006/relationships" xmlns:p="http://schemas.openxmlformats.org/presentationml/2006/main">
   <p:cSld>
     <p:spTree>
@@ -18315,7 +16905,7 @@
           <a:p>
             <a:fld id="{A80A81DD-F10A-4B1C-963A-0ABBB4865886}" type="slidenum">
               <a:rPr lang="en-US" sz="1600" smtClean="0"/>
-              <a:t>28</a:t>
+              <a:t>27</a:t>
             </a:fld>
             <a:endParaRPr lang="en-US" sz="1600"/>
           </a:p>
@@ -18355,273 +16945,12 @@
               </a:spcAft>
             </a:pPr>
             <a:r>
-              <a:rPr lang="en-US" sz="1600">
+              <a:rPr lang="en-US" sz="1600" dirty="0">
                 <a:solidFill>
                   <a:srgbClr val="000000"/>
                 </a:solidFill>
               </a:rPr>
-              <a:t>Ethics also means honest data. An investigation of psychologist Diederik Stapel found he had invented data: it tainted more than 55 of his papers and 10 PhD dissertations he supervised. A researcher is surveying households in a community:</a:t>
-            </a:r>
-          </a:p>
-        </p:txBody>
-      </p:sp>
-      <p:sp>
-        <p:nvSpPr>
-          <p:cNvPr id="6" name="TextBox 5">
-            <a:extLst>
-              <a:ext uri="{FF2B5EF4-FFF2-40B4-BE49-F238E27FC236}">
-                <a16:creationId xmlns:a16="http://schemas.microsoft.com/office/drawing/2014/main" id="{DACC0BD2-74EB-8BD3-2FA2-EDF53C0DB90C}"/>
-              </a:ext>
-            </a:extLst>
-          </p:cNvPr>
-          <p:cNvSpPr txBox="1"/>
-          <p:nvPr/>
-        </p:nvSpPr>
-        <p:spPr>
-          <a:xfrm>
-            <a:off x="762000" y="2557780"/>
-            <a:ext cx="10668000" cy="345440"/>
-          </a:xfrm>
-          <a:prstGeom prst="rect">
-            <a:avLst/>
-          </a:prstGeom>
-          <a:noFill/>
-        </p:spPr>
-        <p:txBody>
-          <a:bodyPr vert="horz" wrap="square" rtlCol="0">
-            <a:noAutofit/>
-          </a:bodyPr>
-          <a:lstStyle/>
-          <a:p>
-            <a:pPr marL="304800" indent="-304800"/>
-            <a:r>
-              <a:rPr lang="en-US" sz="1600" b="1">
-                <a:solidFill>
-                  <a:srgbClr val="C00000"/>
-                </a:solidFill>
-              </a:rPr>
-              <a:t>1.</a:t>
-            </a:r>
-            <a:r>
-              <a:rPr lang="en-US" sz="1600">
-                <a:solidFill>
-                  <a:srgbClr val="000000"/>
-                </a:solidFill>
-              </a:rPr>
-              <a:t>  They choose a block where they already know many of the neighbors. What is the problem?</a:t>
-            </a:r>
-          </a:p>
-        </p:txBody>
-      </p:sp>
-      <p:sp>
-        <p:nvSpPr>
-          <p:cNvPr id="7" name="TextBox 6">
-            <a:extLst>
-              <a:ext uri="{FF2B5EF4-FFF2-40B4-BE49-F238E27FC236}">
-                <a16:creationId xmlns:a16="http://schemas.microsoft.com/office/drawing/2014/main" id="{DD3A2E9A-6FFD-CC4B-0BB8-6E3EE5F60F15}"/>
-              </a:ext>
-            </a:extLst>
-          </p:cNvPr>
-          <p:cNvSpPr txBox="1"/>
-          <p:nvPr/>
-        </p:nvSpPr>
-        <p:spPr>
-          <a:xfrm>
-            <a:off x="1117600" y="2852420"/>
-            <a:ext cx="10312400" cy="345440"/>
-          </a:xfrm>
-          <a:prstGeom prst="rect">
-            <a:avLst/>
-          </a:prstGeom>
-          <a:noFill/>
-        </p:spPr>
-        <p:txBody>
-          <a:bodyPr vert="horz" wrap="square" rtlCol="0">
-            <a:noAutofit/>
-          </a:bodyPr>
-          <a:lstStyle/>
-          <a:p>
-            <a:r>
-              <a:rPr lang="en-US" sz="1600" b="1">
-                <a:solidFill>
-                  <a:srgbClr val="C00000"/>
-                </a:solidFill>
-              </a:rPr>
-              <a:t>A convenience sample - it is biased, and claiming it represents the community is misleading.</a:t>
-            </a:r>
-          </a:p>
-        </p:txBody>
-      </p:sp>
-      <p:sp>
-        <p:nvSpPr>
-          <p:cNvPr id="8" name="TextBox 7">
-            <a:extLst>
-              <a:ext uri="{FF2B5EF4-FFF2-40B4-BE49-F238E27FC236}">
-                <a16:creationId xmlns:a16="http://schemas.microsoft.com/office/drawing/2014/main" id="{8761BC9F-8DF7-4ADB-68EF-D1A416279CEB}"/>
-              </a:ext>
-            </a:extLst>
-          </p:cNvPr>
-          <p:cNvSpPr txBox="1"/>
-          <p:nvPr/>
-        </p:nvSpPr>
-        <p:spPr>
-          <a:xfrm>
-            <a:off x="762000" y="3350260"/>
-            <a:ext cx="10668000" cy="345440"/>
-          </a:xfrm>
-          <a:prstGeom prst="rect">
-            <a:avLst/>
-          </a:prstGeom>
-          <a:noFill/>
-        </p:spPr>
-        <p:txBody>
-          <a:bodyPr vert="horz" wrap="square" rtlCol="0">
-            <a:noAutofit/>
-          </a:bodyPr>
-          <a:lstStyle/>
-          <a:p>
-            <a:pPr marL="304800" indent="-304800"/>
-            <a:r>
-              <a:rPr lang="en-US" sz="1600" b="1">
-                <a:solidFill>
-                  <a:srgbClr val="C00000"/>
-                </a:solidFill>
-              </a:rPr>
-              <a:t>2.</a:t>
-            </a:r>
-            <a:r>
-              <a:rPr lang="en-US" sz="1600">
-                <a:solidFill>
-                  <a:srgbClr val="000000"/>
-                </a:solidFill>
-              </a:rPr>
-              <a:t>  Nobody is home at four houses, so they skip them and never go back. What is the problem?</a:t>
-            </a:r>
-          </a:p>
-        </p:txBody>
-      </p:sp>
-      <p:sp>
-        <p:nvSpPr>
-          <p:cNvPr id="9" name="TextBox 8">
-            <a:extLst>
-              <a:ext uri="{FF2B5EF4-FFF2-40B4-BE49-F238E27FC236}">
-                <a16:creationId xmlns:a16="http://schemas.microsoft.com/office/drawing/2014/main" id="{91EC7D30-25A5-81AE-2894-7068B4D9B330}"/>
-              </a:ext>
-            </a:extLst>
-          </p:cNvPr>
-          <p:cNvSpPr txBox="1"/>
-          <p:nvPr/>
-        </p:nvSpPr>
-        <p:spPr>
-          <a:xfrm>
-            <a:off x="1117600" y="3644900"/>
-            <a:ext cx="10312400" cy="345440"/>
-          </a:xfrm>
-          <a:prstGeom prst="rect">
-            <a:avLst/>
-          </a:prstGeom>
-          <a:noFill/>
-        </p:spPr>
-        <p:txBody>
-          <a:bodyPr vert="horz" wrap="square" rtlCol="0">
-            <a:noAutofit/>
-          </a:bodyPr>
-          <a:lstStyle/>
-          <a:p>
-            <a:r>
-              <a:rPr lang="en-US" sz="1600" b="1">
-                <a:solidFill>
-                  <a:srgbClr val="C00000"/>
-                </a:solidFill>
-              </a:rPr>
-              <a:t>Nonresponse - people who are not home, such as working families, may differ from the people who are.</a:t>
-            </a:r>
-          </a:p>
-        </p:txBody>
-      </p:sp>
-      <p:sp>
-        <p:nvSpPr>
-          <p:cNvPr id="10" name="TextBox 9">
-            <a:extLst>
-              <a:ext uri="{FF2B5EF4-FFF2-40B4-BE49-F238E27FC236}">
-                <a16:creationId xmlns:a16="http://schemas.microsoft.com/office/drawing/2014/main" id="{40AAC60D-581D-7FA4-26CF-042E9E2B03F5}"/>
-              </a:ext>
-            </a:extLst>
-          </p:cNvPr>
-          <p:cNvSpPr txBox="1"/>
-          <p:nvPr/>
-        </p:nvSpPr>
-        <p:spPr>
-          <a:xfrm>
-            <a:off x="762000" y="4142740"/>
-            <a:ext cx="10668000" cy="345440"/>
-          </a:xfrm>
-          <a:prstGeom prst="rect">
-            <a:avLst/>
-          </a:prstGeom>
-          <a:noFill/>
-        </p:spPr>
-        <p:txBody>
-          <a:bodyPr vert="horz" wrap="square" rtlCol="0">
-            <a:noAutofit/>
-          </a:bodyPr>
-          <a:lstStyle/>
-          <a:p>
-            <a:pPr marL="304800" indent="-304800"/>
-            <a:r>
-              <a:rPr lang="en-US" sz="1600" b="1">
-                <a:solidFill>
-                  <a:srgbClr val="C00000"/>
-                </a:solidFill>
-              </a:rPr>
-              <a:t>3.</a:t>
-            </a:r>
-            <a:r>
-              <a:rPr lang="en-US" sz="1600">
-                <a:solidFill>
-                  <a:srgbClr val="000000"/>
-                </a:solidFill>
-              </a:rPr>
-              <a:t>  Running late, they fill in four forms with answers copied from neighbors. What is the problem?</a:t>
-            </a:r>
-          </a:p>
-        </p:txBody>
-      </p:sp>
-      <p:sp>
-        <p:nvSpPr>
-          <p:cNvPr id="11" name="TextBox 10">
-            <a:extLst>
-              <a:ext uri="{FF2B5EF4-FFF2-40B4-BE49-F238E27FC236}">
-                <a16:creationId xmlns:a16="http://schemas.microsoft.com/office/drawing/2014/main" id="{28CD2DD0-5481-A2A7-66F2-84DB6CD15D72}"/>
-              </a:ext>
-            </a:extLst>
-          </p:cNvPr>
-          <p:cNvSpPr txBox="1"/>
-          <p:nvPr/>
-        </p:nvSpPr>
-        <p:spPr>
-          <a:xfrm>
-            <a:off x="1117600" y="4437380"/>
-            <a:ext cx="10312400" cy="345440"/>
-          </a:xfrm>
-          <a:prstGeom prst="rect">
-            <a:avLst/>
-          </a:prstGeom>
-          <a:noFill/>
-        </p:spPr>
-        <p:txBody>
-          <a:bodyPr vert="horz" wrap="square" rtlCol="0">
-            <a:noAutofit/>
-          </a:bodyPr>
-          <a:lstStyle/>
-          <a:p>
-            <a:r>
-              <a:rPr lang="en-US" sz="1600" b="1">
-                <a:solidFill>
-                  <a:srgbClr val="C00000"/>
-                </a:solidFill>
-              </a:rPr>
-              <a:t>Fabricated data. It is never acceptable, even when the answers look realistic.</a:t>
+              <a:t>Ethics also means honest data. An investigation of psychologist Diederik Stapel, infamous social psychologist, found he had invented data: it tainted more than 55 of his papers and 10 PhD dissertations he supervised. A researcher is surveying households in a community:</a:t>
             </a:r>
           </a:p>
         </p:txBody>
@@ -18744,357 +17073,10 @@
   <p:clrMapOvr>
     <a:masterClrMapping/>
   </p:clrMapOvr>
-  <p:timing>
-    <p:tnLst>
-      <p:par>
-        <p:cTn id="1" dur="indefinite" restart="never" nodeType="tmRoot">
-          <p:childTnLst>
-            <p:seq concurrent="1" nextAc="seek">
-              <p:cTn id="2" dur="indefinite" nodeType="mainSeq">
-                <p:childTnLst>
-                  <p:par>
-                    <p:cTn id="3" fill="hold">
-                      <p:stCondLst>
-                        <p:cond delay="indefinite"/>
-                      </p:stCondLst>
-                      <p:childTnLst>
-                        <p:par>
-                          <p:cTn id="4" fill="hold">
-                            <p:stCondLst>
-                              <p:cond delay="0"/>
-                            </p:stCondLst>
-                            <p:childTnLst>
-                              <p:par>
-                                <p:cTn id="5" presetID="34" presetClass="entr" presetSubtype="0" fill="hold" grpId="0" nodeType="clickEffect">
-                                  <p:stCondLst>
-                                    <p:cond delay="0"/>
-                                  </p:stCondLst>
-                                  <p:childTnLst>
-                                    <p:set>
-                                      <p:cBhvr>
-                                        <p:cTn id="6" dur="1" fill="hold">
-                                          <p:stCondLst>
-                                            <p:cond delay="0"/>
-                                          </p:stCondLst>
-                                        </p:cTn>
-                                        <p:tgtEl>
-                                          <p:spTgt spid="7"/>
-                                        </p:tgtEl>
-                                        <p:attrNameLst>
-                                          <p:attrName>style.visibility</p:attrName>
-                                        </p:attrNameLst>
-                                      </p:cBhvr>
-                                      <p:to>
-                                        <p:strVal val="visible"/>
-                                      </p:to>
-                                    </p:set>
-                                    <p:anim from="(-#ppt_w/2)" to="(#ppt_x)" calcmode="lin" valueType="num">
-                                      <p:cBhvr>
-                                        <p:cTn id="7" dur="600" fill="hold">
-                                          <p:stCondLst>
-                                            <p:cond delay="0"/>
-                                          </p:stCondLst>
-                                        </p:cTn>
-                                        <p:tgtEl>
-                                          <p:spTgt spid="7"/>
-                                        </p:tgtEl>
-                                        <p:attrNameLst>
-                                          <p:attrName>ppt_x</p:attrName>
-                                        </p:attrNameLst>
-                                      </p:cBhvr>
-                                    </p:anim>
-                                    <p:anim from="0" to="-1.0" calcmode="lin" valueType="num">
-                                      <p:cBhvr>
-                                        <p:cTn id="8" dur="200" decel="50000" autoRev="1" fill="hold">
-                                          <p:stCondLst>
-                                            <p:cond delay="600"/>
-                                          </p:stCondLst>
-                                        </p:cTn>
-                                        <p:tgtEl>
-                                          <p:spTgt spid="7"/>
-                                        </p:tgtEl>
-                                        <p:attrNameLst>
-                                          <p:attrName>xshear</p:attrName>
-                                        </p:attrNameLst>
-                                      </p:cBhvr>
-                                    </p:anim>
-                                    <p:animScale>
-                                      <p:cBhvr>
-                                        <p:cTn id="9" dur="200" decel="100000" autoRev="1" fill="hold">
-                                          <p:stCondLst>
-                                            <p:cond delay="600"/>
-                                          </p:stCondLst>
-                                        </p:cTn>
-                                        <p:tgtEl>
-                                          <p:spTgt spid="7"/>
-                                        </p:tgtEl>
-                                      </p:cBhvr>
-                                      <p:from x="100000" y="100000"/>
-                                      <p:to x="80000" y="100000"/>
-                                    </p:animScale>
-                                    <p:anim by="(#ppt_h/3+#ppt_w*0.1)" calcmode="lin" valueType="num">
-                                      <p:cBhvr additive="sum">
-                                        <p:cTn id="10" dur="200" decel="100000" autoRev="1" fill="hold">
-                                          <p:stCondLst>
-                                            <p:cond delay="600"/>
-                                          </p:stCondLst>
-                                        </p:cTn>
-                                        <p:tgtEl>
-                                          <p:spTgt spid="7"/>
-                                        </p:tgtEl>
-                                        <p:attrNameLst>
-                                          <p:attrName>ppt_x</p:attrName>
-                                        </p:attrNameLst>
-                                      </p:cBhvr>
-                                    </p:anim>
-                                  </p:childTnLst>
-                                </p:cTn>
-                              </p:par>
-                            </p:childTnLst>
-                          </p:cTn>
-                        </p:par>
-                      </p:childTnLst>
-                    </p:cTn>
-                  </p:par>
-                  <p:par>
-                    <p:cTn id="11" fill="hold">
-                      <p:stCondLst>
-                        <p:cond delay="indefinite"/>
-                      </p:stCondLst>
-                      <p:childTnLst>
-                        <p:par>
-                          <p:cTn id="12" fill="hold">
-                            <p:stCondLst>
-                              <p:cond delay="0"/>
-                            </p:stCondLst>
-                            <p:childTnLst>
-                              <p:par>
-                                <p:cTn id="13" presetID="34" presetClass="entr" presetSubtype="0" fill="hold" grpId="0" nodeType="clickEffect">
-                                  <p:stCondLst>
-                                    <p:cond delay="0"/>
-                                  </p:stCondLst>
-                                  <p:childTnLst>
-                                    <p:set>
-                                      <p:cBhvr>
-                                        <p:cTn id="14" dur="1" fill="hold">
-                                          <p:stCondLst>
-                                            <p:cond delay="0"/>
-                                          </p:stCondLst>
-                                        </p:cTn>
-                                        <p:tgtEl>
-                                          <p:spTgt spid="9"/>
-                                        </p:tgtEl>
-                                        <p:attrNameLst>
-                                          <p:attrName>style.visibility</p:attrName>
-                                        </p:attrNameLst>
-                                      </p:cBhvr>
-                                      <p:to>
-                                        <p:strVal val="visible"/>
-                                      </p:to>
-                                    </p:set>
-                                    <p:anim from="(-#ppt_w/2)" to="(#ppt_x)" calcmode="lin" valueType="num">
-                                      <p:cBhvr>
-                                        <p:cTn id="15" dur="600" fill="hold">
-                                          <p:stCondLst>
-                                            <p:cond delay="0"/>
-                                          </p:stCondLst>
-                                        </p:cTn>
-                                        <p:tgtEl>
-                                          <p:spTgt spid="9"/>
-                                        </p:tgtEl>
-                                        <p:attrNameLst>
-                                          <p:attrName>ppt_x</p:attrName>
-                                        </p:attrNameLst>
-                                      </p:cBhvr>
-                                    </p:anim>
-                                    <p:anim from="0" to="-1.0" calcmode="lin" valueType="num">
-                                      <p:cBhvr>
-                                        <p:cTn id="16" dur="200" decel="50000" autoRev="1" fill="hold">
-                                          <p:stCondLst>
-                                            <p:cond delay="600"/>
-                                          </p:stCondLst>
-                                        </p:cTn>
-                                        <p:tgtEl>
-                                          <p:spTgt spid="9"/>
-                                        </p:tgtEl>
-                                        <p:attrNameLst>
-                                          <p:attrName>xshear</p:attrName>
-                                        </p:attrNameLst>
-                                      </p:cBhvr>
-                                    </p:anim>
-                                    <p:animScale>
-                                      <p:cBhvr>
-                                        <p:cTn id="17" dur="200" decel="100000" autoRev="1" fill="hold">
-                                          <p:stCondLst>
-                                            <p:cond delay="600"/>
-                                          </p:stCondLst>
-                                        </p:cTn>
-                                        <p:tgtEl>
-                                          <p:spTgt spid="9"/>
-                                        </p:tgtEl>
-                                      </p:cBhvr>
-                                      <p:from x="100000" y="100000"/>
-                                      <p:to x="80000" y="100000"/>
-                                    </p:animScale>
-                                    <p:anim by="(#ppt_h/3+#ppt_w*0.1)" calcmode="lin" valueType="num">
-                                      <p:cBhvr additive="sum">
-                                        <p:cTn id="18" dur="200" decel="100000" autoRev="1" fill="hold">
-                                          <p:stCondLst>
-                                            <p:cond delay="600"/>
-                                          </p:stCondLst>
-                                        </p:cTn>
-                                        <p:tgtEl>
-                                          <p:spTgt spid="9"/>
-                                        </p:tgtEl>
-                                        <p:attrNameLst>
-                                          <p:attrName>ppt_x</p:attrName>
-                                        </p:attrNameLst>
-                                      </p:cBhvr>
-                                    </p:anim>
-                                  </p:childTnLst>
-                                </p:cTn>
-                              </p:par>
-                            </p:childTnLst>
-                          </p:cTn>
-                        </p:par>
-                      </p:childTnLst>
-                    </p:cTn>
-                  </p:par>
-                  <p:par>
-                    <p:cTn id="19" fill="hold">
-                      <p:stCondLst>
-                        <p:cond delay="indefinite"/>
-                      </p:stCondLst>
-                      <p:childTnLst>
-                        <p:par>
-                          <p:cTn id="20" fill="hold">
-                            <p:stCondLst>
-                              <p:cond delay="0"/>
-                            </p:stCondLst>
-                            <p:childTnLst>
-                              <p:par>
-                                <p:cTn id="21" presetID="34" presetClass="entr" presetSubtype="0" fill="hold" grpId="0" nodeType="clickEffect">
-                                  <p:stCondLst>
-                                    <p:cond delay="0"/>
-                                  </p:stCondLst>
-                                  <p:childTnLst>
-                                    <p:set>
-                                      <p:cBhvr>
-                                        <p:cTn id="22" dur="1" fill="hold">
-                                          <p:stCondLst>
-                                            <p:cond delay="0"/>
-                                          </p:stCondLst>
-                                        </p:cTn>
-                                        <p:tgtEl>
-                                          <p:spTgt spid="11"/>
-                                        </p:tgtEl>
-                                        <p:attrNameLst>
-                                          <p:attrName>style.visibility</p:attrName>
-                                        </p:attrNameLst>
-                                      </p:cBhvr>
-                                      <p:to>
-                                        <p:strVal val="visible"/>
-                                      </p:to>
-                                    </p:set>
-                                    <p:anim from="(-#ppt_w/2)" to="(#ppt_x)" calcmode="lin" valueType="num">
-                                      <p:cBhvr>
-                                        <p:cTn id="23" dur="600" fill="hold">
-                                          <p:stCondLst>
-                                            <p:cond delay="0"/>
-                                          </p:stCondLst>
-                                        </p:cTn>
-                                        <p:tgtEl>
-                                          <p:spTgt spid="11"/>
-                                        </p:tgtEl>
-                                        <p:attrNameLst>
-                                          <p:attrName>ppt_x</p:attrName>
-                                        </p:attrNameLst>
-                                      </p:cBhvr>
-                                    </p:anim>
-                                    <p:anim from="0" to="-1.0" calcmode="lin" valueType="num">
-                                      <p:cBhvr>
-                                        <p:cTn id="24" dur="200" decel="50000" autoRev="1" fill="hold">
-                                          <p:stCondLst>
-                                            <p:cond delay="600"/>
-                                          </p:stCondLst>
-                                        </p:cTn>
-                                        <p:tgtEl>
-                                          <p:spTgt spid="11"/>
-                                        </p:tgtEl>
-                                        <p:attrNameLst>
-                                          <p:attrName>xshear</p:attrName>
-                                        </p:attrNameLst>
-                                      </p:cBhvr>
-                                    </p:anim>
-                                    <p:animScale>
-                                      <p:cBhvr>
-                                        <p:cTn id="25" dur="200" decel="100000" autoRev="1" fill="hold">
-                                          <p:stCondLst>
-                                            <p:cond delay="600"/>
-                                          </p:stCondLst>
-                                        </p:cTn>
-                                        <p:tgtEl>
-                                          <p:spTgt spid="11"/>
-                                        </p:tgtEl>
-                                      </p:cBhvr>
-                                      <p:from x="100000" y="100000"/>
-                                      <p:to x="80000" y="100000"/>
-                                    </p:animScale>
-                                    <p:anim by="(#ppt_h/3+#ppt_w*0.1)" calcmode="lin" valueType="num">
-                                      <p:cBhvr additive="sum">
-                                        <p:cTn id="26" dur="200" decel="100000" autoRev="1" fill="hold">
-                                          <p:stCondLst>
-                                            <p:cond delay="600"/>
-                                          </p:stCondLst>
-                                        </p:cTn>
-                                        <p:tgtEl>
-                                          <p:spTgt spid="11"/>
-                                        </p:tgtEl>
-                                        <p:attrNameLst>
-                                          <p:attrName>ppt_x</p:attrName>
-                                        </p:attrNameLst>
-                                      </p:cBhvr>
-                                    </p:anim>
-                                  </p:childTnLst>
-                                </p:cTn>
-                              </p:par>
-                            </p:childTnLst>
-                          </p:cTn>
-                        </p:par>
-                      </p:childTnLst>
-                    </p:cTn>
-                  </p:par>
-                </p:childTnLst>
-              </p:cTn>
-              <p:prevCondLst>
-                <p:cond evt="onPrev" delay="0">
-                  <p:tgtEl>
-                    <p:sldTgt/>
-                  </p:tgtEl>
-                </p:cond>
-              </p:prevCondLst>
-              <p:nextCondLst>
-                <p:cond evt="onNext" delay="0">
-                  <p:tgtEl>
-                    <p:sldTgt/>
-                  </p:tgtEl>
-                </p:cond>
-              </p:nextCondLst>
-            </p:seq>
-          </p:childTnLst>
-        </p:cTn>
-      </p:par>
-    </p:tnLst>
-    <p:bldLst>
-      <p:bldP spid="7" grpId="0"/>
-      <p:bldP spid="9" grpId="0"/>
-      <p:bldP spid="11" grpId="0"/>
-    </p:bldLst>
-  </p:timing>
 </p:sld>
 </file>
 
-<file path=ppt/slides/slide29.xml><?xml version="1.0" encoding="utf-8"?>
+<file path=ppt/slides/slide28.xml><?xml version="1.0" encoding="utf-8"?>
 <p:sld xmlns:a="http://schemas.openxmlformats.org/drawingml/2006/main" xmlns:r="http://schemas.openxmlformats.org/officeDocument/2006/relationships" xmlns:p="http://schemas.openxmlformats.org/presentationml/2006/main">
   <p:cSld>
     <p:spTree>
@@ -19168,7 +17150,7 @@
           <a:p>
             <a:fld id="{A80A81DD-F10A-4B1C-963A-0ABBB4865886}" type="slidenum">
               <a:rPr lang="en-US" sz="1600" smtClean="0"/>
-              <a:t>29</a:t>
+              <a:t>28</a:t>
             </a:fld>
             <a:endParaRPr lang="en-US" sz="1600"/>
           </a:p>
@@ -19431,93 +17413,6 @@
                 </a:solidFill>
               </a:rPr>
               <a:t>Randomized block design, with greenhouses as the blocks - it can show cause.</a:t>
-            </a:r>
-          </a:p>
-        </p:txBody>
-      </p:sp>
-      <p:sp>
-        <p:nvSpPr>
-          <p:cNvPr id="11" name="TextBox 10">
-            <a:extLst>
-              <a:ext uri="{FF2B5EF4-FFF2-40B4-BE49-F238E27FC236}">
-                <a16:creationId xmlns:a16="http://schemas.microsoft.com/office/drawing/2014/main" id="{10AB4AB3-AF76-E343-8E9D-F510689F4DA5}"/>
-              </a:ext>
-            </a:extLst>
-          </p:cNvPr>
-          <p:cNvSpPr txBox="1"/>
-          <p:nvPr/>
-        </p:nvSpPr>
-        <p:spPr>
-          <a:xfrm>
-            <a:off x="762000" y="4218939"/>
-            <a:ext cx="10668000" cy="589280"/>
-          </a:xfrm>
-          <a:prstGeom prst="rect">
-            <a:avLst/>
-          </a:prstGeom>
-          <a:noFill/>
-        </p:spPr>
-        <p:txBody>
-          <a:bodyPr vert="horz" wrap="square" rtlCol="0">
-            <a:noAutofit/>
-          </a:bodyPr>
-          <a:lstStyle/>
-          <a:p>
-            <a:pPr marL="304800" indent="-304800"/>
-            <a:r>
-              <a:rPr lang="en-US" sz="1600" b="1">
-                <a:solidFill>
-                  <a:srgbClr val="C00000"/>
-                </a:solidFill>
-              </a:rPr>
-              <a:t>4.</a:t>
-            </a:r>
-            <a:r>
-              <a:rPr lang="en-US" sz="1600">
-                <a:solidFill>
-                  <a:srgbClr val="000000"/>
-                </a:solidFill>
-              </a:rPr>
-              <a:t>  Subjects complete mazes wearing a floral-scented mask and an unscented mask, in a random order. Can the subjects be blinded?</a:t>
-            </a:r>
-          </a:p>
-        </p:txBody>
-      </p:sp>
-      <p:sp>
-        <p:nvSpPr>
-          <p:cNvPr id="12" name="TextBox 11">
-            <a:extLst>
-              <a:ext uri="{FF2B5EF4-FFF2-40B4-BE49-F238E27FC236}">
-                <a16:creationId xmlns:a16="http://schemas.microsoft.com/office/drawing/2014/main" id="{D08CA5C4-59E4-103B-3E2C-908EA083FB6B}"/>
-              </a:ext>
-            </a:extLst>
-          </p:cNvPr>
-          <p:cNvSpPr txBox="1"/>
-          <p:nvPr/>
-        </p:nvSpPr>
-        <p:spPr>
-          <a:xfrm>
-            <a:off x="1117600" y="4757420"/>
-            <a:ext cx="10312400" cy="345440"/>
-          </a:xfrm>
-          <a:prstGeom prst="rect">
-            <a:avLst/>
-          </a:prstGeom>
-          <a:noFill/>
-        </p:spPr>
-        <p:txBody>
-          <a:bodyPr vert="horz" wrap="square" rtlCol="0">
-            <a:noAutofit/>
-          </a:bodyPr>
-          <a:lstStyle/>
-          <a:p>
-            <a:r>
-              <a:rPr lang="en-US" sz="1600" b="1">
-                <a:solidFill>
-                  <a:srgbClr val="C00000"/>
-                </a:solidFill>
-              </a:rPr>
-              <a:t>No - they can smell the flowers. But the researchers timing the mazes can be blinded. (Textbook Example 1.20)</a:t>
             </a:r>
           </a:p>
         </p:txBody>
@@ -19920,33 +17815,462 @@
                       </p:childTnLst>
                     </p:cTn>
                   </p:par>
+                </p:childTnLst>
+              </p:cTn>
+              <p:prevCondLst>
+                <p:cond evt="onPrev" delay="0">
+                  <p:tgtEl>
+                    <p:sldTgt/>
+                  </p:tgtEl>
+                </p:cond>
+              </p:prevCondLst>
+              <p:nextCondLst>
+                <p:cond evt="onNext" delay="0">
+                  <p:tgtEl>
+                    <p:sldTgt/>
+                  </p:tgtEl>
+                </p:cond>
+              </p:nextCondLst>
+            </p:seq>
+          </p:childTnLst>
+        </p:cTn>
+      </p:par>
+    </p:tnLst>
+    <p:bldLst>
+      <p:bldP spid="6" grpId="0"/>
+      <p:bldP spid="8" grpId="0"/>
+      <p:bldP spid="10" grpId="0"/>
+    </p:bldLst>
+  </p:timing>
+</p:sld>
+</file>
+
+<file path=ppt/slides/slide3.xml><?xml version="1.0" encoding="utf-8"?>
+<p:sld xmlns:a="http://schemas.openxmlformats.org/drawingml/2006/main" xmlns:r="http://schemas.openxmlformats.org/officeDocument/2006/relationships" xmlns:p="http://schemas.openxmlformats.org/presentationml/2006/main">
+  <p:cSld>
+    <p:spTree>
+      <p:nvGrpSpPr>
+        <p:cNvPr id="1" name=""/>
+        <p:cNvGrpSpPr/>
+        <p:nvPr/>
+      </p:nvGrpSpPr>
+      <p:grpSpPr>
+        <a:xfrm>
+          <a:off x="0" y="0"/>
+          <a:ext cx="0" cy="0"/>
+          <a:chOff x="0" y="0"/>
+          <a:chExt cx="0" cy="0"/>
+        </a:xfrm>
+      </p:grpSpPr>
+      <p:sp>
+        <p:nvSpPr>
+          <p:cNvPr id="2" name="Title 1"/>
+          <p:cNvSpPr>
+            <a:spLocks noGrp="1"/>
+          </p:cNvSpPr>
+          <p:nvPr>
+            <p:ph type="title"/>
+          </p:nvPr>
+        </p:nvSpPr>
+        <p:spPr>
+          <a:xfrm>
+            <a:off x="838200" y="365126"/>
+            <a:ext cx="10515600" cy="705104"/>
+          </a:xfrm>
+        </p:spPr>
+        <p:txBody>
+          <a:bodyPr>
+            <a:noAutofit/>
+          </a:bodyPr>
+          <a:lstStyle/>
+          <a:p>
+            <a:r>
+              <a:rPr lang="en-US">
+                <a:solidFill>
+                  <a:srgbClr val="1F3864"/>
+                </a:solidFill>
+              </a:rPr>
+              <a:t>Review</a:t>
+            </a:r>
+            <a:endParaRPr lang="en-US" dirty="0">
+              <a:solidFill>
+                <a:srgbClr val="1F3864"/>
+              </a:solidFill>
+            </a:endParaRPr>
+          </a:p>
+        </p:txBody>
+      </p:sp>
+      <p:sp>
+        <p:nvSpPr>
+          <p:cNvPr id="3" name="Question 1"/>
+          <p:cNvSpPr/>
+          <p:nvPr/>
+        </p:nvSpPr>
+        <p:spPr>
+          <a:xfrm>
+            <a:off x="838200" y="1075688"/>
+            <a:ext cx="10515600" cy="1230000"/>
+          </a:xfrm>
+          <a:prstGeom prst="roundRect">
+            <a:avLst>
+              <a:gd name="adj" fmla="val 4000"/>
+            </a:avLst>
+          </a:prstGeom>
+          <a:solidFill>
+            <a:srgbClr val="F2F6FC"/>
+          </a:solidFill>
+          <a:ln w="19050">
+            <a:solidFill>
+              <a:schemeClr val="accent1"/>
+            </a:solidFill>
+          </a:ln>
+        </p:spPr>
+        <p:txBody>
+          <a:bodyPr lIns="228600" tIns="182880" rIns="228600" bIns="91440" anchor="t">
+            <a:noAutofit/>
+          </a:bodyPr>
+          <a:lstStyle/>
+          <a:p>
+            <a:pPr marL="0" indent="0">
+              <a:buNone/>
+            </a:pPr>
+            <a:r>
+              <a:rPr lang="en-US" b="1">
+                <a:solidFill>
+                  <a:srgbClr val="C00000"/>
+                </a:solidFill>
+              </a:rPr>
+              <a:t>1</a:t>
+            </a:r>
+            <a:r>
+              <a:rPr lang="en-US" b="1">
+                <a:solidFill>
+                  <a:srgbClr val="000000"/>
+                </a:solidFill>
+              </a:rPr>
+              <a:t>   What is a stratified random sample?</a:t>
+            </a:r>
+            <a:endParaRPr lang="en-US" b="1" dirty="0">
+              <a:solidFill>
+                <a:srgbClr val="000000"/>
+              </a:solidFill>
+            </a:endParaRPr>
+          </a:p>
+        </p:txBody>
+      </p:sp>
+      <p:sp>
+        <p:nvSpPr>
+          <p:cNvPr id="4" name="Answer 1"/>
+          <p:cNvSpPr txBox="1"/>
+          <p:nvPr/>
+        </p:nvSpPr>
+        <p:spPr>
+          <a:xfrm>
+            <a:off x="1066800" y="1655688"/>
+            <a:ext cx="10058400" cy="650240"/>
+          </a:xfrm>
+          <a:prstGeom prst="rect">
+            <a:avLst/>
+          </a:prstGeom>
+          <a:noFill/>
+        </p:spPr>
+        <p:txBody>
+          <a:bodyPr wrap="square" lIns="0" tIns="0" rIns="0" bIns="0">
+            <a:noAutofit/>
+          </a:bodyPr>
+          <a:lstStyle/>
+          <a:p>
+            <a:pPr marL="0" indent="0">
+              <a:buNone/>
+            </a:pPr>
+            <a:r>
+              <a:rPr lang="en-US" sz="1600">
+                <a:solidFill>
+                  <a:srgbClr val="C00000"/>
+                </a:solidFill>
+              </a:rPr>
+              <a:t>Split the population into groups of similar units (strata), then take a separate SRS inside every stratum.</a:t>
+            </a:r>
+            <a:endParaRPr lang="en-US" sz="1600" dirty="0">
+              <a:solidFill>
+                <a:srgbClr val="C00000"/>
+              </a:solidFill>
+            </a:endParaRPr>
+          </a:p>
+        </p:txBody>
+      </p:sp>
+      <p:sp>
+        <p:nvSpPr>
+          <p:cNvPr id="5" name="Question 2"/>
+          <p:cNvSpPr/>
+          <p:nvPr/>
+        </p:nvSpPr>
+        <p:spPr>
+          <a:xfrm>
+            <a:off x="838200" y="2385688"/>
+            <a:ext cx="10515600" cy="1230000"/>
+          </a:xfrm>
+          <a:prstGeom prst="roundRect">
+            <a:avLst>
+              <a:gd name="adj" fmla="val 4000"/>
+            </a:avLst>
+          </a:prstGeom>
+          <a:solidFill>
+            <a:srgbClr val="F2F6FC"/>
+          </a:solidFill>
+          <a:ln w="19050">
+            <a:solidFill>
+              <a:schemeClr val="accent1"/>
+            </a:solidFill>
+          </a:ln>
+        </p:spPr>
+        <p:txBody>
+          <a:bodyPr lIns="228600" tIns="182880" rIns="228600" bIns="91440" anchor="t">
+            <a:noAutofit/>
+          </a:bodyPr>
+          <a:lstStyle/>
+          <a:p>
+            <a:pPr marL="0" indent="0">
+              <a:buNone/>
+            </a:pPr>
+            <a:r>
+              <a:rPr lang="en-US" b="1">
+                <a:solidFill>
+                  <a:srgbClr val="C00000"/>
+                </a:solidFill>
+              </a:rPr>
+              <a:t>2</a:t>
+            </a:r>
+            <a:r>
+              <a:rPr lang="en-US" b="1">
+                <a:solidFill>
+                  <a:srgbClr val="000000"/>
+                </a:solidFill>
+              </a:rPr>
+              <a:t>   What is a cluster sample?</a:t>
+            </a:r>
+            <a:endParaRPr lang="en-US" b="1" dirty="0">
+              <a:solidFill>
+                <a:srgbClr val="000000"/>
+              </a:solidFill>
+            </a:endParaRPr>
+          </a:p>
+        </p:txBody>
+      </p:sp>
+      <p:sp>
+        <p:nvSpPr>
+          <p:cNvPr id="6" name="Answer 2"/>
+          <p:cNvSpPr txBox="1"/>
+          <p:nvPr/>
+        </p:nvSpPr>
+        <p:spPr>
+          <a:xfrm>
+            <a:off x="1066800" y="2965688"/>
+            <a:ext cx="10058400" cy="589280"/>
+          </a:xfrm>
+          <a:prstGeom prst="rect">
+            <a:avLst/>
+          </a:prstGeom>
+          <a:noFill/>
+        </p:spPr>
+        <p:txBody>
+          <a:bodyPr wrap="square" lIns="0" tIns="0" rIns="0" bIns="0">
+            <a:noAutofit/>
+          </a:bodyPr>
+          <a:lstStyle/>
+          <a:p>
+            <a:pPr marL="0" indent="0">
+              <a:buNone/>
+            </a:pPr>
+            <a:r>
+              <a:rPr lang="en-US" sz="1600">
+                <a:solidFill>
+                  <a:srgbClr val="C00000"/>
+                </a:solidFill>
+              </a:rPr>
+              <a:t>Take an SRS of naturally occurring groups (clusters), then measure every unit in the clusters chosen.</a:t>
+            </a:r>
+            <a:endParaRPr lang="en-US" sz="1600" dirty="0">
+              <a:solidFill>
+                <a:srgbClr val="C00000"/>
+              </a:solidFill>
+            </a:endParaRPr>
+          </a:p>
+        </p:txBody>
+      </p:sp>
+      <p:sp>
+        <p:nvSpPr>
+          <p:cNvPr id="7" name="Question 3"/>
+          <p:cNvSpPr/>
+          <p:nvPr/>
+        </p:nvSpPr>
+        <p:spPr>
+          <a:xfrm>
+            <a:off x="838200" y="3695688"/>
+            <a:ext cx="10515600" cy="1230000"/>
+          </a:xfrm>
+          <a:prstGeom prst="roundRect">
+            <a:avLst>
+              <a:gd name="adj" fmla="val 4000"/>
+            </a:avLst>
+          </a:prstGeom>
+          <a:solidFill>
+            <a:srgbClr val="F2F6FC"/>
+          </a:solidFill>
+          <a:ln w="19050">
+            <a:solidFill>
+              <a:schemeClr val="accent1"/>
+            </a:solidFill>
+          </a:ln>
+        </p:spPr>
+        <p:txBody>
+          <a:bodyPr lIns="228600" tIns="182880" rIns="228600" bIns="91440" anchor="t">
+            <a:noAutofit/>
+          </a:bodyPr>
+          <a:lstStyle/>
+          <a:p>
+            <a:pPr marL="0" indent="0">
+              <a:buNone/>
+            </a:pPr>
+            <a:r>
+              <a:rPr lang="en-US" b="1">
+                <a:solidFill>
+                  <a:srgbClr val="C00000"/>
+                </a:solidFill>
+              </a:rPr>
+              <a:t>3</a:t>
+            </a:r>
+            <a:r>
+              <a:rPr lang="en-US" b="1">
+                <a:solidFill>
+                  <a:srgbClr val="000000"/>
+                </a:solidFill>
+              </a:rPr>
+              <a:t>   What is a two-stage cluster sample?</a:t>
+            </a:r>
+            <a:endParaRPr lang="en-US" b="1" dirty="0">
+              <a:solidFill>
+                <a:srgbClr val="000000"/>
+              </a:solidFill>
+            </a:endParaRPr>
+          </a:p>
+        </p:txBody>
+      </p:sp>
+      <p:sp>
+        <p:nvSpPr>
+          <p:cNvPr id="8" name="Answer 3"/>
+          <p:cNvSpPr txBox="1"/>
+          <p:nvPr/>
+        </p:nvSpPr>
+        <p:spPr>
+          <a:xfrm>
+            <a:off x="1066800" y="4275688"/>
+            <a:ext cx="10058400" cy="558560"/>
+          </a:xfrm>
+          <a:prstGeom prst="rect">
+            <a:avLst/>
+          </a:prstGeom>
+          <a:noFill/>
+        </p:spPr>
+        <p:txBody>
+          <a:bodyPr wrap="square" lIns="0" tIns="0" rIns="0" bIns="0">
+            <a:noAutofit/>
+          </a:bodyPr>
+          <a:lstStyle/>
+          <a:p>
+            <a:pPr marL="0" indent="0">
+              <a:buNone/>
+            </a:pPr>
+            <a:r>
+              <a:rPr lang="en-US" sz="1600">
+                <a:solidFill>
+                  <a:srgbClr val="C00000"/>
+                </a:solidFill>
+              </a:rPr>
+              <a:t>Stage 1: an SRS of clusters. Stage 2: an SRS of units inside each chosen cluster, not all of them.</a:t>
+            </a:r>
+            <a:endParaRPr lang="en-US" sz="1600" dirty="0">
+              <a:solidFill>
+                <a:srgbClr val="C00000"/>
+              </a:solidFill>
+            </a:endParaRPr>
+          </a:p>
+        </p:txBody>
+      </p:sp>
+      <p:sp>
+        <p:nvSpPr>
+          <p:cNvPr id="11" name="Slide Number Placeholder 10">
+            <a:extLst>
+              <a:ext uri="{FF2B5EF4-FFF2-40B4-BE49-F238E27FC236}">
+                <a16:creationId xmlns:a16="http://schemas.microsoft.com/office/drawing/2014/main" id="{266091C9-B7EB-6BBE-A602-1479CDF9719E}"/>
+              </a:ext>
+            </a:extLst>
+          </p:cNvPr>
+          <p:cNvSpPr>
+            <a:spLocks noGrp="1"/>
+          </p:cNvSpPr>
+          <p:nvPr>
+            <p:ph type="sldNum" sz="quarter" idx="12"/>
+          </p:nvPr>
+        </p:nvSpPr>
+        <p:spPr/>
+        <p:txBody>
+          <a:bodyPr/>
+          <a:lstStyle/>
+          <a:p>
+            <a:fld id="{A80A81DD-F10A-4B1C-963A-0ABBB4865886}" type="slidenum">
+              <a:rPr lang="en-US" sz="1600" smtClean="0"/>
+              <a:t>3</a:t>
+            </a:fld>
+            <a:endParaRPr lang="en-US" sz="1600"/>
+          </a:p>
+        </p:txBody>
+      </p:sp>
+    </p:spTree>
+    <p:extLst>
+      <p:ext uri="{BB962C8B-B14F-4D97-AF65-F5344CB8AC3E}">
+        <p14:creationId xmlns:p14="http://schemas.microsoft.com/office/powerpoint/2010/main" val="3513633955"/>
+      </p:ext>
+    </p:extLst>
+  </p:cSld>
+  <p:clrMapOvr>
+    <a:masterClrMapping/>
+  </p:clrMapOvr>
+  <p:timing>
+    <p:tnLst>
+      <p:par>
+        <p:cTn id="1" dur="indefinite" restart="never" nodeType="tmRoot">
+          <p:childTnLst>
+            <p:seq concurrent="1" nextAc="seek">
+              <p:cTn id="2" dur="indefinite" nodeType="mainSeq">
+                <p:childTnLst>
                   <p:par>
-                    <p:cTn id="27" fill="hold">
+                    <p:cTn id="3" fill="hold">
                       <p:stCondLst>
                         <p:cond delay="indefinite"/>
                       </p:stCondLst>
                       <p:childTnLst>
                         <p:par>
-                          <p:cTn id="28" fill="hold">
+                          <p:cTn id="4" fill="hold">
                             <p:stCondLst>
                               <p:cond delay="0"/>
                             </p:stCondLst>
                             <p:childTnLst>
                               <p:par>
-                                <p:cTn id="29" presetID="34" presetClass="entr" presetSubtype="0" fill="hold" grpId="0" nodeType="clickEffect">
+                                <p:cTn id="5" presetID="1" presetClass="entr" presetSubtype="0" fill="hold" nodeType="clickEffect">
                                   <p:stCondLst>
                                     <p:cond delay="0"/>
                                   </p:stCondLst>
                                   <p:childTnLst>
                                     <p:set>
                                       <p:cBhvr>
-                                        <p:cTn id="30" dur="1" fill="hold">
+                                        <p:cTn id="6" dur="1" fill="hold">
                                           <p:stCondLst>
                                             <p:cond delay="0"/>
                                           </p:stCondLst>
                                         </p:cTn>
                                         <p:tgtEl>
-                                          <p:spTgt spid="12"/>
+                                          <p:spTgt spid="3"/>
                                         </p:tgtEl>
                                         <p:attrNameLst>
                                           <p:attrName>style.visibility</p:attrName>
@@ -19956,65 +18280,231 @@
                                         <p:strVal val="visible"/>
                                       </p:to>
                                     </p:set>
-                                    <p:anim from="(-#ppt_w/2)" to="(#ppt_x)" calcmode="lin" valueType="num">
-                                      <p:cBhvr>
-                                        <p:cTn id="31" dur="600" fill="hold">
+                                  </p:childTnLst>
+                                </p:cTn>
+                              </p:par>
+                            </p:childTnLst>
+                          </p:cTn>
+                        </p:par>
+                      </p:childTnLst>
+                    </p:cTn>
+                  </p:par>
+                  <p:par>
+                    <p:cTn id="7" fill="hold">
+                      <p:stCondLst>
+                        <p:cond delay="indefinite"/>
+                      </p:stCondLst>
+                      <p:childTnLst>
+                        <p:par>
+                          <p:cTn id="8" fill="hold">
+                            <p:stCondLst>
+                              <p:cond delay="0"/>
+                            </p:stCondLst>
+                            <p:childTnLst>
+                              <p:par>
+                                <p:cTn id="9" presetID="1" presetClass="entr" presetSubtype="0" fill="hold" nodeType="clickEffect">
+                                  <p:stCondLst>
+                                    <p:cond delay="0"/>
+                                  </p:stCondLst>
+                                  <p:childTnLst>
+                                    <p:set>
+                                      <p:cBhvr>
+                                        <p:cTn id="10" dur="1" fill="hold">
                                           <p:stCondLst>
                                             <p:cond delay="0"/>
                                           </p:stCondLst>
                                         </p:cTn>
                                         <p:tgtEl>
-                                          <p:spTgt spid="12"/>
-                                        </p:tgtEl>
-                                        <p:attrNameLst>
-                                          <p:attrName>ppt_x</p:attrName>
-                                        </p:attrNameLst>
-                                      </p:cBhvr>
-                                    </p:anim>
-                                    <p:anim from="0" to="-1.0" calcmode="lin" valueType="num">
-                                      <p:cBhvr>
-                                        <p:cTn id="32" dur="200" decel="50000" autoRev="1" fill="hold">
-                                          <p:stCondLst>
-                                            <p:cond delay="600"/>
-                                          </p:stCondLst>
-                                        </p:cTn>
-                                        <p:tgtEl>
-                                          <p:spTgt spid="12"/>
-                                        </p:tgtEl>
-                                        <p:attrNameLst>
-                                          <p:attrName>xshear</p:attrName>
-                                        </p:attrNameLst>
-                                      </p:cBhvr>
-                                    </p:anim>
-                                    <p:animScale>
-                                      <p:cBhvr>
-                                        <p:cTn id="33" dur="200" decel="100000" autoRev="1" fill="hold">
-                                          <p:stCondLst>
-                                            <p:cond delay="600"/>
-                                          </p:stCondLst>
-                                        </p:cTn>
-                                        <p:tgtEl>
-                                          <p:spTgt spid="12"/>
-                                        </p:tgtEl>
-                                      </p:cBhvr>
-                                      <p:from x="100000" y="100000"/>
-                                      <p:to x="80000" y="100000"/>
-                                    </p:animScale>
-                                    <p:anim by="(#ppt_h/3+#ppt_w*0.1)" calcmode="lin" valueType="num">
-                                      <p:cBhvr additive="sum">
-                                        <p:cTn id="34" dur="200" decel="100000" autoRev="1" fill="hold">
-                                          <p:stCondLst>
-                                            <p:cond delay="600"/>
-                                          </p:stCondLst>
-                                        </p:cTn>
-                                        <p:tgtEl>
-                                          <p:spTgt spid="12"/>
-                                        </p:tgtEl>
-                                        <p:attrNameLst>
-                                          <p:attrName>ppt_x</p:attrName>
-                                        </p:attrNameLst>
-                                      </p:cBhvr>
-                                    </p:anim>
+                                          <p:spTgt spid="4"/>
+                                        </p:tgtEl>
+                                        <p:attrNameLst>
+                                          <p:attrName>style.visibility</p:attrName>
+                                        </p:attrNameLst>
+                                      </p:cBhvr>
+                                      <p:to>
+                                        <p:strVal val="visible"/>
+                                      </p:to>
+                                    </p:set>
+                                  </p:childTnLst>
+                                </p:cTn>
+                              </p:par>
+                            </p:childTnLst>
+                          </p:cTn>
+                        </p:par>
+                      </p:childTnLst>
+                    </p:cTn>
+                  </p:par>
+                  <p:par>
+                    <p:cTn id="11" fill="hold">
+                      <p:stCondLst>
+                        <p:cond delay="indefinite"/>
+                      </p:stCondLst>
+                      <p:childTnLst>
+                        <p:par>
+                          <p:cTn id="12" fill="hold">
+                            <p:stCondLst>
+                              <p:cond delay="0"/>
+                            </p:stCondLst>
+                            <p:childTnLst>
+                              <p:par>
+                                <p:cTn id="13" presetID="1" presetClass="entr" presetSubtype="0" fill="hold" nodeType="clickEffect">
+                                  <p:stCondLst>
+                                    <p:cond delay="0"/>
+                                  </p:stCondLst>
+                                  <p:childTnLst>
+                                    <p:set>
+                                      <p:cBhvr>
+                                        <p:cTn id="14" dur="1" fill="hold">
+                                          <p:stCondLst>
+                                            <p:cond delay="0"/>
+                                          </p:stCondLst>
+                                        </p:cTn>
+                                        <p:tgtEl>
+                                          <p:spTgt spid="5"/>
+                                        </p:tgtEl>
+                                        <p:attrNameLst>
+                                          <p:attrName>style.visibility</p:attrName>
+                                        </p:attrNameLst>
+                                      </p:cBhvr>
+                                      <p:to>
+                                        <p:strVal val="visible"/>
+                                      </p:to>
+                                    </p:set>
+                                  </p:childTnLst>
+                                </p:cTn>
+                              </p:par>
+                            </p:childTnLst>
+                          </p:cTn>
+                        </p:par>
+                      </p:childTnLst>
+                    </p:cTn>
+                  </p:par>
+                  <p:par>
+                    <p:cTn id="15" fill="hold">
+                      <p:stCondLst>
+                        <p:cond delay="indefinite"/>
+                      </p:stCondLst>
+                      <p:childTnLst>
+                        <p:par>
+                          <p:cTn id="16" fill="hold">
+                            <p:stCondLst>
+                              <p:cond delay="0"/>
+                            </p:stCondLst>
+                            <p:childTnLst>
+                              <p:par>
+                                <p:cTn id="17" presetID="1" presetClass="entr" presetSubtype="0" fill="hold" nodeType="clickEffect">
+                                  <p:stCondLst>
+                                    <p:cond delay="0"/>
+                                  </p:stCondLst>
+                                  <p:childTnLst>
+                                    <p:set>
+                                      <p:cBhvr>
+                                        <p:cTn id="18" dur="1" fill="hold">
+                                          <p:stCondLst>
+                                            <p:cond delay="0"/>
+                                          </p:stCondLst>
+                                        </p:cTn>
+                                        <p:tgtEl>
+                                          <p:spTgt spid="6"/>
+                                        </p:tgtEl>
+                                        <p:attrNameLst>
+                                          <p:attrName>style.visibility</p:attrName>
+                                        </p:attrNameLst>
+                                      </p:cBhvr>
+                                      <p:to>
+                                        <p:strVal val="visible"/>
+                                      </p:to>
+                                    </p:set>
+                                  </p:childTnLst>
+                                </p:cTn>
+                              </p:par>
+                            </p:childTnLst>
+                          </p:cTn>
+                        </p:par>
+                      </p:childTnLst>
+                    </p:cTn>
+                  </p:par>
+                  <p:par>
+                    <p:cTn id="19" fill="hold">
+                      <p:stCondLst>
+                        <p:cond delay="indefinite"/>
+                      </p:stCondLst>
+                      <p:childTnLst>
+                        <p:par>
+                          <p:cTn id="20" fill="hold">
+                            <p:stCondLst>
+                              <p:cond delay="0"/>
+                            </p:stCondLst>
+                            <p:childTnLst>
+                              <p:par>
+                                <p:cTn id="21" presetID="1" presetClass="entr" presetSubtype="0" fill="hold" nodeType="clickEffect">
+                                  <p:stCondLst>
+                                    <p:cond delay="0"/>
+                                  </p:stCondLst>
+                                  <p:childTnLst>
+                                    <p:set>
+                                      <p:cBhvr>
+                                        <p:cTn id="22" dur="1" fill="hold">
+                                          <p:stCondLst>
+                                            <p:cond delay="0"/>
+                                          </p:stCondLst>
+                                        </p:cTn>
+                                        <p:tgtEl>
+                                          <p:spTgt spid="7"/>
+                                        </p:tgtEl>
+                                        <p:attrNameLst>
+                                          <p:attrName>style.visibility</p:attrName>
+                                        </p:attrNameLst>
+                                      </p:cBhvr>
+                                      <p:to>
+                                        <p:strVal val="visible"/>
+                                      </p:to>
+                                    </p:set>
+                                  </p:childTnLst>
+                                </p:cTn>
+                              </p:par>
+                            </p:childTnLst>
+                          </p:cTn>
+                        </p:par>
+                      </p:childTnLst>
+                    </p:cTn>
+                  </p:par>
+                  <p:par>
+                    <p:cTn id="23" fill="hold">
+                      <p:stCondLst>
+                        <p:cond delay="indefinite"/>
+                      </p:stCondLst>
+                      <p:childTnLst>
+                        <p:par>
+                          <p:cTn id="24" fill="hold">
+                            <p:stCondLst>
+                              <p:cond delay="0"/>
+                            </p:stCondLst>
+                            <p:childTnLst>
+                              <p:par>
+                                <p:cTn id="25" presetID="1" presetClass="entr" presetSubtype="0" fill="hold" nodeType="clickEffect">
+                                  <p:stCondLst>
+                                    <p:cond delay="0"/>
+                                  </p:stCondLst>
+                                  <p:childTnLst>
+                                    <p:set>
+                                      <p:cBhvr>
+                                        <p:cTn id="26" dur="1" fill="hold">
+                                          <p:stCondLst>
+                                            <p:cond delay="0"/>
+                                          </p:stCondLst>
+                                        </p:cTn>
+                                        <p:tgtEl>
+                                          <p:spTgt spid="8"/>
+                                        </p:tgtEl>
+                                        <p:attrNameLst>
+                                          <p:attrName>style.visibility</p:attrName>
+                                        </p:attrNameLst>
+                                      </p:cBhvr>
+                                      <p:to>
+                                        <p:strVal val="visible"/>
+                                      </p:to>
+                                    </p:set>
                                   </p:childTnLst>
                                 </p:cTn>
                               </p:par>
@@ -20045,17 +18535,11 @@
         </p:cTn>
       </p:par>
     </p:tnLst>
-    <p:bldLst>
-      <p:bldP spid="6" grpId="0"/>
-      <p:bldP spid="8" grpId="0"/>
-      <p:bldP spid="10" grpId="0"/>
-      <p:bldP spid="12" grpId="0"/>
-    </p:bldLst>
   </p:timing>
 </p:sld>
 </file>
 
-<file path=ppt/slides/slide3.xml><?xml version="1.0" encoding="utf-8"?>
+<file path=ppt/slides/slide4.xml><?xml version="1.0" encoding="utf-8"?>
 <p:sld xmlns:a="http://schemas.openxmlformats.org/drawingml/2006/main" xmlns:r="http://schemas.openxmlformats.org/officeDocument/2006/relationships" xmlns:p="http://schemas.openxmlformats.org/presentationml/2006/main">
   <p:cSld>
     <p:spTree>
@@ -20074,13 +18558,7 @@
       </p:grpSpPr>
       <p:sp>
         <p:nvSpPr>
-          <p:cNvPr id="2" name="Title 1">
-            <a:extLst>
-              <a:ext uri="{FF2B5EF4-FFF2-40B4-BE49-F238E27FC236}">
-                <a16:creationId xmlns:a16="http://schemas.microsoft.com/office/drawing/2014/main" id="{AD884FB8-131C-CD66-6D35-E547EB1DE879}"/>
-              </a:ext>
-            </a:extLst>
-          </p:cNvPr>
+          <p:cNvPr id="2" name="Title 1"/>
           <p:cNvSpPr>
             <a:spLocks noGrp="1"/>
           </p:cNvSpPr>
@@ -20088,7 +18566,12 @@
             <p:ph type="title"/>
           </p:nvPr>
         </p:nvSpPr>
-        <p:spPr/>
+        <p:spPr>
+          <a:xfrm>
+            <a:off x="838200" y="365126"/>
+            <a:ext cx="10515600" cy="705104"/>
+          </a:xfrm>
+        </p:spPr>
         <p:txBody>
           <a:bodyPr>
             <a:noAutofit/>
@@ -20101,17 +18584,319 @@
                   <a:srgbClr val="1F3864"/>
                 </a:solidFill>
               </a:rPr>
-              <a:t>Question wording: same law, two names</a:t>
-            </a:r>
-          </a:p>
-        </p:txBody>
-      </p:sp>
-      <p:sp>
-        <p:nvSpPr>
-          <p:cNvPr id="4" name="Slide Number Placeholder 3">
-            <a:extLst>
-              <a:ext uri="{FF2B5EF4-FFF2-40B4-BE49-F238E27FC236}">
-                <a16:creationId xmlns:a16="http://schemas.microsoft.com/office/drawing/2014/main" id="{2E102B64-5B6B-DDCB-7308-2F771CFD2985}"/>
+              <a:t>Review</a:t>
+            </a:r>
+            <a:endParaRPr lang="en-US" dirty="0">
+              <a:solidFill>
+                <a:srgbClr val="1F3864"/>
+              </a:solidFill>
+            </a:endParaRPr>
+          </a:p>
+        </p:txBody>
+      </p:sp>
+      <p:sp>
+        <p:nvSpPr>
+          <p:cNvPr id="3" name="Question 1"/>
+          <p:cNvSpPr/>
+          <p:nvPr/>
+        </p:nvSpPr>
+        <p:spPr>
+          <a:xfrm>
+            <a:off x="838200" y="1075688"/>
+            <a:ext cx="10515600" cy="1230000"/>
+          </a:xfrm>
+          <a:prstGeom prst="roundRect">
+            <a:avLst>
+              <a:gd name="adj" fmla="val 4000"/>
+            </a:avLst>
+          </a:prstGeom>
+          <a:solidFill>
+            <a:srgbClr val="F2F6FC"/>
+          </a:solidFill>
+          <a:ln w="19050">
+            <a:solidFill>
+              <a:schemeClr val="accent1"/>
+            </a:solidFill>
+          </a:ln>
+        </p:spPr>
+        <p:txBody>
+          <a:bodyPr lIns="228600" tIns="182880" rIns="228600" bIns="91440" anchor="t">
+            <a:noAutofit/>
+          </a:bodyPr>
+          <a:lstStyle/>
+          <a:p>
+            <a:pPr marL="0" indent="0">
+              <a:buNone/>
+            </a:pPr>
+            <a:r>
+              <a:rPr lang="en-US" b="1">
+                <a:solidFill>
+                  <a:srgbClr val="C00000"/>
+                </a:solidFill>
+              </a:rPr>
+              <a:t>4</a:t>
+            </a:r>
+            <a:r>
+              <a:rPr lang="en-US" b="1">
+                <a:solidFill>
+                  <a:srgbClr val="000000"/>
+                </a:solidFill>
+              </a:rPr>
+              <a:t>   What is undercoverage?</a:t>
+            </a:r>
+            <a:endParaRPr lang="en-US" b="1" dirty="0">
+              <a:solidFill>
+                <a:srgbClr val="000000"/>
+              </a:solidFill>
+            </a:endParaRPr>
+          </a:p>
+        </p:txBody>
+      </p:sp>
+      <p:sp>
+        <p:nvSpPr>
+          <p:cNvPr id="4" name="Answer 1"/>
+          <p:cNvSpPr txBox="1"/>
+          <p:nvPr/>
+        </p:nvSpPr>
+        <p:spPr>
+          <a:xfrm>
+            <a:off x="1066800" y="1655688"/>
+            <a:ext cx="10058400" cy="650240"/>
+          </a:xfrm>
+          <a:prstGeom prst="rect">
+            <a:avLst/>
+          </a:prstGeom>
+          <a:noFill/>
+        </p:spPr>
+        <p:txBody>
+          <a:bodyPr wrap="square" lIns="0" tIns="0" rIns="0" bIns="0">
+            <a:noAutofit/>
+          </a:bodyPr>
+          <a:lstStyle/>
+          <a:p>
+            <a:pPr marL="0" indent="0">
+              <a:buNone/>
+            </a:pPr>
+            <a:r>
+              <a:rPr lang="en-US" sz="1600">
+                <a:solidFill>
+                  <a:srgbClr val="C00000"/>
+                </a:solidFill>
+              </a:rPr>
+              <a:t>The sampling frame leaves part of the population out, so those units cannot be chosen at all.</a:t>
+            </a:r>
+            <a:endParaRPr lang="en-US" sz="1600" dirty="0">
+              <a:solidFill>
+                <a:srgbClr val="C00000"/>
+              </a:solidFill>
+            </a:endParaRPr>
+          </a:p>
+        </p:txBody>
+      </p:sp>
+      <p:sp>
+        <p:nvSpPr>
+          <p:cNvPr id="5" name="Question 2"/>
+          <p:cNvSpPr/>
+          <p:nvPr/>
+        </p:nvSpPr>
+        <p:spPr>
+          <a:xfrm>
+            <a:off x="838200" y="2385688"/>
+            <a:ext cx="10515600" cy="1230000"/>
+          </a:xfrm>
+          <a:prstGeom prst="roundRect">
+            <a:avLst>
+              <a:gd name="adj" fmla="val 4000"/>
+            </a:avLst>
+          </a:prstGeom>
+          <a:solidFill>
+            <a:srgbClr val="F2F6FC"/>
+          </a:solidFill>
+          <a:ln w="19050">
+            <a:solidFill>
+              <a:schemeClr val="accent1"/>
+            </a:solidFill>
+          </a:ln>
+        </p:spPr>
+        <p:txBody>
+          <a:bodyPr lIns="228600" tIns="182880" rIns="228600" bIns="91440" anchor="t">
+            <a:noAutofit/>
+          </a:bodyPr>
+          <a:lstStyle/>
+          <a:p>
+            <a:pPr marL="0" indent="0">
+              <a:buNone/>
+            </a:pPr>
+            <a:r>
+              <a:rPr lang="en-US" b="1">
+                <a:solidFill>
+                  <a:srgbClr val="C00000"/>
+                </a:solidFill>
+              </a:rPr>
+              <a:t>5</a:t>
+            </a:r>
+            <a:r>
+              <a:rPr lang="en-US" b="1">
+                <a:solidFill>
+                  <a:srgbClr val="000000"/>
+                </a:solidFill>
+              </a:rPr>
+              <a:t>   What is nonresponse?</a:t>
+            </a:r>
+            <a:endParaRPr lang="en-US" b="1" dirty="0">
+              <a:solidFill>
+                <a:srgbClr val="000000"/>
+              </a:solidFill>
+            </a:endParaRPr>
+          </a:p>
+        </p:txBody>
+      </p:sp>
+      <p:sp>
+        <p:nvSpPr>
+          <p:cNvPr id="6" name="Answer 2"/>
+          <p:cNvSpPr txBox="1"/>
+          <p:nvPr/>
+        </p:nvSpPr>
+        <p:spPr>
+          <a:xfrm>
+            <a:off x="1066800" y="2965688"/>
+            <a:ext cx="10058400" cy="589280"/>
+          </a:xfrm>
+          <a:prstGeom prst="rect">
+            <a:avLst/>
+          </a:prstGeom>
+          <a:noFill/>
+        </p:spPr>
+        <p:txBody>
+          <a:bodyPr wrap="square" lIns="0" tIns="0" rIns="0" bIns="0">
+            <a:noAutofit/>
+          </a:bodyPr>
+          <a:lstStyle/>
+          <a:p>
+            <a:pPr marL="0" indent="0">
+              <a:buNone/>
+            </a:pPr>
+            <a:r>
+              <a:rPr lang="en-US" sz="1600">
+                <a:solidFill>
+                  <a:srgbClr val="C00000"/>
+                </a:solidFill>
+              </a:rPr>
+              <a:t>People who were chosen cannot be reached, or they refuse to answer.</a:t>
+            </a:r>
+            <a:endParaRPr lang="en-US" sz="1600" dirty="0">
+              <a:solidFill>
+                <a:srgbClr val="C00000"/>
+              </a:solidFill>
+            </a:endParaRPr>
+          </a:p>
+        </p:txBody>
+      </p:sp>
+      <p:sp>
+        <p:nvSpPr>
+          <p:cNvPr id="7" name="Question 3"/>
+          <p:cNvSpPr/>
+          <p:nvPr/>
+        </p:nvSpPr>
+        <p:spPr>
+          <a:xfrm>
+            <a:off x="838200" y="3695688"/>
+            <a:ext cx="10515600" cy="1230000"/>
+          </a:xfrm>
+          <a:prstGeom prst="roundRect">
+            <a:avLst>
+              <a:gd name="adj" fmla="val 4000"/>
+            </a:avLst>
+          </a:prstGeom>
+          <a:solidFill>
+            <a:srgbClr val="F2F6FC"/>
+          </a:solidFill>
+          <a:ln w="19050">
+            <a:solidFill>
+              <a:schemeClr val="accent1"/>
+            </a:solidFill>
+          </a:ln>
+        </p:spPr>
+        <p:txBody>
+          <a:bodyPr lIns="228600" tIns="182880" rIns="228600" bIns="91440" anchor="t">
+            <a:noAutofit/>
+          </a:bodyPr>
+          <a:lstStyle/>
+          <a:p>
+            <a:pPr marL="0" indent="0">
+              <a:buNone/>
+            </a:pPr>
+            <a:r>
+              <a:rPr lang="en-US" b="1">
+                <a:solidFill>
+                  <a:srgbClr val="C00000"/>
+                </a:solidFill>
+              </a:rPr>
+              <a:t>6</a:t>
+            </a:r>
+            <a:r>
+              <a:rPr lang="en-US" b="1">
+                <a:solidFill>
+                  <a:srgbClr val="000000"/>
+                </a:solidFill>
+              </a:rPr>
+              <a:t>   What is response bias?</a:t>
+            </a:r>
+            <a:endParaRPr lang="en-US" b="1" dirty="0">
+              <a:solidFill>
+                <a:srgbClr val="000000"/>
+              </a:solidFill>
+            </a:endParaRPr>
+          </a:p>
+        </p:txBody>
+      </p:sp>
+      <p:sp>
+        <p:nvSpPr>
+          <p:cNvPr id="8" name="Answer 3"/>
+          <p:cNvSpPr txBox="1"/>
+          <p:nvPr/>
+        </p:nvSpPr>
+        <p:spPr>
+          <a:xfrm>
+            <a:off x="1066800" y="4275688"/>
+            <a:ext cx="10058400" cy="558560"/>
+          </a:xfrm>
+          <a:prstGeom prst="rect">
+            <a:avLst/>
+          </a:prstGeom>
+          <a:noFill/>
+        </p:spPr>
+        <p:txBody>
+          <a:bodyPr wrap="square" lIns="0" tIns="0" rIns="0" bIns="0">
+            <a:noAutofit/>
+          </a:bodyPr>
+          <a:lstStyle/>
+          <a:p>
+            <a:pPr marL="0" indent="0">
+              <a:buNone/>
+            </a:pPr>
+            <a:r>
+              <a:rPr lang="en-US" sz="1600">
+                <a:solidFill>
+                  <a:srgbClr val="C00000"/>
+                </a:solidFill>
+              </a:rPr>
+              <a:t>The answers themselves are wrong - leading questions, sensitive topics, or wanting to please the interviewer.</a:t>
+            </a:r>
+            <a:endParaRPr lang="en-US" sz="1600" dirty="0">
+              <a:solidFill>
+                <a:srgbClr val="C00000"/>
+              </a:solidFill>
+            </a:endParaRPr>
+          </a:p>
+        </p:txBody>
+      </p:sp>
+      <p:sp>
+        <p:nvSpPr>
+          <p:cNvPr id="11" name="Slide Number Placeholder 10">
+            <a:extLst>
+              <a:ext uri="{FF2B5EF4-FFF2-40B4-BE49-F238E27FC236}">
+                <a16:creationId xmlns:a16="http://schemas.microsoft.com/office/drawing/2014/main" id="{266091C9-B7EB-6BBE-A602-1479CDF9719E}"/>
               </a:ext>
             </a:extLst>
           </p:cNvPr>
@@ -20129,429 +18914,16 @@
           <a:p>
             <a:fld id="{A80A81DD-F10A-4B1C-963A-0ABBB4865886}" type="slidenum">
               <a:rPr lang="en-US" sz="1600" smtClean="0"/>
-              <a:t>3</a:t>
+              <a:t>4</a:t>
             </a:fld>
             <a:endParaRPr lang="en-US" sz="1600"/>
-          </a:p>
-        </p:txBody>
-      </p:sp>
-      <p:sp>
-        <p:nvSpPr>
-          <p:cNvPr id="5" name="TextBox 4">
-            <a:extLst>
-              <a:ext uri="{FF2B5EF4-FFF2-40B4-BE49-F238E27FC236}">
-                <a16:creationId xmlns:a16="http://schemas.microsoft.com/office/drawing/2014/main" id="{C1B6F6AE-F7DC-E672-67CB-83C138622793}"/>
-              </a:ext>
-            </a:extLst>
-          </p:cNvPr>
-          <p:cNvSpPr txBox="1"/>
-          <p:nvPr/>
-        </p:nvSpPr>
-        <p:spPr>
-          <a:xfrm>
-            <a:off x="762000" y="1841499"/>
-            <a:ext cx="10668000" cy="589280"/>
-          </a:xfrm>
-          <a:prstGeom prst="rect">
-            <a:avLst/>
-          </a:prstGeom>
-          <a:noFill/>
-        </p:spPr>
-        <p:txBody>
-          <a:bodyPr vert="horz" wrap="square" rtlCol="0">
-            <a:noAutofit/>
-          </a:bodyPr>
-          <a:lstStyle/>
-          <a:p>
-            <a:pPr>
-              <a:spcAft>
-                <a:spcPts val="400"/>
-              </a:spcAft>
-            </a:pPr>
-            <a:r>
-              <a:rPr lang="en-US" sz="1600">
-                <a:solidFill>
-                  <a:srgbClr val="000000"/>
-                </a:solidFill>
-              </a:rPr>
-              <a:t>In September 2013, CNBC asked half of its poll respondents about “Obamacare” and the other half about “the Affordable Care Act” - the same law.</a:t>
-            </a:r>
-          </a:p>
-        </p:txBody>
-      </p:sp>
-      <p:sp>
-        <p:nvSpPr>
-          <p:cNvPr id="6" name="TextBox 5">
-            <a:extLst>
-              <a:ext uri="{FF2B5EF4-FFF2-40B4-BE49-F238E27FC236}">
-                <a16:creationId xmlns:a16="http://schemas.microsoft.com/office/drawing/2014/main" id="{CD85BCC4-EDEE-8F47-EF6A-B7F45B3442CD}"/>
-              </a:ext>
-            </a:extLst>
-          </p:cNvPr>
-          <p:cNvSpPr txBox="1"/>
-          <p:nvPr/>
-        </p:nvSpPr>
-        <p:spPr>
-          <a:xfrm>
-            <a:off x="762000" y="2557780"/>
-            <a:ext cx="10668000" cy="345440"/>
-          </a:xfrm>
-          <a:prstGeom prst="rect">
-            <a:avLst/>
-          </a:prstGeom>
-          <a:noFill/>
-        </p:spPr>
-        <p:txBody>
-          <a:bodyPr vert="horz" wrap="square" rtlCol="0">
-            <a:noAutofit/>
-          </a:bodyPr>
-          <a:lstStyle/>
-          <a:p>
-            <a:pPr marL="304800" indent="-304800"/>
-            <a:r>
-              <a:rPr lang="en-US" sz="1600" b="1">
-                <a:solidFill>
-                  <a:srgbClr val="C00000"/>
-                </a:solidFill>
-              </a:rPr>
-              <a:t>1.</a:t>
-            </a:r>
-            <a:r>
-              <a:rPr lang="en-US" sz="1600">
-                <a:solidFill>
-                  <a:srgbClr val="000000"/>
-                </a:solidFill>
-              </a:rPr>
-              <a:t>  Which name do you think drew more opposition?</a:t>
-            </a:r>
-          </a:p>
-        </p:txBody>
-      </p:sp>
-      <p:sp>
-        <p:nvSpPr>
-          <p:cNvPr id="7" name="TextBox 6">
-            <a:extLst>
-              <a:ext uri="{FF2B5EF4-FFF2-40B4-BE49-F238E27FC236}">
-                <a16:creationId xmlns:a16="http://schemas.microsoft.com/office/drawing/2014/main" id="{7B3055AB-3BD9-15C6-4864-B93CE66D179E}"/>
-              </a:ext>
-            </a:extLst>
-          </p:cNvPr>
-          <p:cNvSpPr txBox="1"/>
-          <p:nvPr/>
-        </p:nvSpPr>
-        <p:spPr>
-          <a:xfrm>
-            <a:off x="1117600" y="2852420"/>
-            <a:ext cx="10312400" cy="345440"/>
-          </a:xfrm>
-          <a:prstGeom prst="rect">
-            <a:avLst/>
-          </a:prstGeom>
-          <a:noFill/>
-        </p:spPr>
-        <p:txBody>
-          <a:bodyPr vert="horz" wrap="square" rtlCol="0">
-            <a:noAutofit/>
-          </a:bodyPr>
-          <a:lstStyle/>
-          <a:p>
-            <a:r>
-              <a:rPr lang="en-US" sz="1600" b="1">
-                <a:solidFill>
-                  <a:srgbClr val="C00000"/>
-                </a:solidFill>
-              </a:rPr>
-              <a:t>Obamacare: 46% opposed it, against 37% for the Affordable Care Act.</a:t>
-            </a:r>
-          </a:p>
-        </p:txBody>
-      </p:sp>
-      <p:sp>
-        <p:nvSpPr>
-          <p:cNvPr id="8" name="TextBox 7">
-            <a:extLst>
-              <a:ext uri="{FF2B5EF4-FFF2-40B4-BE49-F238E27FC236}">
-                <a16:creationId xmlns:a16="http://schemas.microsoft.com/office/drawing/2014/main" id="{BE2846B4-5FEC-6BAC-D100-DCC8A67EEF9F}"/>
-              </a:ext>
-            </a:extLst>
-          </p:cNvPr>
-          <p:cNvSpPr txBox="1"/>
-          <p:nvPr/>
-        </p:nvSpPr>
-        <p:spPr>
-          <a:xfrm>
-            <a:off x="762000" y="3350260"/>
-            <a:ext cx="10668000" cy="345440"/>
-          </a:xfrm>
-          <a:prstGeom prst="rect">
-            <a:avLst/>
-          </a:prstGeom>
-          <a:noFill/>
-        </p:spPr>
-        <p:txBody>
-          <a:bodyPr vert="horz" wrap="square" rtlCol="0">
-            <a:noAutofit/>
-          </a:bodyPr>
-          <a:lstStyle/>
-          <a:p>
-            <a:pPr marL="304800" indent="-304800"/>
-            <a:r>
-              <a:rPr lang="en-US" sz="1600" b="1">
-                <a:solidFill>
-                  <a:srgbClr val="C00000"/>
-                </a:solidFill>
-              </a:rPr>
-              <a:t>2.</a:t>
-            </a:r>
-            <a:r>
-              <a:rPr lang="en-US" sz="1600">
-                <a:solidFill>
-                  <a:srgbClr val="000000"/>
-                </a:solidFill>
-              </a:rPr>
-              <a:t>  So did fewer people support Obamacare, too?</a:t>
-            </a:r>
-          </a:p>
-        </p:txBody>
-      </p:sp>
-      <p:sp>
-        <p:nvSpPr>
-          <p:cNvPr id="9" name="TextBox 8">
-            <a:extLst>
-              <a:ext uri="{FF2B5EF4-FFF2-40B4-BE49-F238E27FC236}">
-                <a16:creationId xmlns:a16="http://schemas.microsoft.com/office/drawing/2014/main" id="{2326C3AE-0131-5C64-FEE7-521026B9665D}"/>
-              </a:ext>
-            </a:extLst>
-          </p:cNvPr>
-          <p:cNvSpPr txBox="1"/>
-          <p:nvPr/>
-        </p:nvSpPr>
-        <p:spPr>
-          <a:xfrm>
-            <a:off x="1117600" y="3644899"/>
-            <a:ext cx="10312400" cy="589280"/>
-          </a:xfrm>
-          <a:prstGeom prst="rect">
-            <a:avLst/>
-          </a:prstGeom>
-          <a:noFill/>
-        </p:spPr>
-        <p:txBody>
-          <a:bodyPr vert="horz" wrap="square" rtlCol="0">
-            <a:noAutofit/>
-          </a:bodyPr>
-          <a:lstStyle/>
-          <a:p>
-            <a:r>
-              <a:rPr lang="en-US" sz="1600" b="1">
-                <a:solidFill>
-                  <a:srgbClr val="C00000"/>
-                </a:solidFill>
-              </a:rPr>
-              <a:t>No - 29% supported Obamacare and 22% the ACA. 30% said they did not know about the ACA, but only 12% about Obamacare.</a:t>
-            </a:r>
-          </a:p>
-        </p:txBody>
-      </p:sp>
-      <p:sp>
-        <p:nvSpPr>
-          <p:cNvPr id="10" name="TextBox 9">
-            <a:extLst>
-              <a:ext uri="{FF2B5EF4-FFF2-40B4-BE49-F238E27FC236}">
-                <a16:creationId xmlns:a16="http://schemas.microsoft.com/office/drawing/2014/main" id="{A144738A-850C-94A5-8BF5-8D7B9ABAF140}"/>
-              </a:ext>
-            </a:extLst>
-          </p:cNvPr>
-          <p:cNvSpPr txBox="1"/>
-          <p:nvPr/>
-        </p:nvSpPr>
-        <p:spPr>
-          <a:xfrm>
-            <a:off x="762000" y="4386580"/>
-            <a:ext cx="10668000" cy="345440"/>
-          </a:xfrm>
-          <a:prstGeom prst="rect">
-            <a:avLst/>
-          </a:prstGeom>
-          <a:noFill/>
-        </p:spPr>
-        <p:txBody>
-          <a:bodyPr vert="horz" wrap="square" rtlCol="0">
-            <a:noAutofit/>
-          </a:bodyPr>
-          <a:lstStyle/>
-          <a:p>
-            <a:pPr marL="304800" indent="-304800"/>
-            <a:r>
-              <a:rPr lang="en-US" sz="1600" b="1">
-                <a:solidFill>
-                  <a:srgbClr val="C00000"/>
-                </a:solidFill>
-              </a:rPr>
-              <a:t>3.</a:t>
-            </a:r>
-            <a:r>
-              <a:rPr lang="en-US" sz="1600">
-                <a:solidFill>
-                  <a:srgbClr val="000000"/>
-                </a:solidFill>
-              </a:rPr>
-              <a:t>  What does this tell you about survey questions?</a:t>
-            </a:r>
-          </a:p>
-        </p:txBody>
-      </p:sp>
-      <p:sp>
-        <p:nvSpPr>
-          <p:cNvPr id="11" name="TextBox 10">
-            <a:extLst>
-              <a:ext uri="{FF2B5EF4-FFF2-40B4-BE49-F238E27FC236}">
-                <a16:creationId xmlns:a16="http://schemas.microsoft.com/office/drawing/2014/main" id="{0B99BA77-C486-61E6-94C8-0A8BBAFA0E6E}"/>
-              </a:ext>
-            </a:extLst>
-          </p:cNvPr>
-          <p:cNvSpPr txBox="1"/>
-          <p:nvPr/>
-        </p:nvSpPr>
-        <p:spPr>
-          <a:xfrm>
-            <a:off x="1117600" y="4681220"/>
-            <a:ext cx="10312400" cy="345440"/>
-          </a:xfrm>
-          <a:prstGeom prst="rect">
-            <a:avLst/>
-          </a:prstGeom>
-          <a:noFill/>
-        </p:spPr>
-        <p:txBody>
-          <a:bodyPr vert="horz" wrap="square" rtlCol="0">
-            <a:noAutofit/>
-          </a:bodyPr>
-          <a:lstStyle/>
-          <a:p>
-            <a:r>
-              <a:rPr lang="en-US" sz="1600" b="1">
-                <a:solidFill>
-                  <a:srgbClr val="C00000"/>
-                </a:solidFill>
-              </a:rPr>
-              <a:t>The words in a question change the answers. A familiar, politically loaded name pulled people off the fence.</a:t>
-            </a:r>
-          </a:p>
-        </p:txBody>
-      </p:sp>
-      <p:sp>
-        <p:nvSpPr>
-          <p:cNvPr id="12" name="TextBox 11">
-            <a:extLst>
-              <a:ext uri="{FF2B5EF4-FFF2-40B4-BE49-F238E27FC236}">
-                <a16:creationId xmlns:a16="http://schemas.microsoft.com/office/drawing/2014/main" id="{CC33F665-24AD-B31C-EFB7-2CA4D78C0A26}"/>
-              </a:ext>
-            </a:extLst>
-          </p:cNvPr>
-          <p:cNvSpPr txBox="1"/>
-          <p:nvPr/>
-        </p:nvSpPr>
-        <p:spPr>
-          <a:xfrm>
-            <a:off x="762000" y="6045200"/>
-            <a:ext cx="10668000" cy="345440"/>
-          </a:xfrm>
-          <a:prstGeom prst="rect">
-            <a:avLst/>
-          </a:prstGeom>
-          <a:noFill/>
-        </p:spPr>
-        <p:txBody>
-          <a:bodyPr vert="horz" wrap="square" rtlCol="0">
-            <a:noAutofit/>
-          </a:bodyPr>
-          <a:lstStyle/>
-          <a:p>
-            <a:pPr algn="r"/>
-            <a:r>
-              <a:rPr lang="en-US" sz="1600" i="1">
-                <a:solidFill>
-                  <a:srgbClr val="595959"/>
-                </a:solidFill>
-              </a:rPr>
-              <a:t>Sources: NBC News (September 27, 2013); Harvard Political Review</a:t>
-            </a:r>
-          </a:p>
-        </p:txBody>
-      </p:sp>
-      <p:sp>
-        <p:nvSpPr>
-          <p:cNvPr id="3" name="Title rule">
-            <a:extLst>
-              <a:ext uri="{FF2B5EF4-FFF2-40B4-BE49-F238E27FC236}">
-                <a16:creationId xmlns:a16="http://schemas.microsoft.com/office/drawing/2014/main" id="{3973C24F-319A-12C4-D3F2-B67CE4105031}"/>
-              </a:ext>
-            </a:extLst>
-          </p:cNvPr>
-          <p:cNvSpPr/>
-          <p:nvPr/>
-        </p:nvSpPr>
-        <p:spPr>
-          <a:xfrm>
-            <a:off x="838200" y="1600200"/>
-            <a:ext cx="10515600" cy="38100"/>
-          </a:xfrm>
-          <a:prstGeom prst="rect">
-            <a:avLst/>
-          </a:prstGeom>
-          <a:solidFill>
-            <a:srgbClr val="4472C4"/>
-          </a:solidFill>
-          <a:ln w="12700" cap="flat" cmpd="sng" algn="ctr">
-            <a:noFill/>
-            <a:prstDash val="solid"/>
-            <a:miter lim="800000"/>
-          </a:ln>
-          <a:effectLst/>
-          <a:extLst>
-            <a:ext uri="{91240B29-F687-4F45-9708-019B960494DF}">
-              <a14:hiddenLine xmlns:a14="http://schemas.microsoft.com/office/drawing/2010/main" w="12700" cap="flat" cmpd="sng" algn="ctr">
-                <a:solidFill>
-                  <a:schemeClr val="accent1">
-                    <a:shade val="15000"/>
-                  </a:schemeClr>
-                </a:solidFill>
-                <a:prstDash val="solid"/>
-                <a:miter lim="800000"/>
-              </a14:hiddenLine>
-            </a:ext>
-          </a:extLst>
-        </p:spPr>
-        <p:style>
-          <a:lnRef idx="2">
-            <a:schemeClr val="accent1">
-              <a:shade val="15000"/>
-            </a:schemeClr>
-          </a:lnRef>
-          <a:fillRef idx="1">
-            <a:schemeClr val="accent1"/>
-          </a:fillRef>
-          <a:effectRef idx="0">
-            <a:schemeClr val="accent1"/>
-          </a:effectRef>
-          <a:fontRef idx="minor">
-            <a:schemeClr val="lt1"/>
-          </a:fontRef>
-        </p:style>
-        <p:txBody>
-          <a:bodyPr rtlCol="0" anchor="ctr"/>
-          <a:lstStyle/>
-          <a:p>
-            <a:pPr algn="ctr"/>
-            <a:endParaRPr lang="en-US"/>
           </a:p>
         </p:txBody>
       </p:sp>
     </p:spTree>
     <p:extLst>
       <p:ext uri="{BB962C8B-B14F-4D97-AF65-F5344CB8AC3E}">
-        <p14:creationId xmlns:p14="http://schemas.microsoft.com/office/powerpoint/2010/main" val="271883804"/>
+        <p14:creationId xmlns:p14="http://schemas.microsoft.com/office/powerpoint/2010/main" val="1973460602"/>
       </p:ext>
     </p:extLst>
   </p:cSld>
@@ -20579,7 +18951,7 @@
                             </p:stCondLst>
                             <p:childTnLst>
                               <p:par>
-                                <p:cTn id="5" presetID="34" presetClass="entr" presetSubtype="0" fill="hold" grpId="0" nodeType="clickEffect">
+                                <p:cTn id="5" presetID="1" presetClass="entr" presetSubtype="0" fill="hold" nodeType="clickEffect">
                                   <p:stCondLst>
                                     <p:cond delay="0"/>
                                   </p:stCondLst>
@@ -20592,7 +18964,7 @@
                                           </p:stCondLst>
                                         </p:cTn>
                                         <p:tgtEl>
-                                          <p:spTgt spid="7"/>
+                                          <p:spTgt spid="3"/>
                                         </p:tgtEl>
                                         <p:attrNameLst>
                                           <p:attrName>style.visibility</p:attrName>
@@ -20602,65 +18974,51 @@
                                         <p:strVal val="visible"/>
                                       </p:to>
                                     </p:set>
-                                    <p:anim from="(-#ppt_w/2)" to="(#ppt_x)" calcmode="lin" valueType="num">
-                                      <p:cBhvr>
-                                        <p:cTn id="7" dur="600" fill="hold">
+                                  </p:childTnLst>
+                                </p:cTn>
+                              </p:par>
+                            </p:childTnLst>
+                          </p:cTn>
+                        </p:par>
+                      </p:childTnLst>
+                    </p:cTn>
+                  </p:par>
+                  <p:par>
+                    <p:cTn id="7" fill="hold">
+                      <p:stCondLst>
+                        <p:cond delay="indefinite"/>
+                      </p:stCondLst>
+                      <p:childTnLst>
+                        <p:par>
+                          <p:cTn id="8" fill="hold">
+                            <p:stCondLst>
+                              <p:cond delay="0"/>
+                            </p:stCondLst>
+                            <p:childTnLst>
+                              <p:par>
+                                <p:cTn id="9" presetID="1" presetClass="entr" presetSubtype="0" fill="hold" nodeType="clickEffect">
+                                  <p:stCondLst>
+                                    <p:cond delay="0"/>
+                                  </p:stCondLst>
+                                  <p:childTnLst>
+                                    <p:set>
+                                      <p:cBhvr>
+                                        <p:cTn id="10" dur="1" fill="hold">
                                           <p:stCondLst>
                                             <p:cond delay="0"/>
                                           </p:stCondLst>
                                         </p:cTn>
                                         <p:tgtEl>
-                                          <p:spTgt spid="7"/>
-                                        </p:tgtEl>
-                                        <p:attrNameLst>
-                                          <p:attrName>ppt_x</p:attrName>
-                                        </p:attrNameLst>
-                                      </p:cBhvr>
-                                    </p:anim>
-                                    <p:anim from="0" to="-1.0" calcmode="lin" valueType="num">
-                                      <p:cBhvr>
-                                        <p:cTn id="8" dur="200" decel="50000" autoRev="1" fill="hold">
-                                          <p:stCondLst>
-                                            <p:cond delay="600"/>
-                                          </p:stCondLst>
-                                        </p:cTn>
-                                        <p:tgtEl>
-                                          <p:spTgt spid="7"/>
-                                        </p:tgtEl>
-                                        <p:attrNameLst>
-                                          <p:attrName>xshear</p:attrName>
-                                        </p:attrNameLst>
-                                      </p:cBhvr>
-                                    </p:anim>
-                                    <p:animScale>
-                                      <p:cBhvr>
-                                        <p:cTn id="9" dur="200" decel="100000" autoRev="1" fill="hold">
-                                          <p:stCondLst>
-                                            <p:cond delay="600"/>
-                                          </p:stCondLst>
-                                        </p:cTn>
-                                        <p:tgtEl>
-                                          <p:spTgt spid="7"/>
-                                        </p:tgtEl>
-                                      </p:cBhvr>
-                                      <p:from x="100000" y="100000"/>
-                                      <p:to x="80000" y="100000"/>
-                                    </p:animScale>
-                                    <p:anim by="(#ppt_h/3+#ppt_w*0.1)" calcmode="lin" valueType="num">
-                                      <p:cBhvr additive="sum">
-                                        <p:cTn id="10" dur="200" decel="100000" autoRev="1" fill="hold">
-                                          <p:stCondLst>
-                                            <p:cond delay="600"/>
-                                          </p:stCondLst>
-                                        </p:cTn>
-                                        <p:tgtEl>
-                                          <p:spTgt spid="7"/>
-                                        </p:tgtEl>
-                                        <p:attrNameLst>
-                                          <p:attrName>ppt_x</p:attrName>
-                                        </p:attrNameLst>
-                                      </p:cBhvr>
-                                    </p:anim>
+                                          <p:spTgt spid="4"/>
+                                        </p:tgtEl>
+                                        <p:attrNameLst>
+                                          <p:attrName>style.visibility</p:attrName>
+                                        </p:attrNameLst>
+                                      </p:cBhvr>
+                                      <p:to>
+                                        <p:strVal val="visible"/>
+                                      </p:to>
+                                    </p:set>
                                   </p:childTnLst>
                                 </p:cTn>
                               </p:par>
@@ -20683,7 +19041,7 @@
                             </p:stCondLst>
                             <p:childTnLst>
                               <p:par>
-                                <p:cTn id="13" presetID="34" presetClass="entr" presetSubtype="0" fill="hold" grpId="0" nodeType="clickEffect">
+                                <p:cTn id="13" presetID="1" presetClass="entr" presetSubtype="0" fill="hold" nodeType="clickEffect">
                                   <p:stCondLst>
                                     <p:cond delay="0"/>
                                   </p:stCondLst>
@@ -20696,7 +19054,7 @@
                                           </p:stCondLst>
                                         </p:cTn>
                                         <p:tgtEl>
-                                          <p:spTgt spid="9"/>
+                                          <p:spTgt spid="5"/>
                                         </p:tgtEl>
                                         <p:attrNameLst>
                                           <p:attrName>style.visibility</p:attrName>
@@ -20706,65 +19064,51 @@
                                         <p:strVal val="visible"/>
                                       </p:to>
                                     </p:set>
-                                    <p:anim from="(-#ppt_w/2)" to="(#ppt_x)" calcmode="lin" valueType="num">
-                                      <p:cBhvr>
-                                        <p:cTn id="15" dur="600" fill="hold">
+                                  </p:childTnLst>
+                                </p:cTn>
+                              </p:par>
+                            </p:childTnLst>
+                          </p:cTn>
+                        </p:par>
+                      </p:childTnLst>
+                    </p:cTn>
+                  </p:par>
+                  <p:par>
+                    <p:cTn id="15" fill="hold">
+                      <p:stCondLst>
+                        <p:cond delay="indefinite"/>
+                      </p:stCondLst>
+                      <p:childTnLst>
+                        <p:par>
+                          <p:cTn id="16" fill="hold">
+                            <p:stCondLst>
+                              <p:cond delay="0"/>
+                            </p:stCondLst>
+                            <p:childTnLst>
+                              <p:par>
+                                <p:cTn id="17" presetID="1" presetClass="entr" presetSubtype="0" fill="hold" nodeType="clickEffect">
+                                  <p:stCondLst>
+                                    <p:cond delay="0"/>
+                                  </p:stCondLst>
+                                  <p:childTnLst>
+                                    <p:set>
+                                      <p:cBhvr>
+                                        <p:cTn id="18" dur="1" fill="hold">
                                           <p:stCondLst>
                                             <p:cond delay="0"/>
                                           </p:stCondLst>
                                         </p:cTn>
                                         <p:tgtEl>
-                                          <p:spTgt spid="9"/>
-                                        </p:tgtEl>
-                                        <p:attrNameLst>
-                                          <p:attrName>ppt_x</p:attrName>
-                                        </p:attrNameLst>
-                                      </p:cBhvr>
-                                    </p:anim>
-                                    <p:anim from="0" to="-1.0" calcmode="lin" valueType="num">
-                                      <p:cBhvr>
-                                        <p:cTn id="16" dur="200" decel="50000" autoRev="1" fill="hold">
-                                          <p:stCondLst>
-                                            <p:cond delay="600"/>
-                                          </p:stCondLst>
-                                        </p:cTn>
-                                        <p:tgtEl>
-                                          <p:spTgt spid="9"/>
-                                        </p:tgtEl>
-                                        <p:attrNameLst>
-                                          <p:attrName>xshear</p:attrName>
-                                        </p:attrNameLst>
-                                      </p:cBhvr>
-                                    </p:anim>
-                                    <p:animScale>
-                                      <p:cBhvr>
-                                        <p:cTn id="17" dur="200" decel="100000" autoRev="1" fill="hold">
-                                          <p:stCondLst>
-                                            <p:cond delay="600"/>
-                                          </p:stCondLst>
-                                        </p:cTn>
-                                        <p:tgtEl>
-                                          <p:spTgt spid="9"/>
-                                        </p:tgtEl>
-                                      </p:cBhvr>
-                                      <p:from x="100000" y="100000"/>
-                                      <p:to x="80000" y="100000"/>
-                                    </p:animScale>
-                                    <p:anim by="(#ppt_h/3+#ppt_w*0.1)" calcmode="lin" valueType="num">
-                                      <p:cBhvr additive="sum">
-                                        <p:cTn id="18" dur="200" decel="100000" autoRev="1" fill="hold">
-                                          <p:stCondLst>
-                                            <p:cond delay="600"/>
-                                          </p:stCondLst>
-                                        </p:cTn>
-                                        <p:tgtEl>
-                                          <p:spTgt spid="9"/>
-                                        </p:tgtEl>
-                                        <p:attrNameLst>
-                                          <p:attrName>ppt_x</p:attrName>
-                                        </p:attrNameLst>
-                                      </p:cBhvr>
-                                    </p:anim>
+                                          <p:spTgt spid="6"/>
+                                        </p:tgtEl>
+                                        <p:attrNameLst>
+                                          <p:attrName>style.visibility</p:attrName>
+                                        </p:attrNameLst>
+                                      </p:cBhvr>
+                                      <p:to>
+                                        <p:strVal val="visible"/>
+                                      </p:to>
+                                    </p:set>
                                   </p:childTnLst>
                                 </p:cTn>
                               </p:par>
@@ -20787,7 +19131,7 @@
                             </p:stCondLst>
                             <p:childTnLst>
                               <p:par>
-                                <p:cTn id="21" presetID="34" presetClass="entr" presetSubtype="0" fill="hold" grpId="0" nodeType="clickEffect">
+                                <p:cTn id="21" presetID="1" presetClass="entr" presetSubtype="0" fill="hold" nodeType="clickEffect">
                                   <p:stCondLst>
                                     <p:cond delay="0"/>
                                   </p:stCondLst>
@@ -20800,7 +19144,7 @@
                                           </p:stCondLst>
                                         </p:cTn>
                                         <p:tgtEl>
-                                          <p:spTgt spid="11"/>
+                                          <p:spTgt spid="7"/>
                                         </p:tgtEl>
                                         <p:attrNameLst>
                                           <p:attrName>style.visibility</p:attrName>
@@ -20810,65 +19154,51 @@
                                         <p:strVal val="visible"/>
                                       </p:to>
                                     </p:set>
-                                    <p:anim from="(-#ppt_w/2)" to="(#ppt_x)" calcmode="lin" valueType="num">
-                                      <p:cBhvr>
-                                        <p:cTn id="23" dur="600" fill="hold">
+                                  </p:childTnLst>
+                                </p:cTn>
+                              </p:par>
+                            </p:childTnLst>
+                          </p:cTn>
+                        </p:par>
+                      </p:childTnLst>
+                    </p:cTn>
+                  </p:par>
+                  <p:par>
+                    <p:cTn id="23" fill="hold">
+                      <p:stCondLst>
+                        <p:cond delay="indefinite"/>
+                      </p:stCondLst>
+                      <p:childTnLst>
+                        <p:par>
+                          <p:cTn id="24" fill="hold">
+                            <p:stCondLst>
+                              <p:cond delay="0"/>
+                            </p:stCondLst>
+                            <p:childTnLst>
+                              <p:par>
+                                <p:cTn id="25" presetID="1" presetClass="entr" presetSubtype="0" fill="hold" nodeType="clickEffect">
+                                  <p:stCondLst>
+                                    <p:cond delay="0"/>
+                                  </p:stCondLst>
+                                  <p:childTnLst>
+                                    <p:set>
+                                      <p:cBhvr>
+                                        <p:cTn id="26" dur="1" fill="hold">
                                           <p:stCondLst>
                                             <p:cond delay="0"/>
                                           </p:stCondLst>
                                         </p:cTn>
                                         <p:tgtEl>
-                                          <p:spTgt spid="11"/>
-                                        </p:tgtEl>
-                                        <p:attrNameLst>
-                                          <p:attrName>ppt_x</p:attrName>
-                                        </p:attrNameLst>
-                                      </p:cBhvr>
-                                    </p:anim>
-                                    <p:anim from="0" to="-1.0" calcmode="lin" valueType="num">
-                                      <p:cBhvr>
-                                        <p:cTn id="24" dur="200" decel="50000" autoRev="1" fill="hold">
-                                          <p:stCondLst>
-                                            <p:cond delay="600"/>
-                                          </p:stCondLst>
-                                        </p:cTn>
-                                        <p:tgtEl>
-                                          <p:spTgt spid="11"/>
-                                        </p:tgtEl>
-                                        <p:attrNameLst>
-                                          <p:attrName>xshear</p:attrName>
-                                        </p:attrNameLst>
-                                      </p:cBhvr>
-                                    </p:anim>
-                                    <p:animScale>
-                                      <p:cBhvr>
-                                        <p:cTn id="25" dur="200" decel="100000" autoRev="1" fill="hold">
-                                          <p:stCondLst>
-                                            <p:cond delay="600"/>
-                                          </p:stCondLst>
-                                        </p:cTn>
-                                        <p:tgtEl>
-                                          <p:spTgt spid="11"/>
-                                        </p:tgtEl>
-                                      </p:cBhvr>
-                                      <p:from x="100000" y="100000"/>
-                                      <p:to x="80000" y="100000"/>
-                                    </p:animScale>
-                                    <p:anim by="(#ppt_h/3+#ppt_w*0.1)" calcmode="lin" valueType="num">
-                                      <p:cBhvr additive="sum">
-                                        <p:cTn id="26" dur="200" decel="100000" autoRev="1" fill="hold">
-                                          <p:stCondLst>
-                                            <p:cond delay="600"/>
-                                          </p:stCondLst>
-                                        </p:cTn>
-                                        <p:tgtEl>
-                                          <p:spTgt spid="11"/>
-                                        </p:tgtEl>
-                                        <p:attrNameLst>
-                                          <p:attrName>ppt_x</p:attrName>
-                                        </p:attrNameLst>
-                                      </p:cBhvr>
-                                    </p:anim>
+                                          <p:spTgt spid="8"/>
+                                        </p:tgtEl>
+                                        <p:attrNameLst>
+                                          <p:attrName>style.visibility</p:attrName>
+                                        </p:attrNameLst>
+                                      </p:cBhvr>
+                                      <p:to>
+                                        <p:strVal val="visible"/>
+                                      </p:to>
+                                    </p:set>
                                   </p:childTnLst>
                                 </p:cTn>
                               </p:par>
@@ -20899,1164 +19229,6 @@
         </p:cTn>
       </p:par>
     </p:tnLst>
-    <p:bldLst>
-      <p:bldP spid="7" grpId="0"/>
-      <p:bldP spid="9" grpId="0"/>
-      <p:bldP spid="11" grpId="0"/>
-    </p:bldLst>
-  </p:timing>
-</p:sld>
-</file>
-
-<file path=ppt/slides/slide4.xml><?xml version="1.0" encoding="utf-8"?>
-<p:sld xmlns:a="http://schemas.openxmlformats.org/drawingml/2006/main" xmlns:r="http://schemas.openxmlformats.org/officeDocument/2006/relationships" xmlns:p="http://schemas.openxmlformats.org/presentationml/2006/main">
-  <p:cSld>
-    <p:spTree>
-      <p:nvGrpSpPr>
-        <p:cNvPr id="1" name=""/>
-        <p:cNvGrpSpPr/>
-        <p:nvPr/>
-      </p:nvGrpSpPr>
-      <p:grpSpPr>
-        <a:xfrm>
-          <a:off x="0" y="0"/>
-          <a:ext cx="0" cy="0"/>
-          <a:chOff x="0" y="0"/>
-          <a:chExt cx="0" cy="0"/>
-        </a:xfrm>
-      </p:grpSpPr>
-      <p:sp>
-        <p:nvSpPr>
-          <p:cNvPr id="2" name="Title 1">
-            <a:extLst>
-              <a:ext uri="{FF2B5EF4-FFF2-40B4-BE49-F238E27FC236}">
-                <a16:creationId xmlns:a16="http://schemas.microsoft.com/office/drawing/2014/main" id="{BD064581-A7B8-058F-CE00-7D2789AD212D}"/>
-              </a:ext>
-            </a:extLst>
-          </p:cNvPr>
-          <p:cNvSpPr>
-            <a:spLocks noGrp="1"/>
-          </p:cNvSpPr>
-          <p:nvPr>
-            <p:ph type="title"/>
-          </p:nvPr>
-        </p:nvSpPr>
-        <p:spPr/>
-        <p:txBody>
-          <a:bodyPr>
-            <a:noAutofit/>
-          </a:bodyPr>
-          <a:lstStyle/>
-          <a:p>
-            <a:r>
-              <a:rPr lang="en-US">
-                <a:solidFill>
-                  <a:srgbClr val="1F3864"/>
-                </a:solidFill>
-              </a:rPr>
-              <a:t>Practice: name the sampling design</a:t>
-            </a:r>
-          </a:p>
-        </p:txBody>
-      </p:sp>
-      <p:sp>
-        <p:nvSpPr>
-          <p:cNvPr id="4" name="Slide Number Placeholder 3">
-            <a:extLst>
-              <a:ext uri="{FF2B5EF4-FFF2-40B4-BE49-F238E27FC236}">
-                <a16:creationId xmlns:a16="http://schemas.microsoft.com/office/drawing/2014/main" id="{C3DBFDB3-321E-5463-C253-6D7E97AC7B5B}"/>
-              </a:ext>
-            </a:extLst>
-          </p:cNvPr>
-          <p:cNvSpPr>
-            <a:spLocks noGrp="1"/>
-          </p:cNvSpPr>
-          <p:nvPr>
-            <p:ph type="sldNum" sz="quarter" idx="12"/>
-          </p:nvPr>
-        </p:nvSpPr>
-        <p:spPr/>
-        <p:txBody>
-          <a:bodyPr/>
-          <a:lstStyle/>
-          <a:p>
-            <a:fld id="{A80A81DD-F10A-4B1C-963A-0ABBB4865886}" type="slidenum">
-              <a:rPr lang="en-US" sz="1600" smtClean="0"/>
-              <a:t>4</a:t>
-            </a:fld>
-            <a:endParaRPr lang="en-US" sz="1600"/>
-          </a:p>
-        </p:txBody>
-      </p:sp>
-      <p:sp>
-        <p:nvSpPr>
-          <p:cNvPr id="5" name="TextBox 4">
-            <a:extLst>
-              <a:ext uri="{FF2B5EF4-FFF2-40B4-BE49-F238E27FC236}">
-                <a16:creationId xmlns:a16="http://schemas.microsoft.com/office/drawing/2014/main" id="{E7A274E0-0312-B057-A4C4-76E1E2E0445B}"/>
-              </a:ext>
-            </a:extLst>
-          </p:cNvPr>
-          <p:cNvSpPr txBox="1"/>
-          <p:nvPr/>
-        </p:nvSpPr>
-        <p:spPr>
-          <a:xfrm>
-            <a:off x="762000" y="1841500"/>
-            <a:ext cx="10668000" cy="345440"/>
-          </a:xfrm>
-          <a:prstGeom prst="rect">
-            <a:avLst/>
-          </a:prstGeom>
-          <a:noFill/>
-        </p:spPr>
-        <p:txBody>
-          <a:bodyPr vert="horz" wrap="square" rtlCol="0">
-            <a:noAutofit/>
-          </a:bodyPr>
-          <a:lstStyle/>
-          <a:p>
-            <a:pPr marL="304800" indent="-304800"/>
-            <a:r>
-              <a:rPr lang="en-US" sz="1600" b="1">
-                <a:solidFill>
-                  <a:srgbClr val="C00000"/>
-                </a:solidFill>
-              </a:rPr>
-              <a:t>1.</a:t>
-            </a:r>
-            <a:r>
-              <a:rPr lang="en-US" sz="1600">
-                <a:solidFill>
-                  <a:srgbClr val="000000"/>
-                </a:solidFill>
-              </a:rPr>
-              <a:t>  A reporter interviews the first 50 students who walk out of the Idaho Student Union Building.</a:t>
-            </a:r>
-          </a:p>
-        </p:txBody>
-      </p:sp>
-      <p:sp>
-        <p:nvSpPr>
-          <p:cNvPr id="6" name="TextBox 5">
-            <a:extLst>
-              <a:ext uri="{FF2B5EF4-FFF2-40B4-BE49-F238E27FC236}">
-                <a16:creationId xmlns:a16="http://schemas.microsoft.com/office/drawing/2014/main" id="{A85BA503-495C-07C2-CB72-E174ACD67A25}"/>
-              </a:ext>
-            </a:extLst>
-          </p:cNvPr>
-          <p:cNvSpPr txBox="1"/>
-          <p:nvPr/>
-        </p:nvSpPr>
-        <p:spPr>
-          <a:xfrm>
-            <a:off x="1117600" y="2136140"/>
-            <a:ext cx="10312400" cy="345440"/>
-          </a:xfrm>
-          <a:prstGeom prst="rect">
-            <a:avLst/>
-          </a:prstGeom>
-          <a:noFill/>
-        </p:spPr>
-        <p:txBody>
-          <a:bodyPr vert="horz" wrap="square" rtlCol="0">
-            <a:noAutofit/>
-          </a:bodyPr>
-          <a:lstStyle/>
-          <a:p>
-            <a:r>
-              <a:rPr lang="en-US" sz="1600" b="1">
-                <a:solidFill>
-                  <a:srgbClr val="C00000"/>
-                </a:solidFill>
-              </a:rPr>
-              <a:t>Convenience sample - only students who happen to pass the SUB can be chosen.</a:t>
-            </a:r>
-          </a:p>
-        </p:txBody>
-      </p:sp>
-      <p:sp>
-        <p:nvSpPr>
-          <p:cNvPr id="7" name="TextBox 6">
-            <a:extLst>
-              <a:ext uri="{FF2B5EF4-FFF2-40B4-BE49-F238E27FC236}">
-                <a16:creationId xmlns:a16="http://schemas.microsoft.com/office/drawing/2014/main" id="{6D2BAA32-B5BB-1FA1-716F-2D93D0A390FB}"/>
-              </a:ext>
-            </a:extLst>
-          </p:cNvPr>
-          <p:cNvSpPr txBox="1"/>
-          <p:nvPr/>
-        </p:nvSpPr>
-        <p:spPr>
-          <a:xfrm>
-            <a:off x="762000" y="2633980"/>
-            <a:ext cx="10668000" cy="345440"/>
-          </a:xfrm>
-          <a:prstGeom prst="rect">
-            <a:avLst/>
-          </a:prstGeom>
-          <a:noFill/>
-        </p:spPr>
-        <p:txBody>
-          <a:bodyPr vert="horz" wrap="square" rtlCol="0">
-            <a:noAutofit/>
-          </a:bodyPr>
-          <a:lstStyle/>
-          <a:p>
-            <a:pPr marL="304800" indent="-304800"/>
-            <a:r>
-              <a:rPr lang="en-US" sz="1600" b="1">
-                <a:solidFill>
-                  <a:srgbClr val="C00000"/>
-                </a:solidFill>
-              </a:rPr>
-              <a:t>2.</a:t>
-            </a:r>
-            <a:r>
-              <a:rPr lang="en-US" sz="1600">
-                <a:solidFill>
-                  <a:srgbClr val="000000"/>
-                </a:solidFill>
-              </a:rPr>
-              <a:t>  The registrar numbers every enrolled student, and a computer picks 200 of the numbers at random.</a:t>
-            </a:r>
-          </a:p>
-        </p:txBody>
-      </p:sp>
-      <p:sp>
-        <p:nvSpPr>
-          <p:cNvPr id="8" name="TextBox 7">
-            <a:extLst>
-              <a:ext uri="{FF2B5EF4-FFF2-40B4-BE49-F238E27FC236}">
-                <a16:creationId xmlns:a16="http://schemas.microsoft.com/office/drawing/2014/main" id="{06F76B3F-5477-00E3-27D5-828B6BE3AB4E}"/>
-              </a:ext>
-            </a:extLst>
-          </p:cNvPr>
-          <p:cNvSpPr txBox="1"/>
-          <p:nvPr/>
-        </p:nvSpPr>
-        <p:spPr>
-          <a:xfrm>
-            <a:off x="1117600" y="2928620"/>
-            <a:ext cx="10312400" cy="345440"/>
-          </a:xfrm>
-          <a:prstGeom prst="rect">
-            <a:avLst/>
-          </a:prstGeom>
-          <a:noFill/>
-        </p:spPr>
-        <p:txBody>
-          <a:bodyPr vert="horz" wrap="square" rtlCol="0">
-            <a:noAutofit/>
-          </a:bodyPr>
-          <a:lstStyle/>
-          <a:p>
-            <a:r>
-              <a:rPr lang="en-US" sz="1600" b="1">
-                <a:solidFill>
-                  <a:srgbClr val="C00000"/>
-                </a:solidFill>
-              </a:rPr>
-              <a:t>Simple random sample.</a:t>
-            </a:r>
-          </a:p>
-        </p:txBody>
-      </p:sp>
-      <p:sp>
-        <p:nvSpPr>
-          <p:cNvPr id="9" name="TextBox 8">
-            <a:extLst>
-              <a:ext uri="{FF2B5EF4-FFF2-40B4-BE49-F238E27FC236}">
-                <a16:creationId xmlns:a16="http://schemas.microsoft.com/office/drawing/2014/main" id="{A8F43331-0DAF-78F9-4749-53B896EBE422}"/>
-              </a:ext>
-            </a:extLst>
-          </p:cNvPr>
-          <p:cNvSpPr txBox="1"/>
-          <p:nvPr/>
-        </p:nvSpPr>
-        <p:spPr>
-          <a:xfrm>
-            <a:off x="762000" y="3426460"/>
-            <a:ext cx="10668000" cy="345440"/>
-          </a:xfrm>
-          <a:prstGeom prst="rect">
-            <a:avLst/>
-          </a:prstGeom>
-          <a:noFill/>
-        </p:spPr>
-        <p:txBody>
-          <a:bodyPr vert="horz" wrap="square" rtlCol="0">
-            <a:noAutofit/>
-          </a:bodyPr>
-          <a:lstStyle/>
-          <a:p>
-            <a:pPr marL="304800" indent="-304800"/>
-            <a:r>
-              <a:rPr lang="en-US" sz="1600" b="1">
-                <a:solidFill>
-                  <a:srgbClr val="C00000"/>
-                </a:solidFill>
-              </a:rPr>
-              <a:t>3.</a:t>
-            </a:r>
-            <a:r>
-              <a:rPr lang="en-US" sz="1600">
-                <a:solidFill>
-                  <a:srgbClr val="000000"/>
-                </a:solidFill>
-              </a:rPr>
-              <a:t>  A principal polls 50 first-years, 50 sophomores, 50 juniors and 50 seniors, chosen at random within each year.</a:t>
-            </a:r>
-          </a:p>
-        </p:txBody>
-      </p:sp>
-      <p:sp>
-        <p:nvSpPr>
-          <p:cNvPr id="10" name="TextBox 9">
-            <a:extLst>
-              <a:ext uri="{FF2B5EF4-FFF2-40B4-BE49-F238E27FC236}">
-                <a16:creationId xmlns:a16="http://schemas.microsoft.com/office/drawing/2014/main" id="{E9C9D8FD-2696-7FAE-6F81-0D2CA68A2BE1}"/>
-              </a:ext>
-            </a:extLst>
-          </p:cNvPr>
-          <p:cNvSpPr txBox="1"/>
-          <p:nvPr/>
-        </p:nvSpPr>
-        <p:spPr>
-          <a:xfrm>
-            <a:off x="1117600" y="3721100"/>
-            <a:ext cx="10312400" cy="345440"/>
-          </a:xfrm>
-          <a:prstGeom prst="rect">
-            <a:avLst/>
-          </a:prstGeom>
-          <a:noFill/>
-        </p:spPr>
-        <p:txBody>
-          <a:bodyPr vert="horz" wrap="square" rtlCol="0">
-            <a:noAutofit/>
-          </a:bodyPr>
-          <a:lstStyle/>
-          <a:p>
-            <a:r>
-              <a:rPr lang="en-US" sz="1600" b="1">
-                <a:solidFill>
-                  <a:srgbClr val="C00000"/>
-                </a:solidFill>
-              </a:rPr>
-              <a:t>Stratified random sample - the class years are the strata.</a:t>
-            </a:r>
-          </a:p>
-        </p:txBody>
-      </p:sp>
-      <p:sp>
-        <p:nvSpPr>
-          <p:cNvPr id="11" name="TextBox 10">
-            <a:extLst>
-              <a:ext uri="{FF2B5EF4-FFF2-40B4-BE49-F238E27FC236}">
-                <a16:creationId xmlns:a16="http://schemas.microsoft.com/office/drawing/2014/main" id="{E860E4CB-A494-2804-FF46-F58AA4F79F9E}"/>
-              </a:ext>
-            </a:extLst>
-          </p:cNvPr>
-          <p:cNvSpPr txBox="1"/>
-          <p:nvPr/>
-        </p:nvSpPr>
-        <p:spPr>
-          <a:xfrm>
-            <a:off x="762000" y="4218940"/>
-            <a:ext cx="10668000" cy="345440"/>
-          </a:xfrm>
-          <a:prstGeom prst="rect">
-            <a:avLst/>
-          </a:prstGeom>
-          <a:noFill/>
-        </p:spPr>
-        <p:txBody>
-          <a:bodyPr vert="horz" wrap="square" rtlCol="0">
-            <a:noAutofit/>
-          </a:bodyPr>
-          <a:lstStyle/>
-          <a:p>
-            <a:pPr marL="304800" indent="-304800"/>
-            <a:r>
-              <a:rPr lang="en-US" sz="1600" b="1">
-                <a:solidFill>
-                  <a:srgbClr val="C00000"/>
-                </a:solidFill>
-              </a:rPr>
-              <a:t>4.</a:t>
-            </a:r>
-            <a:r>
-              <a:rPr lang="en-US" sz="1600">
-                <a:solidFill>
-                  <a:srgbClr val="000000"/>
-                </a:solidFill>
-              </a:rPr>
-              <a:t>  5 of the 40 apartment buildings in town are chosen at random, and every household in them is surveyed.</a:t>
-            </a:r>
-          </a:p>
-        </p:txBody>
-      </p:sp>
-      <p:sp>
-        <p:nvSpPr>
-          <p:cNvPr id="12" name="TextBox 11">
-            <a:extLst>
-              <a:ext uri="{FF2B5EF4-FFF2-40B4-BE49-F238E27FC236}">
-                <a16:creationId xmlns:a16="http://schemas.microsoft.com/office/drawing/2014/main" id="{DB609785-9111-F45E-6739-FD1FCD7CFB62}"/>
-              </a:ext>
-            </a:extLst>
-          </p:cNvPr>
-          <p:cNvSpPr txBox="1"/>
-          <p:nvPr/>
-        </p:nvSpPr>
-        <p:spPr>
-          <a:xfrm>
-            <a:off x="1117600" y="4513580"/>
-            <a:ext cx="10312400" cy="345440"/>
-          </a:xfrm>
-          <a:prstGeom prst="rect">
-            <a:avLst/>
-          </a:prstGeom>
-          <a:noFill/>
-        </p:spPr>
-        <p:txBody>
-          <a:bodyPr vert="horz" wrap="square" rtlCol="0">
-            <a:noAutofit/>
-          </a:bodyPr>
-          <a:lstStyle/>
-          <a:p>
-            <a:r>
-              <a:rPr lang="en-US" sz="1600" b="1">
-                <a:solidFill>
-                  <a:srgbClr val="C00000"/>
-                </a:solidFill>
-              </a:rPr>
-              <a:t>Cluster sample - the buildings are the clusters.</a:t>
-            </a:r>
-          </a:p>
-        </p:txBody>
-      </p:sp>
-      <p:sp>
-        <p:nvSpPr>
-          <p:cNvPr id="13" name="TextBox 12">
-            <a:extLst>
-              <a:ext uri="{FF2B5EF4-FFF2-40B4-BE49-F238E27FC236}">
-                <a16:creationId xmlns:a16="http://schemas.microsoft.com/office/drawing/2014/main" id="{F2C2B130-480D-FFEA-63DC-70CD80DD6359}"/>
-              </a:ext>
-            </a:extLst>
-          </p:cNvPr>
-          <p:cNvSpPr txBox="1"/>
-          <p:nvPr/>
-        </p:nvSpPr>
-        <p:spPr>
-          <a:xfrm>
-            <a:off x="762000" y="5011420"/>
-            <a:ext cx="10668000" cy="345440"/>
-          </a:xfrm>
-          <a:prstGeom prst="rect">
-            <a:avLst/>
-          </a:prstGeom>
-          <a:noFill/>
-        </p:spPr>
-        <p:txBody>
-          <a:bodyPr vert="horz" wrap="square" rtlCol="0">
-            <a:noAutofit/>
-          </a:bodyPr>
-          <a:lstStyle/>
-          <a:p>
-            <a:pPr marL="304800" indent="-304800"/>
-            <a:r>
-              <a:rPr lang="en-US" sz="1600" b="1">
-                <a:solidFill>
-                  <a:srgbClr val="C00000"/>
-                </a:solidFill>
-              </a:rPr>
-              <a:t>5.</a:t>
-            </a:r>
-            <a:r>
-              <a:rPr lang="en-US" sz="1600">
-                <a:solidFill>
-                  <a:srgbClr val="000000"/>
-                </a:solidFill>
-              </a:rPr>
-              <a:t>  A medical researcher interviews every third patient on a hospital list, starting from a randomly chosen one of the first three.</a:t>
-            </a:r>
-          </a:p>
-        </p:txBody>
-      </p:sp>
-      <p:sp>
-        <p:nvSpPr>
-          <p:cNvPr id="14" name="TextBox 13">
-            <a:extLst>
-              <a:ext uri="{FF2B5EF4-FFF2-40B4-BE49-F238E27FC236}">
-                <a16:creationId xmlns:a16="http://schemas.microsoft.com/office/drawing/2014/main" id="{72ABF5D8-B607-D737-5983-9B9364B7B05E}"/>
-              </a:ext>
-            </a:extLst>
-          </p:cNvPr>
-          <p:cNvSpPr txBox="1"/>
-          <p:nvPr/>
-        </p:nvSpPr>
-        <p:spPr>
-          <a:xfrm>
-            <a:off x="1117600" y="5306060"/>
-            <a:ext cx="10312400" cy="345440"/>
-          </a:xfrm>
-          <a:prstGeom prst="rect">
-            <a:avLst/>
-          </a:prstGeom>
-          <a:noFill/>
-        </p:spPr>
-        <p:txBody>
-          <a:bodyPr vert="horz" wrap="square" rtlCol="0">
-            <a:noAutofit/>
-          </a:bodyPr>
-          <a:lstStyle/>
-          <a:p>
-            <a:r>
-              <a:rPr lang="en-US" sz="1600" b="1">
-                <a:solidFill>
-                  <a:srgbClr val="C00000"/>
-                </a:solidFill>
-              </a:rPr>
-              <a:t>Systematic sample, with k = 3.</a:t>
-            </a:r>
-          </a:p>
-        </p:txBody>
-      </p:sp>
-      <p:sp>
-        <p:nvSpPr>
-          <p:cNvPr id="3" name="Title rule">
-            <a:extLst>
-              <a:ext uri="{FF2B5EF4-FFF2-40B4-BE49-F238E27FC236}">
-                <a16:creationId xmlns:a16="http://schemas.microsoft.com/office/drawing/2014/main" id="{3DCB1E00-6304-AA9E-D05E-EAC6156E4E0A}"/>
-              </a:ext>
-            </a:extLst>
-          </p:cNvPr>
-          <p:cNvSpPr/>
-          <p:nvPr/>
-        </p:nvSpPr>
-        <p:spPr>
-          <a:xfrm>
-            <a:off x="838200" y="1600200"/>
-            <a:ext cx="10515600" cy="38100"/>
-          </a:xfrm>
-          <a:prstGeom prst="rect">
-            <a:avLst/>
-          </a:prstGeom>
-          <a:solidFill>
-            <a:srgbClr val="4472C4"/>
-          </a:solidFill>
-          <a:ln w="12700" cap="flat" cmpd="sng" algn="ctr">
-            <a:noFill/>
-            <a:prstDash val="solid"/>
-            <a:miter lim="800000"/>
-          </a:ln>
-          <a:effectLst/>
-          <a:extLst>
-            <a:ext uri="{91240B29-F687-4F45-9708-019B960494DF}">
-              <a14:hiddenLine xmlns:a14="http://schemas.microsoft.com/office/drawing/2010/main" w="12700" cap="flat" cmpd="sng" algn="ctr">
-                <a:solidFill>
-                  <a:schemeClr val="accent1">
-                    <a:shade val="15000"/>
-                  </a:schemeClr>
-                </a:solidFill>
-                <a:prstDash val="solid"/>
-                <a:miter lim="800000"/>
-              </a14:hiddenLine>
-            </a:ext>
-          </a:extLst>
-        </p:spPr>
-        <p:style>
-          <a:lnRef idx="2">
-            <a:schemeClr val="accent1">
-              <a:shade val="15000"/>
-            </a:schemeClr>
-          </a:lnRef>
-          <a:fillRef idx="1">
-            <a:schemeClr val="accent1"/>
-          </a:fillRef>
-          <a:effectRef idx="0">
-            <a:schemeClr val="accent1"/>
-          </a:effectRef>
-          <a:fontRef idx="minor">
-            <a:schemeClr val="lt1"/>
-          </a:fontRef>
-        </p:style>
-        <p:txBody>
-          <a:bodyPr rtlCol="0" anchor="ctr"/>
-          <a:lstStyle/>
-          <a:p>
-            <a:pPr algn="ctr"/>
-            <a:endParaRPr lang="en-US"/>
-          </a:p>
-        </p:txBody>
-      </p:sp>
-    </p:spTree>
-    <p:extLst>
-      <p:ext uri="{BB962C8B-B14F-4D97-AF65-F5344CB8AC3E}">
-        <p14:creationId xmlns:p14="http://schemas.microsoft.com/office/powerpoint/2010/main" val="3684976212"/>
-      </p:ext>
-    </p:extLst>
-  </p:cSld>
-  <p:clrMapOvr>
-    <a:masterClrMapping/>
-  </p:clrMapOvr>
-  <p:timing>
-    <p:tnLst>
-      <p:par>
-        <p:cTn id="1" dur="indefinite" restart="never" nodeType="tmRoot">
-          <p:childTnLst>
-            <p:seq concurrent="1" nextAc="seek">
-              <p:cTn id="2" dur="indefinite" nodeType="mainSeq">
-                <p:childTnLst>
-                  <p:par>
-                    <p:cTn id="3" fill="hold">
-                      <p:stCondLst>
-                        <p:cond delay="indefinite"/>
-                      </p:stCondLst>
-                      <p:childTnLst>
-                        <p:par>
-                          <p:cTn id="4" fill="hold">
-                            <p:stCondLst>
-                              <p:cond delay="0"/>
-                            </p:stCondLst>
-                            <p:childTnLst>
-                              <p:par>
-                                <p:cTn id="5" presetID="34" presetClass="entr" presetSubtype="0" fill="hold" grpId="0" nodeType="clickEffect">
-                                  <p:stCondLst>
-                                    <p:cond delay="0"/>
-                                  </p:stCondLst>
-                                  <p:childTnLst>
-                                    <p:set>
-                                      <p:cBhvr>
-                                        <p:cTn id="6" dur="1" fill="hold">
-                                          <p:stCondLst>
-                                            <p:cond delay="0"/>
-                                          </p:stCondLst>
-                                        </p:cTn>
-                                        <p:tgtEl>
-                                          <p:spTgt spid="6"/>
-                                        </p:tgtEl>
-                                        <p:attrNameLst>
-                                          <p:attrName>style.visibility</p:attrName>
-                                        </p:attrNameLst>
-                                      </p:cBhvr>
-                                      <p:to>
-                                        <p:strVal val="visible"/>
-                                      </p:to>
-                                    </p:set>
-                                    <p:anim from="(-#ppt_w/2)" to="(#ppt_x)" calcmode="lin" valueType="num">
-                                      <p:cBhvr>
-                                        <p:cTn id="7" dur="600" fill="hold">
-                                          <p:stCondLst>
-                                            <p:cond delay="0"/>
-                                          </p:stCondLst>
-                                        </p:cTn>
-                                        <p:tgtEl>
-                                          <p:spTgt spid="6"/>
-                                        </p:tgtEl>
-                                        <p:attrNameLst>
-                                          <p:attrName>ppt_x</p:attrName>
-                                        </p:attrNameLst>
-                                      </p:cBhvr>
-                                    </p:anim>
-                                    <p:anim from="0" to="-1.0" calcmode="lin" valueType="num">
-                                      <p:cBhvr>
-                                        <p:cTn id="8" dur="200" decel="50000" autoRev="1" fill="hold">
-                                          <p:stCondLst>
-                                            <p:cond delay="600"/>
-                                          </p:stCondLst>
-                                        </p:cTn>
-                                        <p:tgtEl>
-                                          <p:spTgt spid="6"/>
-                                        </p:tgtEl>
-                                        <p:attrNameLst>
-                                          <p:attrName>xshear</p:attrName>
-                                        </p:attrNameLst>
-                                      </p:cBhvr>
-                                    </p:anim>
-                                    <p:animScale>
-                                      <p:cBhvr>
-                                        <p:cTn id="9" dur="200" decel="100000" autoRev="1" fill="hold">
-                                          <p:stCondLst>
-                                            <p:cond delay="600"/>
-                                          </p:stCondLst>
-                                        </p:cTn>
-                                        <p:tgtEl>
-                                          <p:spTgt spid="6"/>
-                                        </p:tgtEl>
-                                      </p:cBhvr>
-                                      <p:from x="100000" y="100000"/>
-                                      <p:to x="80000" y="100000"/>
-                                    </p:animScale>
-                                    <p:anim by="(#ppt_h/3+#ppt_w*0.1)" calcmode="lin" valueType="num">
-                                      <p:cBhvr additive="sum">
-                                        <p:cTn id="10" dur="200" decel="100000" autoRev="1" fill="hold">
-                                          <p:stCondLst>
-                                            <p:cond delay="600"/>
-                                          </p:stCondLst>
-                                        </p:cTn>
-                                        <p:tgtEl>
-                                          <p:spTgt spid="6"/>
-                                        </p:tgtEl>
-                                        <p:attrNameLst>
-                                          <p:attrName>ppt_x</p:attrName>
-                                        </p:attrNameLst>
-                                      </p:cBhvr>
-                                    </p:anim>
-                                  </p:childTnLst>
-                                </p:cTn>
-                              </p:par>
-                            </p:childTnLst>
-                          </p:cTn>
-                        </p:par>
-                      </p:childTnLst>
-                    </p:cTn>
-                  </p:par>
-                  <p:par>
-                    <p:cTn id="11" fill="hold">
-                      <p:stCondLst>
-                        <p:cond delay="indefinite"/>
-                      </p:stCondLst>
-                      <p:childTnLst>
-                        <p:par>
-                          <p:cTn id="12" fill="hold">
-                            <p:stCondLst>
-                              <p:cond delay="0"/>
-                            </p:stCondLst>
-                            <p:childTnLst>
-                              <p:par>
-                                <p:cTn id="13" presetID="34" presetClass="entr" presetSubtype="0" fill="hold" grpId="0" nodeType="clickEffect">
-                                  <p:stCondLst>
-                                    <p:cond delay="0"/>
-                                  </p:stCondLst>
-                                  <p:childTnLst>
-                                    <p:set>
-                                      <p:cBhvr>
-                                        <p:cTn id="14" dur="1" fill="hold">
-                                          <p:stCondLst>
-                                            <p:cond delay="0"/>
-                                          </p:stCondLst>
-                                        </p:cTn>
-                                        <p:tgtEl>
-                                          <p:spTgt spid="8"/>
-                                        </p:tgtEl>
-                                        <p:attrNameLst>
-                                          <p:attrName>style.visibility</p:attrName>
-                                        </p:attrNameLst>
-                                      </p:cBhvr>
-                                      <p:to>
-                                        <p:strVal val="visible"/>
-                                      </p:to>
-                                    </p:set>
-                                    <p:anim from="(-#ppt_w/2)" to="(#ppt_x)" calcmode="lin" valueType="num">
-                                      <p:cBhvr>
-                                        <p:cTn id="15" dur="600" fill="hold">
-                                          <p:stCondLst>
-                                            <p:cond delay="0"/>
-                                          </p:stCondLst>
-                                        </p:cTn>
-                                        <p:tgtEl>
-                                          <p:spTgt spid="8"/>
-                                        </p:tgtEl>
-                                        <p:attrNameLst>
-                                          <p:attrName>ppt_x</p:attrName>
-                                        </p:attrNameLst>
-                                      </p:cBhvr>
-                                    </p:anim>
-                                    <p:anim from="0" to="-1.0" calcmode="lin" valueType="num">
-                                      <p:cBhvr>
-                                        <p:cTn id="16" dur="200" decel="50000" autoRev="1" fill="hold">
-                                          <p:stCondLst>
-                                            <p:cond delay="600"/>
-                                          </p:stCondLst>
-                                        </p:cTn>
-                                        <p:tgtEl>
-                                          <p:spTgt spid="8"/>
-                                        </p:tgtEl>
-                                        <p:attrNameLst>
-                                          <p:attrName>xshear</p:attrName>
-                                        </p:attrNameLst>
-                                      </p:cBhvr>
-                                    </p:anim>
-                                    <p:animScale>
-                                      <p:cBhvr>
-                                        <p:cTn id="17" dur="200" decel="100000" autoRev="1" fill="hold">
-                                          <p:stCondLst>
-                                            <p:cond delay="600"/>
-                                          </p:stCondLst>
-                                        </p:cTn>
-                                        <p:tgtEl>
-                                          <p:spTgt spid="8"/>
-                                        </p:tgtEl>
-                                      </p:cBhvr>
-                                      <p:from x="100000" y="100000"/>
-                                      <p:to x="80000" y="100000"/>
-                                    </p:animScale>
-                                    <p:anim by="(#ppt_h/3+#ppt_w*0.1)" calcmode="lin" valueType="num">
-                                      <p:cBhvr additive="sum">
-                                        <p:cTn id="18" dur="200" decel="100000" autoRev="1" fill="hold">
-                                          <p:stCondLst>
-                                            <p:cond delay="600"/>
-                                          </p:stCondLst>
-                                        </p:cTn>
-                                        <p:tgtEl>
-                                          <p:spTgt spid="8"/>
-                                        </p:tgtEl>
-                                        <p:attrNameLst>
-                                          <p:attrName>ppt_x</p:attrName>
-                                        </p:attrNameLst>
-                                      </p:cBhvr>
-                                    </p:anim>
-                                  </p:childTnLst>
-                                </p:cTn>
-                              </p:par>
-                            </p:childTnLst>
-                          </p:cTn>
-                        </p:par>
-                      </p:childTnLst>
-                    </p:cTn>
-                  </p:par>
-                  <p:par>
-                    <p:cTn id="19" fill="hold">
-                      <p:stCondLst>
-                        <p:cond delay="indefinite"/>
-                      </p:stCondLst>
-                      <p:childTnLst>
-                        <p:par>
-                          <p:cTn id="20" fill="hold">
-                            <p:stCondLst>
-                              <p:cond delay="0"/>
-                            </p:stCondLst>
-                            <p:childTnLst>
-                              <p:par>
-                                <p:cTn id="21" presetID="34" presetClass="entr" presetSubtype="0" fill="hold" grpId="0" nodeType="clickEffect">
-                                  <p:stCondLst>
-                                    <p:cond delay="0"/>
-                                  </p:stCondLst>
-                                  <p:childTnLst>
-                                    <p:set>
-                                      <p:cBhvr>
-                                        <p:cTn id="22" dur="1" fill="hold">
-                                          <p:stCondLst>
-                                            <p:cond delay="0"/>
-                                          </p:stCondLst>
-                                        </p:cTn>
-                                        <p:tgtEl>
-                                          <p:spTgt spid="10"/>
-                                        </p:tgtEl>
-                                        <p:attrNameLst>
-                                          <p:attrName>style.visibility</p:attrName>
-                                        </p:attrNameLst>
-                                      </p:cBhvr>
-                                      <p:to>
-                                        <p:strVal val="visible"/>
-                                      </p:to>
-                                    </p:set>
-                                    <p:anim from="(-#ppt_w/2)" to="(#ppt_x)" calcmode="lin" valueType="num">
-                                      <p:cBhvr>
-                                        <p:cTn id="23" dur="600" fill="hold">
-                                          <p:stCondLst>
-                                            <p:cond delay="0"/>
-                                          </p:stCondLst>
-                                        </p:cTn>
-                                        <p:tgtEl>
-                                          <p:spTgt spid="10"/>
-                                        </p:tgtEl>
-                                        <p:attrNameLst>
-                                          <p:attrName>ppt_x</p:attrName>
-                                        </p:attrNameLst>
-                                      </p:cBhvr>
-                                    </p:anim>
-                                    <p:anim from="0" to="-1.0" calcmode="lin" valueType="num">
-                                      <p:cBhvr>
-                                        <p:cTn id="24" dur="200" decel="50000" autoRev="1" fill="hold">
-                                          <p:stCondLst>
-                                            <p:cond delay="600"/>
-                                          </p:stCondLst>
-                                        </p:cTn>
-                                        <p:tgtEl>
-                                          <p:spTgt spid="10"/>
-                                        </p:tgtEl>
-                                        <p:attrNameLst>
-                                          <p:attrName>xshear</p:attrName>
-                                        </p:attrNameLst>
-                                      </p:cBhvr>
-                                    </p:anim>
-                                    <p:animScale>
-                                      <p:cBhvr>
-                                        <p:cTn id="25" dur="200" decel="100000" autoRev="1" fill="hold">
-                                          <p:stCondLst>
-                                            <p:cond delay="600"/>
-                                          </p:stCondLst>
-                                        </p:cTn>
-                                        <p:tgtEl>
-                                          <p:spTgt spid="10"/>
-                                        </p:tgtEl>
-                                      </p:cBhvr>
-                                      <p:from x="100000" y="100000"/>
-                                      <p:to x="80000" y="100000"/>
-                                    </p:animScale>
-                                    <p:anim by="(#ppt_h/3+#ppt_w*0.1)" calcmode="lin" valueType="num">
-                                      <p:cBhvr additive="sum">
-                                        <p:cTn id="26" dur="200" decel="100000" autoRev="1" fill="hold">
-                                          <p:stCondLst>
-                                            <p:cond delay="600"/>
-                                          </p:stCondLst>
-                                        </p:cTn>
-                                        <p:tgtEl>
-                                          <p:spTgt spid="10"/>
-                                        </p:tgtEl>
-                                        <p:attrNameLst>
-                                          <p:attrName>ppt_x</p:attrName>
-                                        </p:attrNameLst>
-                                      </p:cBhvr>
-                                    </p:anim>
-                                  </p:childTnLst>
-                                </p:cTn>
-                              </p:par>
-                            </p:childTnLst>
-                          </p:cTn>
-                        </p:par>
-                      </p:childTnLst>
-                    </p:cTn>
-                  </p:par>
-                  <p:par>
-                    <p:cTn id="27" fill="hold">
-                      <p:stCondLst>
-                        <p:cond delay="indefinite"/>
-                      </p:stCondLst>
-                      <p:childTnLst>
-                        <p:par>
-                          <p:cTn id="28" fill="hold">
-                            <p:stCondLst>
-                              <p:cond delay="0"/>
-                            </p:stCondLst>
-                            <p:childTnLst>
-                              <p:par>
-                                <p:cTn id="29" presetID="34" presetClass="entr" presetSubtype="0" fill="hold" grpId="0" nodeType="clickEffect">
-                                  <p:stCondLst>
-                                    <p:cond delay="0"/>
-                                  </p:stCondLst>
-                                  <p:childTnLst>
-                                    <p:set>
-                                      <p:cBhvr>
-                                        <p:cTn id="30" dur="1" fill="hold">
-                                          <p:stCondLst>
-                                            <p:cond delay="0"/>
-                                          </p:stCondLst>
-                                        </p:cTn>
-                                        <p:tgtEl>
-                                          <p:spTgt spid="12"/>
-                                        </p:tgtEl>
-                                        <p:attrNameLst>
-                                          <p:attrName>style.visibility</p:attrName>
-                                        </p:attrNameLst>
-                                      </p:cBhvr>
-                                      <p:to>
-                                        <p:strVal val="visible"/>
-                                      </p:to>
-                                    </p:set>
-                                    <p:anim from="(-#ppt_w/2)" to="(#ppt_x)" calcmode="lin" valueType="num">
-                                      <p:cBhvr>
-                                        <p:cTn id="31" dur="600" fill="hold">
-                                          <p:stCondLst>
-                                            <p:cond delay="0"/>
-                                          </p:stCondLst>
-                                        </p:cTn>
-                                        <p:tgtEl>
-                                          <p:spTgt spid="12"/>
-                                        </p:tgtEl>
-                                        <p:attrNameLst>
-                                          <p:attrName>ppt_x</p:attrName>
-                                        </p:attrNameLst>
-                                      </p:cBhvr>
-                                    </p:anim>
-                                    <p:anim from="0" to="-1.0" calcmode="lin" valueType="num">
-                                      <p:cBhvr>
-                                        <p:cTn id="32" dur="200" decel="50000" autoRev="1" fill="hold">
-                                          <p:stCondLst>
-                                            <p:cond delay="600"/>
-                                          </p:stCondLst>
-                                        </p:cTn>
-                                        <p:tgtEl>
-                                          <p:spTgt spid="12"/>
-                                        </p:tgtEl>
-                                        <p:attrNameLst>
-                                          <p:attrName>xshear</p:attrName>
-                                        </p:attrNameLst>
-                                      </p:cBhvr>
-                                    </p:anim>
-                                    <p:animScale>
-                                      <p:cBhvr>
-                                        <p:cTn id="33" dur="200" decel="100000" autoRev="1" fill="hold">
-                                          <p:stCondLst>
-                                            <p:cond delay="600"/>
-                                          </p:stCondLst>
-                                        </p:cTn>
-                                        <p:tgtEl>
-                                          <p:spTgt spid="12"/>
-                                        </p:tgtEl>
-                                      </p:cBhvr>
-                                      <p:from x="100000" y="100000"/>
-                                      <p:to x="80000" y="100000"/>
-                                    </p:animScale>
-                                    <p:anim by="(#ppt_h/3+#ppt_w*0.1)" calcmode="lin" valueType="num">
-                                      <p:cBhvr additive="sum">
-                                        <p:cTn id="34" dur="200" decel="100000" autoRev="1" fill="hold">
-                                          <p:stCondLst>
-                                            <p:cond delay="600"/>
-                                          </p:stCondLst>
-                                        </p:cTn>
-                                        <p:tgtEl>
-                                          <p:spTgt spid="12"/>
-                                        </p:tgtEl>
-                                        <p:attrNameLst>
-                                          <p:attrName>ppt_x</p:attrName>
-                                        </p:attrNameLst>
-                                      </p:cBhvr>
-                                    </p:anim>
-                                  </p:childTnLst>
-                                </p:cTn>
-                              </p:par>
-                            </p:childTnLst>
-                          </p:cTn>
-                        </p:par>
-                      </p:childTnLst>
-                    </p:cTn>
-                  </p:par>
-                  <p:par>
-                    <p:cTn id="35" fill="hold">
-                      <p:stCondLst>
-                        <p:cond delay="indefinite"/>
-                      </p:stCondLst>
-                      <p:childTnLst>
-                        <p:par>
-                          <p:cTn id="36" fill="hold">
-                            <p:stCondLst>
-                              <p:cond delay="0"/>
-                            </p:stCondLst>
-                            <p:childTnLst>
-                              <p:par>
-                                <p:cTn id="37" presetID="34" presetClass="entr" presetSubtype="0" fill="hold" grpId="0" nodeType="clickEffect">
-                                  <p:stCondLst>
-                                    <p:cond delay="0"/>
-                                  </p:stCondLst>
-                                  <p:childTnLst>
-                                    <p:set>
-                                      <p:cBhvr>
-                                        <p:cTn id="38" dur="1" fill="hold">
-                                          <p:stCondLst>
-                                            <p:cond delay="0"/>
-                                          </p:stCondLst>
-                                        </p:cTn>
-                                        <p:tgtEl>
-                                          <p:spTgt spid="14"/>
-                                        </p:tgtEl>
-                                        <p:attrNameLst>
-                                          <p:attrName>style.visibility</p:attrName>
-                                        </p:attrNameLst>
-                                      </p:cBhvr>
-                                      <p:to>
-                                        <p:strVal val="visible"/>
-                                      </p:to>
-                                    </p:set>
-                                    <p:anim from="(-#ppt_w/2)" to="(#ppt_x)" calcmode="lin" valueType="num">
-                                      <p:cBhvr>
-                                        <p:cTn id="39" dur="600" fill="hold">
-                                          <p:stCondLst>
-                                            <p:cond delay="0"/>
-                                          </p:stCondLst>
-                                        </p:cTn>
-                                        <p:tgtEl>
-                                          <p:spTgt spid="14"/>
-                                        </p:tgtEl>
-                                        <p:attrNameLst>
-                                          <p:attrName>ppt_x</p:attrName>
-                                        </p:attrNameLst>
-                                      </p:cBhvr>
-                                    </p:anim>
-                                    <p:anim from="0" to="-1.0" calcmode="lin" valueType="num">
-                                      <p:cBhvr>
-                                        <p:cTn id="40" dur="200" decel="50000" autoRev="1" fill="hold">
-                                          <p:stCondLst>
-                                            <p:cond delay="600"/>
-                                          </p:stCondLst>
-                                        </p:cTn>
-                                        <p:tgtEl>
-                                          <p:spTgt spid="14"/>
-                                        </p:tgtEl>
-                                        <p:attrNameLst>
-                                          <p:attrName>xshear</p:attrName>
-                                        </p:attrNameLst>
-                                      </p:cBhvr>
-                                    </p:anim>
-                                    <p:animScale>
-                                      <p:cBhvr>
-                                        <p:cTn id="41" dur="200" decel="100000" autoRev="1" fill="hold">
-                                          <p:stCondLst>
-                                            <p:cond delay="600"/>
-                                          </p:stCondLst>
-                                        </p:cTn>
-                                        <p:tgtEl>
-                                          <p:spTgt spid="14"/>
-                                        </p:tgtEl>
-                                      </p:cBhvr>
-                                      <p:from x="100000" y="100000"/>
-                                      <p:to x="80000" y="100000"/>
-                                    </p:animScale>
-                                    <p:anim by="(#ppt_h/3+#ppt_w*0.1)" calcmode="lin" valueType="num">
-                                      <p:cBhvr additive="sum">
-                                        <p:cTn id="42" dur="200" decel="100000" autoRev="1" fill="hold">
-                                          <p:stCondLst>
-                                            <p:cond delay="600"/>
-                                          </p:stCondLst>
-                                        </p:cTn>
-                                        <p:tgtEl>
-                                          <p:spTgt spid="14"/>
-                                        </p:tgtEl>
-                                        <p:attrNameLst>
-                                          <p:attrName>ppt_x</p:attrName>
-                                        </p:attrNameLst>
-                                      </p:cBhvr>
-                                    </p:anim>
-                                  </p:childTnLst>
-                                </p:cTn>
-                              </p:par>
-                            </p:childTnLst>
-                          </p:cTn>
-                        </p:par>
-                      </p:childTnLst>
-                    </p:cTn>
-                  </p:par>
-                </p:childTnLst>
-              </p:cTn>
-              <p:prevCondLst>
-                <p:cond evt="onPrev" delay="0">
-                  <p:tgtEl>
-                    <p:sldTgt/>
-                  </p:tgtEl>
-                </p:cond>
-              </p:prevCondLst>
-              <p:nextCondLst>
-                <p:cond evt="onNext" delay="0">
-                  <p:tgtEl>
-                    <p:sldTgt/>
-                  </p:tgtEl>
-                </p:cond>
-              </p:nextCondLst>
-            </p:seq>
-          </p:childTnLst>
-        </p:cTn>
-      </p:par>
-    </p:tnLst>
-    <p:bldLst>
-      <p:bldP spid="6" grpId="0"/>
-      <p:bldP spid="8" grpId="0"/>
-      <p:bldP spid="10" grpId="0"/>
-      <p:bldP spid="12" grpId="0"/>
-      <p:bldP spid="14" grpId="0"/>
-    </p:bldLst>
   </p:timing>
 </p:sld>
 </file>
@@ -23948,12 +21120,12 @@
           <a:lstStyle/>
           <a:p>
             <a:r>
-              <a:rPr lang="en-US" sz="1600">
+              <a:rPr lang="en-US" sz="1600" dirty="0">
                 <a:solidFill>
                   <a:srgbClr val="000000"/>
                 </a:solidFill>
               </a:rPr>
-              <a:t>two variables move together in the data</a:t>
+              <a:t>two variables change together in the data</a:t>
             </a:r>
           </a:p>
         </p:txBody>
@@ -25088,8 +22260,8 @@
         </p:nvSpPr>
         <p:spPr>
           <a:xfrm>
-            <a:off x="762000" y="4597400"/>
-            <a:ext cx="10668000" cy="1320800"/>
+            <a:off x="762000" y="3590290"/>
+            <a:ext cx="10668000" cy="2454910"/>
           </a:xfrm>
           <a:prstGeom prst="roundRect">
             <a:avLst>
@@ -25126,7 +22298,7 @@
           <a:lstStyle/>
           <a:p>
             <a:r>
-              <a:rPr lang="en-US" sz="1600" b="1">
+              <a:rPr lang="en-US" sz="1600" b="1" dirty="0">
                 <a:solidFill>
                   <a:srgbClr val="C00000"/>
                 </a:solidFill>
@@ -25136,7 +22308,7 @@
           </a:p>
           <a:p>
             <a:r>
-              <a:rPr lang="en-US" sz="1600">
+              <a:rPr lang="en-US" sz="1600" dirty="0">
                 <a:solidFill>
                   <a:srgbClr val="000000"/>
                 </a:solidFill>
@@ -25146,12 +22318,56 @@
           </a:p>
           <a:p>
             <a:r>
-              <a:rPr lang="en-US" sz="1600">
+              <a:rPr lang="en-US" sz="1600" dirty="0">
                 <a:solidFill>
                   <a:srgbClr val="000000"/>
                 </a:solidFill>
               </a:rPr>
-              <a:t>not the hormones, lowered their heart risk. Random assignment balanced those differences out.</a:t>
+              <a:t>not the hormones, lowered their heart risk. Random assignment balanced those differences out in the 2002.</a:t>
+            </a:r>
+            <a:br>
+              <a:rPr lang="en-US" sz="1600" dirty="0">
+                <a:solidFill>
+                  <a:srgbClr val="000000"/>
+                </a:solidFill>
+              </a:rPr>
+            </a:br>
+            <a:br>
+              <a:rPr lang="en-US" sz="1600" dirty="0">
+                <a:solidFill>
+                  <a:srgbClr val="000000"/>
+                </a:solidFill>
+              </a:rPr>
+            </a:br>
+            <a:r>
+              <a:rPr lang="en-US" sz="1600" dirty="0">
+                <a:solidFill>
+                  <a:srgbClr val="000000"/>
+                </a:solidFill>
+              </a:rPr>
+              <a:t>The 2002 study however, did not have a representative population, nor did they consider dosage. This impacted their observations on cancer risk and heart disease risk. </a:t>
+            </a:r>
+            <a:br>
+              <a:rPr lang="en-US" sz="1600" dirty="0">
+                <a:solidFill>
+                  <a:srgbClr val="000000"/>
+                </a:solidFill>
+              </a:rPr>
+            </a:br>
+            <a:br>
+              <a:rPr lang="en-US" sz="1600" dirty="0">
+                <a:solidFill>
+                  <a:srgbClr val="000000"/>
+                </a:solidFill>
+              </a:rPr>
+            </a:br>
+            <a:r>
+              <a:rPr lang="en-US" sz="1600" dirty="0">
+                <a:solidFill>
+                  <a:srgbClr val="000000"/>
+                </a:solidFill>
+              </a:rPr>
+              <a:t>More recent research has shown that HRT lowers heart disease risk if taken, at an appropriate dosage, during perimenopause or within 10 years of menopause onset. </a:t>
             </a:r>
           </a:p>
         </p:txBody>

--- a/docs/lecture_slides/Week 5/Week5_Lecture10_Slides_9_23_2026.pptx
+++ b/docs/lecture_slides/Week 5/Week5_Lecture10_Slides_9_23_2026.pptx
@@ -286,7 +286,7 @@
           <a:p>
             <a:fld id="{06882561-BD16-4A95-ACA1-5204E478F2FE}" type="datetimeFigureOut">
               <a:rPr lang="en-US" smtClean="0"/>
-              <a:t>9/23/2026</a:t>
+              <a:t>9/24/2026</a:t>
             </a:fld>
             <a:endParaRPr lang="en-US"/>
           </a:p>
@@ -484,7 +484,7 @@
           <a:p>
             <a:fld id="{06882561-BD16-4A95-ACA1-5204E478F2FE}" type="datetimeFigureOut">
               <a:rPr lang="en-US" smtClean="0"/>
-              <a:t>9/23/2026</a:t>
+              <a:t>9/24/2026</a:t>
             </a:fld>
             <a:endParaRPr lang="en-US"/>
           </a:p>
@@ -692,7 +692,7 @@
           <a:p>
             <a:fld id="{06882561-BD16-4A95-ACA1-5204E478F2FE}" type="datetimeFigureOut">
               <a:rPr lang="en-US" smtClean="0"/>
-              <a:t>9/23/2026</a:t>
+              <a:t>9/24/2026</a:t>
             </a:fld>
             <a:endParaRPr lang="en-US"/>
           </a:p>
@@ -890,7 +890,7 @@
           <a:p>
             <a:fld id="{06882561-BD16-4A95-ACA1-5204E478F2FE}" type="datetimeFigureOut">
               <a:rPr lang="en-US" smtClean="0"/>
-              <a:t>9/23/2026</a:t>
+              <a:t>9/24/2026</a:t>
             </a:fld>
             <a:endParaRPr lang="en-US"/>
           </a:p>
@@ -1165,7 +1165,7 @@
           <a:p>
             <a:fld id="{06882561-BD16-4A95-ACA1-5204E478F2FE}" type="datetimeFigureOut">
               <a:rPr lang="en-US" smtClean="0"/>
-              <a:t>9/23/2026</a:t>
+              <a:t>9/24/2026</a:t>
             </a:fld>
             <a:endParaRPr lang="en-US"/>
           </a:p>
@@ -1430,7 +1430,7 @@
           <a:p>
             <a:fld id="{06882561-BD16-4A95-ACA1-5204E478F2FE}" type="datetimeFigureOut">
               <a:rPr lang="en-US" smtClean="0"/>
-              <a:t>9/23/2026</a:t>
+              <a:t>9/24/2026</a:t>
             </a:fld>
             <a:endParaRPr lang="en-US"/>
           </a:p>
@@ -1842,7 +1842,7 @@
           <a:p>
             <a:fld id="{06882561-BD16-4A95-ACA1-5204E478F2FE}" type="datetimeFigureOut">
               <a:rPr lang="en-US" smtClean="0"/>
-              <a:t>9/23/2026</a:t>
+              <a:t>9/24/2026</a:t>
             </a:fld>
             <a:endParaRPr lang="en-US"/>
           </a:p>
@@ -1983,7 +1983,7 @@
           <a:p>
             <a:fld id="{06882561-BD16-4A95-ACA1-5204E478F2FE}" type="datetimeFigureOut">
               <a:rPr lang="en-US" smtClean="0"/>
-              <a:t>9/23/2026</a:t>
+              <a:t>9/24/2026</a:t>
             </a:fld>
             <a:endParaRPr lang="en-US"/>
           </a:p>
@@ -2096,7 +2096,7 @@
           <a:p>
             <a:fld id="{06882561-BD16-4A95-ACA1-5204E478F2FE}" type="datetimeFigureOut">
               <a:rPr lang="en-US" smtClean="0"/>
-              <a:t>9/23/2026</a:t>
+              <a:t>9/24/2026</a:t>
             </a:fld>
             <a:endParaRPr lang="en-US"/>
           </a:p>
@@ -2407,7 +2407,7 @@
           <a:p>
             <a:fld id="{06882561-BD16-4A95-ACA1-5204E478F2FE}" type="datetimeFigureOut">
               <a:rPr lang="en-US" smtClean="0"/>
-              <a:t>9/23/2026</a:t>
+              <a:t>9/24/2026</a:t>
             </a:fld>
             <a:endParaRPr lang="en-US"/>
           </a:p>
@@ -2695,7 +2695,7 @@
           <a:p>
             <a:fld id="{06882561-BD16-4A95-ACA1-5204E478F2FE}" type="datetimeFigureOut">
               <a:rPr lang="en-US" smtClean="0"/>
-              <a:t>9/23/2026</a:t>
+              <a:t>9/24/2026</a:t>
             </a:fld>
             <a:endParaRPr lang="en-US"/>
           </a:p>
@@ -2936,7 +2936,7 @@
           <a:p>
             <a:fld id="{06882561-BD16-4A95-ACA1-5204E478F2FE}" type="datetimeFigureOut">
               <a:rPr lang="en-US" smtClean="0"/>
-              <a:t>9/23/2026</a:t>
+              <a:t>9/24/2026</a:t>
             </a:fld>
             <a:endParaRPr lang="en-US"/>
           </a:p>
@@ -7435,7 +7435,7 @@
         <p:spPr>
           <a:xfrm>
             <a:off x="762000" y="1841499"/>
-            <a:ext cx="10668000" cy="589280"/>
+            <a:ext cx="10668000" cy="584775"/>
           </a:xfrm>
           <a:prstGeom prst="rect">
             <a:avLst/>
@@ -7444,7 +7444,7 @@
         </p:spPr>
         <p:txBody>
           <a:bodyPr vert="horz" wrap="square" rtlCol="0">
-            <a:noAutofit/>
+            <a:spAutoFit/>
           </a:bodyPr>
           <a:lstStyle/>
           <a:p>
@@ -7459,7 +7459,7 @@
                   <a:srgbClr val="000000"/>
                 </a:solidFill>
               </a:rPr>
-              <a:t>VITAL randomly assigned 25,871 U.S. adults to vitamin D (2,000 IU a day) or a placebo, AND to omega-3 fish oil (1 g a day) or a placebo, then followed them for about 5 years.</a:t>
+              <a:t>VITAL randomly assigned 25,871 U.S. adults to vitamin D (2,000 IU a day) or a placebo, AND to omega-3 fish oil (1 g a day) or a placebo - nobody knew who got what - then followed them for about 5 years.</a:t>
             </a:r>
           </a:p>
         </p:txBody>
@@ -7478,7 +7478,7 @@
         </p:nvSpPr>
         <p:spPr>
           <a:xfrm>
-            <a:off x="762000" y="2557780"/>
+            <a:off x="762000" y="2578674"/>
             <a:ext cx="10668000" cy="345440"/>
           </a:xfrm>
           <a:prstGeom prst="rect">
@@ -7488,7 +7488,7 @@
         </p:spPr>
         <p:txBody>
           <a:bodyPr vert="horz" wrap="square" rtlCol="0">
-            <a:noAutofit/>
+            <a:spAutoFit/>
           </a:bodyPr>
           <a:lstStyle/>
           <a:p>
@@ -7526,7 +7526,7 @@
         </p:nvSpPr>
         <p:spPr>
           <a:xfrm>
-            <a:off x="1117600" y="2852420"/>
+            <a:off x="1117600" y="2936814"/>
             <a:ext cx="10312400" cy="345440"/>
           </a:xfrm>
           <a:prstGeom prst="rect">
@@ -7536,7 +7536,7 @@
         </p:spPr>
         <p:txBody>
           <a:bodyPr vert="horz" wrap="square" rtlCol="0">
-            <a:noAutofit/>
+            <a:spAutoFit/>
           </a:bodyPr>
           <a:lstStyle/>
           <a:p>
@@ -7565,7 +7565,7 @@
         </p:nvSpPr>
         <p:spPr>
           <a:xfrm>
-            <a:off x="762000" y="3350260"/>
+            <a:off x="762000" y="3383854"/>
             <a:ext cx="10668000" cy="345440"/>
           </a:xfrm>
           <a:prstGeom prst="rect">
@@ -7575,7 +7575,7 @@
         </p:spPr>
         <p:txBody>
           <a:bodyPr vert="horz" wrap="square" rtlCol="0">
-            <a:noAutofit/>
+            <a:spAutoFit/>
           </a:bodyPr>
           <a:lstStyle/>
           <a:p>
@@ -7613,7 +7613,7 @@
         </p:nvSpPr>
         <p:spPr>
           <a:xfrm>
-            <a:off x="1117600" y="3644900"/>
+            <a:off x="1117600" y="3741994"/>
             <a:ext cx="10312400" cy="345440"/>
           </a:xfrm>
           <a:prstGeom prst="rect">
@@ -7623,7 +7623,7 @@
         </p:spPr>
         <p:txBody>
           <a:bodyPr vert="horz" wrap="square" rtlCol="0">
-            <a:noAutofit/>
+            <a:spAutoFit/>
           </a:bodyPr>
           <a:lstStyle/>
           <a:p>
@@ -7652,7 +7652,7 @@
         </p:nvSpPr>
         <p:spPr>
           <a:xfrm>
-            <a:off x="762000" y="4142740"/>
+            <a:off x="762000" y="4189034"/>
             <a:ext cx="10668000" cy="345440"/>
           </a:xfrm>
           <a:prstGeom prst="rect">
@@ -7662,7 +7662,7 @@
         </p:spPr>
         <p:txBody>
           <a:bodyPr vert="horz" wrap="square" rtlCol="0">
-            <a:noAutofit/>
+            <a:spAutoFit/>
           </a:bodyPr>
           <a:lstStyle/>
           <a:p>
@@ -7700,7 +7700,7 @@
         </p:nvSpPr>
         <p:spPr>
           <a:xfrm>
-            <a:off x="1117600" y="4437380"/>
+            <a:off x="1117600" y="4547174"/>
             <a:ext cx="10312400" cy="345440"/>
           </a:xfrm>
           <a:prstGeom prst="rect">
@@ -7710,7 +7710,7 @@
         </p:spPr>
         <p:txBody>
           <a:bodyPr vert="horz" wrap="square" rtlCol="0">
-            <a:noAutofit/>
+            <a:spAutoFit/>
           </a:bodyPr>
           <a:lstStyle/>
           <a:p>
@@ -7739,7 +7739,7 @@
         </p:nvSpPr>
         <p:spPr>
           <a:xfrm>
-            <a:off x="762000" y="4935220"/>
+            <a:off x="762000" y="4994214"/>
             <a:ext cx="10668000" cy="345440"/>
           </a:xfrm>
           <a:prstGeom prst="rect">
@@ -7749,7 +7749,7 @@
         </p:spPr>
         <p:txBody>
           <a:bodyPr vert="horz" wrap="square" rtlCol="0">
-            <a:noAutofit/>
+            <a:spAutoFit/>
           </a:bodyPr>
           <a:lstStyle/>
           <a:p>
@@ -7768,7 +7768,7 @@
                   <a:srgbClr val="000000"/>
                 </a:solidFill>
               </a:rPr>
-              <a:t>  What happened?</a:t>
+              <a:t>  What kind of design is this, and is it blinded?</a:t>
             </a:r>
           </a:p>
         </p:txBody>
@@ -7787,8 +7787,8 @@
         </p:nvSpPr>
         <p:spPr>
           <a:xfrm>
-            <a:off x="1117600" y="5229860"/>
-            <a:ext cx="10312400" cy="345440"/>
+            <a:off x="1117600" y="5352354"/>
+            <a:ext cx="10312400" cy="584775"/>
           </a:xfrm>
           <a:prstGeom prst="rect">
             <a:avLst/>
@@ -7797,7 +7797,7 @@
         </p:spPr>
         <p:txBody>
           <a:bodyPr vert="horz" wrap="square" rtlCol="0">
-            <a:noAutofit/>
+            <a:spAutoFit/>
           </a:bodyPr>
           <a:lstStyle/>
           <a:p>
@@ -7807,7 +7807,7 @@
                   <a:srgbClr val="C00000"/>
                 </a:solidFill>
               </a:rPr>
-              <a:t>Neither supplement lowered the rate of invasive cancer or of major cardiovascular events.</a:t>
+              <a:t>A completely randomized 2 x 2 factorial design, double blind and placebo controlled. Neither supplement lowered the rate of invasive cancer or of major cardiovascular events.</a:t>
             </a:r>
           </a:p>
         </p:txBody>
